--- a/Slides-Day1.pptx
+++ b/Slides-Day1.pptx
@@ -4,24 +4,33 @@
   <p:sldMasterIdLst>
     <p:sldMasterId id="2147483648" r:id="rId1"/>
   </p:sldMasterIdLst>
+  <p:notesMasterIdLst>
+    <p:notesMasterId r:id="rId25"/>
+  </p:notesMasterIdLst>
   <p:sldIdLst>
     <p:sldId id="277" r:id="rId2"/>
     <p:sldId id="257" r:id="rId3"/>
-    <p:sldId id="261" r:id="rId4"/>
-    <p:sldId id="266" r:id="rId5"/>
-    <p:sldId id="262" r:id="rId6"/>
-    <p:sldId id="268" r:id="rId7"/>
-    <p:sldId id="263" r:id="rId8"/>
-    <p:sldId id="269" r:id="rId9"/>
-    <p:sldId id="264" r:id="rId10"/>
-    <p:sldId id="270" r:id="rId11"/>
-    <p:sldId id="265" r:id="rId12"/>
-    <p:sldId id="271" r:id="rId13"/>
-    <p:sldId id="272" r:id="rId14"/>
-    <p:sldId id="274" r:id="rId15"/>
-    <p:sldId id="276" r:id="rId16"/>
-    <p:sldId id="273" r:id="rId17"/>
-    <p:sldId id="275" r:id="rId18"/>
+    <p:sldId id="278" r:id="rId4"/>
+    <p:sldId id="261" r:id="rId5"/>
+    <p:sldId id="279" r:id="rId6"/>
+    <p:sldId id="266" r:id="rId7"/>
+    <p:sldId id="280" r:id="rId8"/>
+    <p:sldId id="281" r:id="rId9"/>
+    <p:sldId id="283" r:id="rId10"/>
+    <p:sldId id="282" r:id="rId11"/>
+    <p:sldId id="262" r:id="rId12"/>
+    <p:sldId id="268" r:id="rId13"/>
+    <p:sldId id="263" r:id="rId14"/>
+    <p:sldId id="269" r:id="rId15"/>
+    <p:sldId id="264" r:id="rId16"/>
+    <p:sldId id="270" r:id="rId17"/>
+    <p:sldId id="265" r:id="rId18"/>
+    <p:sldId id="271" r:id="rId19"/>
+    <p:sldId id="272" r:id="rId20"/>
+    <p:sldId id="274" r:id="rId21"/>
+    <p:sldId id="276" r:id="rId22"/>
+    <p:sldId id="273" r:id="rId23"/>
+    <p:sldId id="275" r:id="rId24"/>
   </p:sldIdLst>
   <p:sldSz cx="12192000" cy="6858000"/>
   <p:notesSz cx="6858000" cy="9144000"/>
@@ -128,6 +137,672 @@
 </p:presentation>
 </file>
 
+<file path=ppt/notesMasters/notesMaster1.xml><?xml version="1.0" encoding="utf-8"?>
+<p:notesMaster xmlns:a="http://schemas.openxmlformats.org/drawingml/2006/main" xmlns:r="http://schemas.openxmlformats.org/officeDocument/2006/relationships" xmlns:p="http://schemas.openxmlformats.org/presentationml/2006/main">
+  <p:cSld>
+    <p:bg>
+      <p:bgRef idx="1001">
+        <a:schemeClr val="bg1"/>
+      </p:bgRef>
+    </p:bg>
+    <p:spTree>
+      <p:nvGrpSpPr>
+        <p:cNvPr id="1" name=""/>
+        <p:cNvGrpSpPr/>
+        <p:nvPr/>
+      </p:nvGrpSpPr>
+      <p:grpSpPr>
+        <a:xfrm>
+          <a:off x="0" y="0"/>
+          <a:ext cx="0" cy="0"/>
+          <a:chOff x="0" y="0"/>
+          <a:chExt cx="0" cy="0"/>
+        </a:xfrm>
+      </p:grpSpPr>
+      <p:sp>
+        <p:nvSpPr>
+          <p:cNvPr id="2" name="Header Placeholder 1"/>
+          <p:cNvSpPr>
+            <a:spLocks noGrp="1"/>
+          </p:cNvSpPr>
+          <p:nvPr>
+            <p:ph type="hdr" sz="quarter"/>
+          </p:nvPr>
+        </p:nvSpPr>
+        <p:spPr>
+          <a:xfrm>
+            <a:off x="0" y="0"/>
+            <a:ext cx="2971800" cy="458788"/>
+          </a:xfrm>
+          <a:prstGeom prst="rect">
+            <a:avLst/>
+          </a:prstGeom>
+        </p:spPr>
+        <p:txBody>
+          <a:bodyPr vert="horz" lIns="91440" tIns="45720" rIns="91440" bIns="45720" rtlCol="0"/>
+          <a:lstStyle>
+            <a:lvl1pPr algn="l">
+              <a:defRPr sz="1200"/>
+            </a:lvl1pPr>
+          </a:lstStyle>
+          <a:p>
+            <a:endParaRPr lang="en-US"/>
+          </a:p>
+        </p:txBody>
+      </p:sp>
+      <p:sp>
+        <p:nvSpPr>
+          <p:cNvPr id="3" name="Date Placeholder 2"/>
+          <p:cNvSpPr>
+            <a:spLocks noGrp="1"/>
+          </p:cNvSpPr>
+          <p:nvPr>
+            <p:ph type="dt" idx="1"/>
+          </p:nvPr>
+        </p:nvSpPr>
+        <p:spPr>
+          <a:xfrm>
+            <a:off x="3884613" y="0"/>
+            <a:ext cx="2971800" cy="458788"/>
+          </a:xfrm>
+          <a:prstGeom prst="rect">
+            <a:avLst/>
+          </a:prstGeom>
+        </p:spPr>
+        <p:txBody>
+          <a:bodyPr vert="horz" lIns="91440" tIns="45720" rIns="91440" bIns="45720" rtlCol="0"/>
+          <a:lstStyle>
+            <a:lvl1pPr algn="r">
+              <a:defRPr sz="1200"/>
+            </a:lvl1pPr>
+          </a:lstStyle>
+          <a:p>
+            <a:fld id="{826287C1-7E9C-4D69-8005-B03B9EFC4376}" type="datetimeFigureOut">
+              <a:rPr lang="en-US" smtClean="0"/>
+              <a:t>2/23/2025</a:t>
+            </a:fld>
+            <a:endParaRPr lang="en-US"/>
+          </a:p>
+        </p:txBody>
+      </p:sp>
+      <p:sp>
+        <p:nvSpPr>
+          <p:cNvPr id="4" name="Slide Image Placeholder 3"/>
+          <p:cNvSpPr>
+            <a:spLocks noGrp="1" noRot="1" noChangeAspect="1"/>
+          </p:cNvSpPr>
+          <p:nvPr>
+            <p:ph type="sldImg" idx="2"/>
+          </p:nvPr>
+        </p:nvSpPr>
+        <p:spPr>
+          <a:xfrm>
+            <a:off x="685800" y="1143000"/>
+            <a:ext cx="5486400" cy="3086100"/>
+          </a:xfrm>
+          <a:prstGeom prst="rect">
+            <a:avLst/>
+          </a:prstGeom>
+          <a:noFill/>
+          <a:ln w="12700">
+            <a:solidFill>
+              <a:prstClr val="black"/>
+            </a:solidFill>
+          </a:ln>
+        </p:spPr>
+        <p:txBody>
+          <a:bodyPr vert="horz" lIns="91440" tIns="45720" rIns="91440" bIns="45720" rtlCol="0" anchor="ctr"/>
+          <a:lstStyle/>
+          <a:p>
+            <a:endParaRPr lang="en-US"/>
+          </a:p>
+        </p:txBody>
+      </p:sp>
+      <p:sp>
+        <p:nvSpPr>
+          <p:cNvPr id="5" name="Notes Placeholder 4"/>
+          <p:cNvSpPr>
+            <a:spLocks noGrp="1"/>
+          </p:cNvSpPr>
+          <p:nvPr>
+            <p:ph type="body" sz="quarter" idx="3"/>
+          </p:nvPr>
+        </p:nvSpPr>
+        <p:spPr>
+          <a:xfrm>
+            <a:off x="685800" y="4400550"/>
+            <a:ext cx="5486400" cy="3600450"/>
+          </a:xfrm>
+          <a:prstGeom prst="rect">
+            <a:avLst/>
+          </a:prstGeom>
+        </p:spPr>
+        <p:txBody>
+          <a:bodyPr vert="horz" lIns="91440" tIns="45720" rIns="91440" bIns="45720" rtlCol="0"/>
+          <a:lstStyle/>
+          <a:p>
+            <a:pPr lvl="0"/>
+            <a:r>
+              <a:rPr lang="en-US"/>
+              <a:t>Click to edit Master text styles</a:t>
+            </a:r>
+          </a:p>
+          <a:p>
+            <a:pPr lvl="1"/>
+            <a:r>
+              <a:rPr lang="en-US"/>
+              <a:t>Second level</a:t>
+            </a:r>
+          </a:p>
+          <a:p>
+            <a:pPr lvl="2"/>
+            <a:r>
+              <a:rPr lang="en-US"/>
+              <a:t>Third level</a:t>
+            </a:r>
+          </a:p>
+          <a:p>
+            <a:pPr lvl="3"/>
+            <a:r>
+              <a:rPr lang="en-US"/>
+              <a:t>Fourth level</a:t>
+            </a:r>
+          </a:p>
+          <a:p>
+            <a:pPr lvl="4"/>
+            <a:r>
+              <a:rPr lang="en-US"/>
+              <a:t>Fifth level</a:t>
+            </a:r>
+          </a:p>
+        </p:txBody>
+      </p:sp>
+      <p:sp>
+        <p:nvSpPr>
+          <p:cNvPr id="6" name="Footer Placeholder 5"/>
+          <p:cNvSpPr>
+            <a:spLocks noGrp="1"/>
+          </p:cNvSpPr>
+          <p:nvPr>
+            <p:ph type="ftr" sz="quarter" idx="4"/>
+          </p:nvPr>
+        </p:nvSpPr>
+        <p:spPr>
+          <a:xfrm>
+            <a:off x="0" y="8685213"/>
+            <a:ext cx="2971800" cy="458787"/>
+          </a:xfrm>
+          <a:prstGeom prst="rect">
+            <a:avLst/>
+          </a:prstGeom>
+        </p:spPr>
+        <p:txBody>
+          <a:bodyPr vert="horz" lIns="91440" tIns="45720" rIns="91440" bIns="45720" rtlCol="0" anchor="b"/>
+          <a:lstStyle>
+            <a:lvl1pPr algn="l">
+              <a:defRPr sz="1200"/>
+            </a:lvl1pPr>
+          </a:lstStyle>
+          <a:p>
+            <a:endParaRPr lang="en-US"/>
+          </a:p>
+        </p:txBody>
+      </p:sp>
+      <p:sp>
+        <p:nvSpPr>
+          <p:cNvPr id="7" name="Slide Number Placeholder 6"/>
+          <p:cNvSpPr>
+            <a:spLocks noGrp="1"/>
+          </p:cNvSpPr>
+          <p:nvPr>
+            <p:ph type="sldNum" sz="quarter" idx="5"/>
+          </p:nvPr>
+        </p:nvSpPr>
+        <p:spPr>
+          <a:xfrm>
+            <a:off x="3884613" y="8685213"/>
+            <a:ext cx="2971800" cy="458787"/>
+          </a:xfrm>
+          <a:prstGeom prst="rect">
+            <a:avLst/>
+          </a:prstGeom>
+        </p:spPr>
+        <p:txBody>
+          <a:bodyPr vert="horz" lIns="91440" tIns="45720" rIns="91440" bIns="45720" rtlCol="0" anchor="b"/>
+          <a:lstStyle>
+            <a:lvl1pPr algn="r">
+              <a:defRPr sz="1200"/>
+            </a:lvl1pPr>
+          </a:lstStyle>
+          <a:p>
+            <a:fld id="{B571A709-7DB7-492E-B774-C30A7044C218}" type="slidenum">
+              <a:rPr lang="en-US" smtClean="0"/>
+              <a:t>‹#›</a:t>
+            </a:fld>
+            <a:endParaRPr lang="en-US"/>
+          </a:p>
+        </p:txBody>
+      </p:sp>
+    </p:spTree>
+    <p:extLst>
+      <p:ext uri="{BB962C8B-B14F-4D97-AF65-F5344CB8AC3E}">
+        <p14:creationId xmlns:p14="http://schemas.microsoft.com/office/powerpoint/2010/main" val="1778854323"/>
+      </p:ext>
+    </p:extLst>
+  </p:cSld>
+  <p:clrMap bg1="lt1" tx1="dk1" bg2="lt2" tx2="dk2" accent1="accent1" accent2="accent2" accent3="accent3" accent4="accent4" accent5="accent5" accent6="accent6" hlink="hlink" folHlink="folHlink"/>
+  <p:notesStyle>
+    <a:lvl1pPr marL="0" algn="l" defTabSz="914400" rtl="0" eaLnBrk="1" latinLnBrk="0" hangingPunct="1">
+      <a:defRPr sz="1200" kern="1200">
+        <a:solidFill>
+          <a:schemeClr val="tx1"/>
+        </a:solidFill>
+        <a:latin typeface="+mn-lt"/>
+        <a:ea typeface="+mn-ea"/>
+        <a:cs typeface="+mn-cs"/>
+      </a:defRPr>
+    </a:lvl1pPr>
+    <a:lvl2pPr marL="457200" algn="l" defTabSz="914400" rtl="0" eaLnBrk="1" latinLnBrk="0" hangingPunct="1">
+      <a:defRPr sz="1200" kern="1200">
+        <a:solidFill>
+          <a:schemeClr val="tx1"/>
+        </a:solidFill>
+        <a:latin typeface="+mn-lt"/>
+        <a:ea typeface="+mn-ea"/>
+        <a:cs typeface="+mn-cs"/>
+      </a:defRPr>
+    </a:lvl2pPr>
+    <a:lvl3pPr marL="914400" algn="l" defTabSz="914400" rtl="0" eaLnBrk="1" latinLnBrk="0" hangingPunct="1">
+      <a:defRPr sz="1200" kern="1200">
+        <a:solidFill>
+          <a:schemeClr val="tx1"/>
+        </a:solidFill>
+        <a:latin typeface="+mn-lt"/>
+        <a:ea typeface="+mn-ea"/>
+        <a:cs typeface="+mn-cs"/>
+      </a:defRPr>
+    </a:lvl3pPr>
+    <a:lvl4pPr marL="1371600" algn="l" defTabSz="914400" rtl="0" eaLnBrk="1" latinLnBrk="0" hangingPunct="1">
+      <a:defRPr sz="1200" kern="1200">
+        <a:solidFill>
+          <a:schemeClr val="tx1"/>
+        </a:solidFill>
+        <a:latin typeface="+mn-lt"/>
+        <a:ea typeface="+mn-ea"/>
+        <a:cs typeface="+mn-cs"/>
+      </a:defRPr>
+    </a:lvl4pPr>
+    <a:lvl5pPr marL="1828800" algn="l" defTabSz="914400" rtl="0" eaLnBrk="1" latinLnBrk="0" hangingPunct="1">
+      <a:defRPr sz="1200" kern="1200">
+        <a:solidFill>
+          <a:schemeClr val="tx1"/>
+        </a:solidFill>
+        <a:latin typeface="+mn-lt"/>
+        <a:ea typeface="+mn-ea"/>
+        <a:cs typeface="+mn-cs"/>
+      </a:defRPr>
+    </a:lvl5pPr>
+    <a:lvl6pPr marL="2286000" algn="l" defTabSz="914400" rtl="0" eaLnBrk="1" latinLnBrk="0" hangingPunct="1">
+      <a:defRPr sz="1200" kern="1200">
+        <a:solidFill>
+          <a:schemeClr val="tx1"/>
+        </a:solidFill>
+        <a:latin typeface="+mn-lt"/>
+        <a:ea typeface="+mn-ea"/>
+        <a:cs typeface="+mn-cs"/>
+      </a:defRPr>
+    </a:lvl6pPr>
+    <a:lvl7pPr marL="2743200" algn="l" defTabSz="914400" rtl="0" eaLnBrk="1" latinLnBrk="0" hangingPunct="1">
+      <a:defRPr sz="1200" kern="1200">
+        <a:solidFill>
+          <a:schemeClr val="tx1"/>
+        </a:solidFill>
+        <a:latin typeface="+mn-lt"/>
+        <a:ea typeface="+mn-ea"/>
+        <a:cs typeface="+mn-cs"/>
+      </a:defRPr>
+    </a:lvl7pPr>
+    <a:lvl8pPr marL="3200400" algn="l" defTabSz="914400" rtl="0" eaLnBrk="1" latinLnBrk="0" hangingPunct="1">
+      <a:defRPr sz="1200" kern="1200">
+        <a:solidFill>
+          <a:schemeClr val="tx1"/>
+        </a:solidFill>
+        <a:latin typeface="+mn-lt"/>
+        <a:ea typeface="+mn-ea"/>
+        <a:cs typeface="+mn-cs"/>
+      </a:defRPr>
+    </a:lvl8pPr>
+    <a:lvl9pPr marL="3657600" algn="l" defTabSz="914400" rtl="0" eaLnBrk="1" latinLnBrk="0" hangingPunct="1">
+      <a:defRPr sz="1200" kern="1200">
+        <a:solidFill>
+          <a:schemeClr val="tx1"/>
+        </a:solidFill>
+        <a:latin typeface="+mn-lt"/>
+        <a:ea typeface="+mn-ea"/>
+        <a:cs typeface="+mn-cs"/>
+      </a:defRPr>
+    </a:lvl9pPr>
+  </p:notesStyle>
+</p:notesMaster>
+</file>
+
+<file path=ppt/notesSlides/notesSlide1.xml><?xml version="1.0" encoding="utf-8"?>
+<p:notes xmlns:a="http://schemas.openxmlformats.org/drawingml/2006/main" xmlns:r="http://schemas.openxmlformats.org/officeDocument/2006/relationships" xmlns:p="http://schemas.openxmlformats.org/presentationml/2006/main">
+  <p:cSld>
+    <p:spTree>
+      <p:nvGrpSpPr>
+        <p:cNvPr id="1" name="">
+          <a:extLst>
+            <a:ext uri="{FF2B5EF4-FFF2-40B4-BE49-F238E27FC236}">
+              <a16:creationId xmlns:a16="http://schemas.microsoft.com/office/drawing/2014/main" id="{D2B7D1C1-3107-3E97-F25E-607F52248E60}"/>
+            </a:ext>
+          </a:extLst>
+        </p:cNvPr>
+        <p:cNvGrpSpPr/>
+        <p:nvPr/>
+      </p:nvGrpSpPr>
+      <p:grpSpPr>
+        <a:xfrm>
+          <a:off x="0" y="0"/>
+          <a:ext cx="0" cy="0"/>
+          <a:chOff x="0" y="0"/>
+          <a:chExt cx="0" cy="0"/>
+        </a:xfrm>
+      </p:grpSpPr>
+      <p:sp>
+        <p:nvSpPr>
+          <p:cNvPr id="2" name="Slide Image Placeholder 1">
+            <a:extLst>
+              <a:ext uri="{FF2B5EF4-FFF2-40B4-BE49-F238E27FC236}">
+                <a16:creationId xmlns:a16="http://schemas.microsoft.com/office/drawing/2014/main" id="{3289A905-D6BD-1970-CFB7-B5DC6B981907}"/>
+              </a:ext>
+            </a:extLst>
+          </p:cNvPr>
+          <p:cNvSpPr>
+            <a:spLocks noGrp="1" noRot="1" noChangeAspect="1"/>
+          </p:cNvSpPr>
+          <p:nvPr>
+            <p:ph type="sldImg"/>
+          </p:nvPr>
+        </p:nvSpPr>
+        <p:spPr/>
+      </p:sp>
+      <p:sp>
+        <p:nvSpPr>
+          <p:cNvPr id="3" name="Notes Placeholder 2">
+            <a:extLst>
+              <a:ext uri="{FF2B5EF4-FFF2-40B4-BE49-F238E27FC236}">
+                <a16:creationId xmlns:a16="http://schemas.microsoft.com/office/drawing/2014/main" id="{2D9D940D-ECEC-007D-83D0-71609C3D62A9}"/>
+              </a:ext>
+            </a:extLst>
+          </p:cNvPr>
+          <p:cNvSpPr>
+            <a:spLocks noGrp="1"/>
+          </p:cNvSpPr>
+          <p:nvPr>
+            <p:ph type="body" idx="1"/>
+          </p:nvPr>
+        </p:nvSpPr>
+        <p:spPr/>
+        <p:txBody>
+          <a:bodyPr/>
+          <a:lstStyle/>
+          <a:p>
+            <a:pPr marL="0" marR="0" lvl="0" indent="0" algn="l" defTabSz="914400" rtl="0" eaLnBrk="1" fontAlgn="auto" latinLnBrk="0" hangingPunct="1">
+              <a:lnSpc>
+                <a:spcPct val="100000"/>
+              </a:lnSpc>
+              <a:spcBef>
+                <a:spcPts val="0"/>
+              </a:spcBef>
+              <a:spcAft>
+                <a:spcPts val="0"/>
+              </a:spcAft>
+              <a:buClrTx/>
+              <a:buSzTx/>
+              <a:buFontTx/>
+              <a:buNone/>
+              <a:tabLst/>
+              <a:defRPr/>
+            </a:pPr>
+            <a:endParaRPr lang="en-US"/>
+          </a:p>
+        </p:txBody>
+      </p:sp>
+      <p:sp>
+        <p:nvSpPr>
+          <p:cNvPr id="4" name="Slide Number Placeholder 3">
+            <a:extLst>
+              <a:ext uri="{FF2B5EF4-FFF2-40B4-BE49-F238E27FC236}">
+                <a16:creationId xmlns:a16="http://schemas.microsoft.com/office/drawing/2014/main" id="{A589DDCD-B7F4-3725-A412-78733E3CE91A}"/>
+              </a:ext>
+            </a:extLst>
+          </p:cNvPr>
+          <p:cNvSpPr>
+            <a:spLocks noGrp="1"/>
+          </p:cNvSpPr>
+          <p:nvPr>
+            <p:ph type="sldNum" sz="quarter" idx="5"/>
+          </p:nvPr>
+        </p:nvSpPr>
+        <p:spPr/>
+        <p:txBody>
+          <a:bodyPr/>
+          <a:lstStyle/>
+          <a:p>
+            <a:fld id="{B571A709-7DB7-492E-B774-C30A7044C218}" type="slidenum">
+              <a:rPr lang="en-US" smtClean="0"/>
+              <a:t>3</a:t>
+            </a:fld>
+            <a:endParaRPr lang="en-US"/>
+          </a:p>
+        </p:txBody>
+      </p:sp>
+    </p:spTree>
+    <p:extLst>
+      <p:ext uri="{BB962C8B-B14F-4D97-AF65-F5344CB8AC3E}">
+        <p14:creationId xmlns:p14="http://schemas.microsoft.com/office/powerpoint/2010/main" val="3166776564"/>
+      </p:ext>
+    </p:extLst>
+  </p:cSld>
+  <p:clrMapOvr>
+    <a:masterClrMapping/>
+  </p:clrMapOvr>
+</p:notes>
+</file>
+
+<file path=ppt/notesSlides/notesSlide2.xml><?xml version="1.0" encoding="utf-8"?>
+<p:notes xmlns:a="http://schemas.openxmlformats.org/drawingml/2006/main" xmlns:r="http://schemas.openxmlformats.org/officeDocument/2006/relationships" xmlns:p="http://schemas.openxmlformats.org/presentationml/2006/main">
+  <p:cSld>
+    <p:spTree>
+      <p:nvGrpSpPr>
+        <p:cNvPr id="1" name=""/>
+        <p:cNvGrpSpPr/>
+        <p:nvPr/>
+      </p:nvGrpSpPr>
+      <p:grpSpPr>
+        <a:xfrm>
+          <a:off x="0" y="0"/>
+          <a:ext cx="0" cy="0"/>
+          <a:chOff x="0" y="0"/>
+          <a:chExt cx="0" cy="0"/>
+        </a:xfrm>
+      </p:grpSpPr>
+      <p:sp>
+        <p:nvSpPr>
+          <p:cNvPr id="2" name="Slide Image Placeholder 1"/>
+          <p:cNvSpPr>
+            <a:spLocks noGrp="1" noRot="1" noChangeAspect="1"/>
+          </p:cNvSpPr>
+          <p:nvPr>
+            <p:ph type="sldImg"/>
+          </p:nvPr>
+        </p:nvSpPr>
+        <p:spPr/>
+      </p:sp>
+      <p:sp>
+        <p:nvSpPr>
+          <p:cNvPr id="3" name="Notes Placeholder 2"/>
+          <p:cNvSpPr>
+            <a:spLocks noGrp="1"/>
+          </p:cNvSpPr>
+          <p:nvPr>
+            <p:ph type="body" idx="1"/>
+          </p:nvPr>
+        </p:nvSpPr>
+        <p:spPr/>
+        <p:txBody>
+          <a:bodyPr/>
+          <a:lstStyle/>
+          <a:p>
+            <a:endParaRPr lang="en-US"/>
+          </a:p>
+        </p:txBody>
+      </p:sp>
+      <p:sp>
+        <p:nvSpPr>
+          <p:cNvPr id="4" name="Slide Number Placeholder 3"/>
+          <p:cNvSpPr>
+            <a:spLocks noGrp="1"/>
+          </p:cNvSpPr>
+          <p:nvPr>
+            <p:ph type="sldNum" sz="quarter" idx="5"/>
+          </p:nvPr>
+        </p:nvSpPr>
+        <p:spPr/>
+        <p:txBody>
+          <a:bodyPr/>
+          <a:lstStyle/>
+          <a:p>
+            <a:fld id="{B571A709-7DB7-492E-B774-C30A7044C218}" type="slidenum">
+              <a:rPr lang="en-US" smtClean="0"/>
+              <a:t>4</a:t>
+            </a:fld>
+            <a:endParaRPr lang="en-US"/>
+          </a:p>
+        </p:txBody>
+      </p:sp>
+    </p:spTree>
+    <p:extLst>
+      <p:ext uri="{BB962C8B-B14F-4D97-AF65-F5344CB8AC3E}">
+        <p14:creationId xmlns:p14="http://schemas.microsoft.com/office/powerpoint/2010/main" val="3695043984"/>
+      </p:ext>
+    </p:extLst>
+  </p:cSld>
+  <p:clrMapOvr>
+    <a:masterClrMapping/>
+  </p:clrMapOvr>
+</p:notes>
+</file>
+
+<file path=ppt/notesSlides/notesSlide3.xml><?xml version="1.0" encoding="utf-8"?>
+<p:notes xmlns:a="http://schemas.openxmlformats.org/drawingml/2006/main" xmlns:r="http://schemas.openxmlformats.org/officeDocument/2006/relationships" xmlns:p="http://schemas.openxmlformats.org/presentationml/2006/main">
+  <p:cSld>
+    <p:spTree>
+      <p:nvGrpSpPr>
+        <p:cNvPr id="1" name="">
+          <a:extLst>
+            <a:ext uri="{FF2B5EF4-FFF2-40B4-BE49-F238E27FC236}">
+              <a16:creationId xmlns:a16="http://schemas.microsoft.com/office/drawing/2014/main" id="{86C33949-8EDB-494E-0778-1DB4DE5A5E71}"/>
+            </a:ext>
+          </a:extLst>
+        </p:cNvPr>
+        <p:cNvGrpSpPr/>
+        <p:nvPr/>
+      </p:nvGrpSpPr>
+      <p:grpSpPr>
+        <a:xfrm>
+          <a:off x="0" y="0"/>
+          <a:ext cx="0" cy="0"/>
+          <a:chOff x="0" y="0"/>
+          <a:chExt cx="0" cy="0"/>
+        </a:xfrm>
+      </p:grpSpPr>
+      <p:sp>
+        <p:nvSpPr>
+          <p:cNvPr id="2" name="Slide Image Placeholder 1">
+            <a:extLst>
+              <a:ext uri="{FF2B5EF4-FFF2-40B4-BE49-F238E27FC236}">
+                <a16:creationId xmlns:a16="http://schemas.microsoft.com/office/drawing/2014/main" id="{58D9B710-C93B-E937-1CDA-1B946D6F6E11}"/>
+              </a:ext>
+            </a:extLst>
+          </p:cNvPr>
+          <p:cNvSpPr>
+            <a:spLocks noGrp="1" noRot="1" noChangeAspect="1"/>
+          </p:cNvSpPr>
+          <p:nvPr>
+            <p:ph type="sldImg"/>
+          </p:nvPr>
+        </p:nvSpPr>
+        <p:spPr/>
+      </p:sp>
+      <p:sp>
+        <p:nvSpPr>
+          <p:cNvPr id="3" name="Notes Placeholder 2">
+            <a:extLst>
+              <a:ext uri="{FF2B5EF4-FFF2-40B4-BE49-F238E27FC236}">
+                <a16:creationId xmlns:a16="http://schemas.microsoft.com/office/drawing/2014/main" id="{63B6187C-607B-D7D9-86D9-D3059411B669}"/>
+              </a:ext>
+            </a:extLst>
+          </p:cNvPr>
+          <p:cNvSpPr>
+            <a:spLocks noGrp="1"/>
+          </p:cNvSpPr>
+          <p:nvPr>
+            <p:ph type="body" idx="1"/>
+          </p:nvPr>
+        </p:nvSpPr>
+        <p:spPr/>
+        <p:txBody>
+          <a:bodyPr/>
+          <a:lstStyle/>
+          <a:p>
+            <a:endParaRPr lang="en-US"/>
+          </a:p>
+        </p:txBody>
+      </p:sp>
+      <p:sp>
+        <p:nvSpPr>
+          <p:cNvPr id="4" name="Slide Number Placeholder 3">
+            <a:extLst>
+              <a:ext uri="{FF2B5EF4-FFF2-40B4-BE49-F238E27FC236}">
+                <a16:creationId xmlns:a16="http://schemas.microsoft.com/office/drawing/2014/main" id="{AAC3E1A8-43A5-813F-D8BA-D7F5385AEDD1}"/>
+              </a:ext>
+            </a:extLst>
+          </p:cNvPr>
+          <p:cNvSpPr>
+            <a:spLocks noGrp="1"/>
+          </p:cNvSpPr>
+          <p:nvPr>
+            <p:ph type="sldNum" sz="quarter" idx="5"/>
+          </p:nvPr>
+        </p:nvSpPr>
+        <p:spPr/>
+        <p:txBody>
+          <a:bodyPr/>
+          <a:lstStyle/>
+          <a:p>
+            <a:fld id="{B571A709-7DB7-492E-B774-C30A7044C218}" type="slidenum">
+              <a:rPr lang="en-US" smtClean="0"/>
+              <a:t>5</a:t>
+            </a:fld>
+            <a:endParaRPr lang="en-US"/>
+          </a:p>
+        </p:txBody>
+      </p:sp>
+    </p:spTree>
+    <p:extLst>
+      <p:ext uri="{BB962C8B-B14F-4D97-AF65-F5344CB8AC3E}">
+        <p14:creationId xmlns:p14="http://schemas.microsoft.com/office/powerpoint/2010/main" val="3071150312"/>
+      </p:ext>
+    </p:extLst>
+  </p:cSld>
+  <p:clrMapOvr>
+    <a:masterClrMapping/>
+  </p:clrMapOvr>
+</p:notes>
+</file>
+
 <file path=ppt/slideLayouts/slideLayout1.xml><?xml version="1.0" encoding="utf-8"?>
 <p:sldLayout xmlns:a="http://schemas.openxmlformats.org/drawingml/2006/main" xmlns:r="http://schemas.openxmlformats.org/officeDocument/2006/relationships" xmlns:p="http://schemas.openxmlformats.org/presentationml/2006/main" type="title" preserve="1">
   <p:cSld name="Title Slide">
@@ -275,7 +950,7 @@
           <a:p>
             <a:fld id="{2F598FE8-610D-4628-AF37-AB11EA0DA6DB}" type="datetimeFigureOut">
               <a:rPr lang="en-US" smtClean="0"/>
-              <a:t>2/21/2025</a:t>
+              <a:t>2/23/2025</a:t>
             </a:fld>
             <a:endParaRPr lang="en-US"/>
           </a:p>
@@ -473,7 +1148,7 @@
           <a:p>
             <a:fld id="{2F598FE8-610D-4628-AF37-AB11EA0DA6DB}" type="datetimeFigureOut">
               <a:rPr lang="en-US" smtClean="0"/>
-              <a:t>2/21/2025</a:t>
+              <a:t>2/23/2025</a:t>
             </a:fld>
             <a:endParaRPr lang="en-US"/>
           </a:p>
@@ -681,7 +1356,7 @@
           <a:p>
             <a:fld id="{2F598FE8-610D-4628-AF37-AB11EA0DA6DB}" type="datetimeFigureOut">
               <a:rPr lang="en-US" smtClean="0"/>
-              <a:t>2/21/2025</a:t>
+              <a:t>2/23/2025</a:t>
             </a:fld>
             <a:endParaRPr lang="en-US"/>
           </a:p>
@@ -879,7 +1554,7 @@
           <a:p>
             <a:fld id="{2F598FE8-610D-4628-AF37-AB11EA0DA6DB}" type="datetimeFigureOut">
               <a:rPr lang="en-US" smtClean="0"/>
-              <a:t>2/21/2025</a:t>
+              <a:t>2/23/2025</a:t>
             </a:fld>
             <a:endParaRPr lang="en-US"/>
           </a:p>
@@ -1154,7 +1829,7 @@
           <a:p>
             <a:fld id="{2F598FE8-610D-4628-AF37-AB11EA0DA6DB}" type="datetimeFigureOut">
               <a:rPr lang="en-US" smtClean="0"/>
-              <a:t>2/21/2025</a:t>
+              <a:t>2/23/2025</a:t>
             </a:fld>
             <a:endParaRPr lang="en-US"/>
           </a:p>
@@ -1419,7 +2094,7 @@
           <a:p>
             <a:fld id="{2F598FE8-610D-4628-AF37-AB11EA0DA6DB}" type="datetimeFigureOut">
               <a:rPr lang="en-US" smtClean="0"/>
-              <a:t>2/21/2025</a:t>
+              <a:t>2/23/2025</a:t>
             </a:fld>
             <a:endParaRPr lang="en-US"/>
           </a:p>
@@ -1831,7 +2506,7 @@
           <a:p>
             <a:fld id="{2F598FE8-610D-4628-AF37-AB11EA0DA6DB}" type="datetimeFigureOut">
               <a:rPr lang="en-US" smtClean="0"/>
-              <a:t>2/21/2025</a:t>
+              <a:t>2/23/2025</a:t>
             </a:fld>
             <a:endParaRPr lang="en-US"/>
           </a:p>
@@ -1972,7 +2647,7 @@
           <a:p>
             <a:fld id="{2F598FE8-610D-4628-AF37-AB11EA0DA6DB}" type="datetimeFigureOut">
               <a:rPr lang="en-US" smtClean="0"/>
-              <a:t>2/21/2025</a:t>
+              <a:t>2/23/2025</a:t>
             </a:fld>
             <a:endParaRPr lang="en-US"/>
           </a:p>
@@ -2085,7 +2760,7 @@
           <a:p>
             <a:fld id="{2F598FE8-610D-4628-AF37-AB11EA0DA6DB}" type="datetimeFigureOut">
               <a:rPr lang="en-US" smtClean="0"/>
-              <a:t>2/21/2025</a:t>
+              <a:t>2/23/2025</a:t>
             </a:fld>
             <a:endParaRPr lang="en-US"/>
           </a:p>
@@ -2396,7 +3071,7 @@
           <a:p>
             <a:fld id="{2F598FE8-610D-4628-AF37-AB11EA0DA6DB}" type="datetimeFigureOut">
               <a:rPr lang="en-US" smtClean="0"/>
-              <a:t>2/21/2025</a:t>
+              <a:t>2/23/2025</a:t>
             </a:fld>
             <a:endParaRPr lang="en-US"/>
           </a:p>
@@ -2684,7 +3359,7 @@
           <a:p>
             <a:fld id="{2F598FE8-610D-4628-AF37-AB11EA0DA6DB}" type="datetimeFigureOut">
               <a:rPr lang="en-US" smtClean="0"/>
-              <a:t>2/21/2025</a:t>
+              <a:t>2/23/2025</a:t>
             </a:fld>
             <a:endParaRPr lang="en-US"/>
           </a:p>
@@ -2925,7 +3600,7 @@
           <a:p>
             <a:fld id="{2F598FE8-610D-4628-AF37-AB11EA0DA6DB}" type="datetimeFigureOut">
               <a:rPr lang="en-US" smtClean="0"/>
-              <a:t>2/21/2025</a:t>
+              <a:t>2/23/2025</a:t>
             </a:fld>
             <a:endParaRPr lang="en-US"/>
           </a:p>
@@ -3453,6 +4128,1699 @@
         <p:cNvPr id="1" name="">
           <a:extLst>
             <a:ext uri="{FF2B5EF4-FFF2-40B4-BE49-F238E27FC236}">
+              <a16:creationId xmlns:a16="http://schemas.microsoft.com/office/drawing/2014/main" id="{EA04CB62-43F2-3D9A-A277-018F2E1FBEAA}"/>
+            </a:ext>
+          </a:extLst>
+        </p:cNvPr>
+        <p:cNvGrpSpPr/>
+        <p:nvPr/>
+      </p:nvGrpSpPr>
+      <p:grpSpPr>
+        <a:xfrm>
+          <a:off x="0" y="0"/>
+          <a:ext cx="0" cy="0"/>
+          <a:chOff x="0" y="0"/>
+          <a:chExt cx="0" cy="0"/>
+        </a:xfrm>
+      </p:grpSpPr>
+      <p:sp>
+        <p:nvSpPr>
+          <p:cNvPr id="10" name="Title 9">
+            <a:extLst>
+              <a:ext uri="{FF2B5EF4-FFF2-40B4-BE49-F238E27FC236}">
+                <a16:creationId xmlns:a16="http://schemas.microsoft.com/office/drawing/2014/main" id="{BD6FB160-674F-C54A-FAA2-1B24B218A0A5}"/>
+              </a:ext>
+            </a:extLst>
+          </p:cNvPr>
+          <p:cNvSpPr>
+            <a:spLocks noGrp="1"/>
+          </p:cNvSpPr>
+          <p:nvPr>
+            <p:ph type="title"/>
+          </p:nvPr>
+        </p:nvSpPr>
+        <p:spPr>
+          <a:xfrm>
+            <a:off x="838200" y="256848"/>
+            <a:ext cx="10515600" cy="848378"/>
+          </a:xfrm>
+        </p:spPr>
+        <p:txBody>
+          <a:bodyPr>
+            <a:noAutofit/>
+          </a:bodyPr>
+          <a:lstStyle/>
+          <a:p>
+            <a:r>
+              <a:rPr lang="en-US"/>
+              <a:t>Branch Protection Rule Examples</a:t>
+            </a:r>
+          </a:p>
+        </p:txBody>
+      </p:sp>
+      <p:sp>
+        <p:nvSpPr>
+          <p:cNvPr id="11" name="Content Placeholder 10">
+            <a:extLst>
+              <a:ext uri="{FF2B5EF4-FFF2-40B4-BE49-F238E27FC236}">
+                <a16:creationId xmlns:a16="http://schemas.microsoft.com/office/drawing/2014/main" id="{788F6032-E7E0-9E09-CA78-3C98E6F65551}"/>
+              </a:ext>
+            </a:extLst>
+          </p:cNvPr>
+          <p:cNvSpPr>
+            <a:spLocks noGrp="1"/>
+          </p:cNvSpPr>
+          <p:nvPr>
+            <p:ph idx="1"/>
+          </p:nvPr>
+        </p:nvSpPr>
+        <p:spPr>
+          <a:xfrm>
+            <a:off x="838200" y="1215853"/>
+            <a:ext cx="5364480" cy="2700827"/>
+          </a:xfrm>
+          <a:ln>
+            <a:solidFill>
+              <a:schemeClr val="tx1"/>
+            </a:solidFill>
+          </a:ln>
+        </p:spPr>
+        <p:txBody>
+          <a:bodyPr>
+            <a:normAutofit/>
+          </a:bodyPr>
+          <a:lstStyle/>
+          <a:p>
+            <a:pPr marL="0" indent="0">
+              <a:lnSpc>
+                <a:spcPct val="100000"/>
+              </a:lnSpc>
+              <a:buNone/>
+            </a:pPr>
+            <a:r>
+              <a:rPr lang="en-US" sz="1400"/>
+              <a:t>1. Require Pull Request Reviews Before Merging</a:t>
+            </a:r>
+          </a:p>
+          <a:p>
+            <a:pPr marL="0" indent="0">
+              <a:lnSpc>
+                <a:spcPct val="100000"/>
+              </a:lnSpc>
+              <a:buNone/>
+            </a:pPr>
+            <a:r>
+              <a:rPr lang="en-US" sz="1400"/>
+              <a:t>👉 Prevents direct commits to the main branch </a:t>
+            </a:r>
+          </a:p>
+          <a:p>
+            <a:pPr marL="0" indent="0">
+              <a:lnSpc>
+                <a:spcPct val="100000"/>
+              </a:lnSpc>
+              <a:buNone/>
+            </a:pPr>
+            <a:r>
+              <a:rPr lang="en-US" sz="1400"/>
+              <a:t>        and enforces a code review process.</a:t>
+            </a:r>
+          </a:p>
+          <a:p>
+            <a:pPr marL="0" indent="0">
+              <a:lnSpc>
+                <a:spcPct val="100000"/>
+              </a:lnSpc>
+              <a:buNone/>
+            </a:pPr>
+            <a:r>
+              <a:rPr lang="en-US" sz="1400" b="1"/>
+              <a:t>Example Rule:</a:t>
+            </a:r>
+          </a:p>
+          <a:p>
+            <a:pPr marL="0" indent="0">
+              <a:lnSpc>
+                <a:spcPct val="100000"/>
+              </a:lnSpc>
+              <a:buNone/>
+            </a:pPr>
+            <a:r>
+              <a:rPr lang="en-US" sz="1400"/>
+              <a:t>✅ Require at least one approved review before merging.</a:t>
+            </a:r>
+          </a:p>
+          <a:p>
+            <a:pPr marL="0" indent="0">
+              <a:lnSpc>
+                <a:spcPct val="100000"/>
+              </a:lnSpc>
+              <a:buNone/>
+            </a:pPr>
+            <a:r>
+              <a:rPr lang="en-US" sz="1400"/>
+              <a:t>✅ Prevent self-approval (someone else must review the changes).</a:t>
+            </a:r>
+          </a:p>
+          <a:p>
+            <a:pPr marL="0" indent="0">
+              <a:lnSpc>
+                <a:spcPct val="100000"/>
+              </a:lnSpc>
+              <a:buNone/>
+            </a:pPr>
+            <a:r>
+              <a:rPr lang="en-US" sz="1400"/>
+              <a:t>✅ Dismiss stale approvals if new commits are added.</a:t>
+            </a:r>
+          </a:p>
+          <a:p>
+            <a:pPr marL="0" indent="0">
+              <a:lnSpc>
+                <a:spcPct val="100000"/>
+              </a:lnSpc>
+              <a:buNone/>
+            </a:pPr>
+            <a:r>
+              <a:rPr lang="en-US" sz="1400"/>
+              <a:t>💡 Use case: Ensures students get feedback before merging code.</a:t>
+            </a:r>
+          </a:p>
+        </p:txBody>
+      </p:sp>
+      <p:sp>
+        <p:nvSpPr>
+          <p:cNvPr id="2" name="Content Placeholder 10">
+            <a:extLst>
+              <a:ext uri="{FF2B5EF4-FFF2-40B4-BE49-F238E27FC236}">
+                <a16:creationId xmlns:a16="http://schemas.microsoft.com/office/drawing/2014/main" id="{C28C4D14-EB61-0171-FEF7-DC3C4A04B486}"/>
+              </a:ext>
+            </a:extLst>
+          </p:cNvPr>
+          <p:cNvSpPr txBox="1">
+            <a:spLocks/>
+          </p:cNvSpPr>
+          <p:nvPr/>
+        </p:nvSpPr>
+        <p:spPr>
+          <a:xfrm>
+            <a:off x="6690360" y="1216178"/>
+            <a:ext cx="5120640" cy="2700501"/>
+          </a:xfrm>
+          <a:prstGeom prst="rect">
+            <a:avLst/>
+          </a:prstGeom>
+          <a:ln>
+            <a:solidFill>
+              <a:schemeClr val="tx1"/>
+            </a:solidFill>
+          </a:ln>
+        </p:spPr>
+        <p:txBody>
+          <a:bodyPr vert="horz" lIns="91440" tIns="45720" rIns="91440" bIns="45720" rtlCol="0">
+            <a:normAutofit/>
+          </a:bodyPr>
+          <a:lstStyle>
+            <a:lvl1pPr marL="228600" indent="-228600" algn="l" defTabSz="914400" rtl="0" eaLnBrk="1" latinLnBrk="0" hangingPunct="1">
+              <a:lnSpc>
+                <a:spcPct val="90000"/>
+              </a:lnSpc>
+              <a:spcBef>
+                <a:spcPts val="1000"/>
+              </a:spcBef>
+              <a:buFont typeface="Arial" panose="020B0604020202020204" pitchFamily="34" charset="0"/>
+              <a:buChar char="•"/>
+              <a:defRPr sz="2800" kern="1200">
+                <a:solidFill>
+                  <a:schemeClr val="tx1"/>
+                </a:solidFill>
+                <a:latin typeface="+mn-lt"/>
+                <a:ea typeface="+mn-ea"/>
+                <a:cs typeface="+mn-cs"/>
+              </a:defRPr>
+            </a:lvl1pPr>
+            <a:lvl2pPr marL="685800" indent="-228600" algn="l" defTabSz="914400" rtl="0" eaLnBrk="1" latinLnBrk="0" hangingPunct="1">
+              <a:lnSpc>
+                <a:spcPct val="90000"/>
+              </a:lnSpc>
+              <a:spcBef>
+                <a:spcPts val="500"/>
+              </a:spcBef>
+              <a:buFont typeface="Arial" panose="020B0604020202020204" pitchFamily="34" charset="0"/>
+              <a:buChar char="•"/>
+              <a:defRPr sz="2400" kern="1200">
+                <a:solidFill>
+                  <a:schemeClr val="tx1"/>
+                </a:solidFill>
+                <a:latin typeface="+mn-lt"/>
+                <a:ea typeface="+mn-ea"/>
+                <a:cs typeface="+mn-cs"/>
+              </a:defRPr>
+            </a:lvl2pPr>
+            <a:lvl3pPr marL="1143000" indent="-228600" algn="l" defTabSz="914400" rtl="0" eaLnBrk="1" latinLnBrk="0" hangingPunct="1">
+              <a:lnSpc>
+                <a:spcPct val="90000"/>
+              </a:lnSpc>
+              <a:spcBef>
+                <a:spcPts val="500"/>
+              </a:spcBef>
+              <a:buFont typeface="Arial" panose="020B0604020202020204" pitchFamily="34" charset="0"/>
+              <a:buChar char="•"/>
+              <a:defRPr sz="2000" kern="1200">
+                <a:solidFill>
+                  <a:schemeClr val="tx1"/>
+                </a:solidFill>
+                <a:latin typeface="+mn-lt"/>
+                <a:ea typeface="+mn-ea"/>
+                <a:cs typeface="+mn-cs"/>
+              </a:defRPr>
+            </a:lvl3pPr>
+            <a:lvl4pPr marL="1600200" indent="-228600" algn="l" defTabSz="914400" rtl="0" eaLnBrk="1" latinLnBrk="0" hangingPunct="1">
+              <a:lnSpc>
+                <a:spcPct val="90000"/>
+              </a:lnSpc>
+              <a:spcBef>
+                <a:spcPts val="500"/>
+              </a:spcBef>
+              <a:buFont typeface="Arial" panose="020B0604020202020204" pitchFamily="34" charset="0"/>
+              <a:buChar char="•"/>
+              <a:defRPr sz="1800" kern="1200">
+                <a:solidFill>
+                  <a:schemeClr val="tx1"/>
+                </a:solidFill>
+                <a:latin typeface="+mn-lt"/>
+                <a:ea typeface="+mn-ea"/>
+                <a:cs typeface="+mn-cs"/>
+              </a:defRPr>
+            </a:lvl4pPr>
+            <a:lvl5pPr marL="2057400" indent="-228600" algn="l" defTabSz="914400" rtl="0" eaLnBrk="1" latinLnBrk="0" hangingPunct="1">
+              <a:lnSpc>
+                <a:spcPct val="90000"/>
+              </a:lnSpc>
+              <a:spcBef>
+                <a:spcPts val="500"/>
+              </a:spcBef>
+              <a:buFont typeface="Arial" panose="020B0604020202020204" pitchFamily="34" charset="0"/>
+              <a:buChar char="•"/>
+              <a:defRPr sz="1800" kern="1200">
+                <a:solidFill>
+                  <a:schemeClr val="tx1"/>
+                </a:solidFill>
+                <a:latin typeface="+mn-lt"/>
+                <a:ea typeface="+mn-ea"/>
+                <a:cs typeface="+mn-cs"/>
+              </a:defRPr>
+            </a:lvl5pPr>
+            <a:lvl6pPr marL="2514600" indent="-228600" algn="l" defTabSz="914400" rtl="0" eaLnBrk="1" latinLnBrk="0" hangingPunct="1">
+              <a:lnSpc>
+                <a:spcPct val="90000"/>
+              </a:lnSpc>
+              <a:spcBef>
+                <a:spcPts val="500"/>
+              </a:spcBef>
+              <a:buFont typeface="Arial" panose="020B0604020202020204" pitchFamily="34" charset="0"/>
+              <a:buChar char="•"/>
+              <a:defRPr sz="1800" kern="1200">
+                <a:solidFill>
+                  <a:schemeClr val="tx1"/>
+                </a:solidFill>
+                <a:latin typeface="+mn-lt"/>
+                <a:ea typeface="+mn-ea"/>
+                <a:cs typeface="+mn-cs"/>
+              </a:defRPr>
+            </a:lvl6pPr>
+            <a:lvl7pPr marL="2971800" indent="-228600" algn="l" defTabSz="914400" rtl="0" eaLnBrk="1" latinLnBrk="0" hangingPunct="1">
+              <a:lnSpc>
+                <a:spcPct val="90000"/>
+              </a:lnSpc>
+              <a:spcBef>
+                <a:spcPts val="500"/>
+              </a:spcBef>
+              <a:buFont typeface="Arial" panose="020B0604020202020204" pitchFamily="34" charset="0"/>
+              <a:buChar char="•"/>
+              <a:defRPr sz="1800" kern="1200">
+                <a:solidFill>
+                  <a:schemeClr val="tx1"/>
+                </a:solidFill>
+                <a:latin typeface="+mn-lt"/>
+                <a:ea typeface="+mn-ea"/>
+                <a:cs typeface="+mn-cs"/>
+              </a:defRPr>
+            </a:lvl7pPr>
+            <a:lvl8pPr marL="3429000" indent="-228600" algn="l" defTabSz="914400" rtl="0" eaLnBrk="1" latinLnBrk="0" hangingPunct="1">
+              <a:lnSpc>
+                <a:spcPct val="90000"/>
+              </a:lnSpc>
+              <a:spcBef>
+                <a:spcPts val="500"/>
+              </a:spcBef>
+              <a:buFont typeface="Arial" panose="020B0604020202020204" pitchFamily="34" charset="0"/>
+              <a:buChar char="•"/>
+              <a:defRPr sz="1800" kern="1200">
+                <a:solidFill>
+                  <a:schemeClr val="tx1"/>
+                </a:solidFill>
+                <a:latin typeface="+mn-lt"/>
+                <a:ea typeface="+mn-ea"/>
+                <a:cs typeface="+mn-cs"/>
+              </a:defRPr>
+            </a:lvl8pPr>
+            <a:lvl9pPr marL="3886200" indent="-228600" algn="l" defTabSz="914400" rtl="0" eaLnBrk="1" latinLnBrk="0" hangingPunct="1">
+              <a:lnSpc>
+                <a:spcPct val="90000"/>
+              </a:lnSpc>
+              <a:spcBef>
+                <a:spcPts val="500"/>
+              </a:spcBef>
+              <a:buFont typeface="Arial" panose="020B0604020202020204" pitchFamily="34" charset="0"/>
+              <a:buChar char="•"/>
+              <a:defRPr sz="1800" kern="1200">
+                <a:solidFill>
+                  <a:schemeClr val="tx1"/>
+                </a:solidFill>
+                <a:latin typeface="+mn-lt"/>
+                <a:ea typeface="+mn-ea"/>
+                <a:cs typeface="+mn-cs"/>
+              </a:defRPr>
+            </a:lvl9pPr>
+          </a:lstStyle>
+          <a:p>
+            <a:pPr marL="0" indent="0">
+              <a:lnSpc>
+                <a:spcPct val="100000"/>
+              </a:lnSpc>
+              <a:buFont typeface="Arial" panose="020B0604020202020204" pitchFamily="34" charset="0"/>
+              <a:buNone/>
+            </a:pPr>
+            <a:r>
+              <a:rPr lang="en-US" sz="1400"/>
+              <a:t>2. Require Status Checks to Pass Before Merging</a:t>
+            </a:r>
+          </a:p>
+          <a:p>
+            <a:pPr marL="0" indent="0">
+              <a:lnSpc>
+                <a:spcPct val="100000"/>
+              </a:lnSpc>
+              <a:buFont typeface="Arial" panose="020B0604020202020204" pitchFamily="34" charset="0"/>
+              <a:buNone/>
+            </a:pPr>
+            <a:r>
+              <a:rPr lang="en-US" sz="1400"/>
+              <a:t>👉 Prevents merging unless automated tests (CI/CD pipelines) pass.</a:t>
+            </a:r>
+          </a:p>
+          <a:p>
+            <a:pPr marL="0" indent="0">
+              <a:lnSpc>
+                <a:spcPct val="100000"/>
+              </a:lnSpc>
+              <a:buFont typeface="Arial" panose="020B0604020202020204" pitchFamily="34" charset="0"/>
+              <a:buNone/>
+            </a:pPr>
+            <a:r>
+              <a:rPr lang="en-US" sz="1400"/>
+              <a:t>Example Rule:</a:t>
+            </a:r>
+          </a:p>
+          <a:p>
+            <a:pPr marL="0" indent="0">
+              <a:lnSpc>
+                <a:spcPct val="100000"/>
+              </a:lnSpc>
+              <a:buFont typeface="Arial" panose="020B0604020202020204" pitchFamily="34" charset="0"/>
+              <a:buNone/>
+            </a:pPr>
+            <a:r>
+              <a:rPr lang="en-US" sz="1400"/>
+              <a:t>✅ Require GitHub Actions tests to pass before merging.</a:t>
+            </a:r>
+          </a:p>
+          <a:p>
+            <a:pPr marL="0" indent="0">
+              <a:lnSpc>
+                <a:spcPct val="100000"/>
+              </a:lnSpc>
+              <a:buFont typeface="Arial" panose="020B0604020202020204" pitchFamily="34" charset="0"/>
+              <a:buNone/>
+            </a:pPr>
+            <a:r>
+              <a:rPr lang="en-US" sz="1400"/>
+              <a:t>✅ Block merging if tests fail.</a:t>
+            </a:r>
+          </a:p>
+          <a:p>
+            <a:pPr marL="0" indent="0">
+              <a:lnSpc>
+                <a:spcPct val="100000"/>
+              </a:lnSpc>
+              <a:buFont typeface="Arial" panose="020B0604020202020204" pitchFamily="34" charset="0"/>
+              <a:buNone/>
+            </a:pPr>
+            <a:r>
+              <a:rPr lang="en-US" sz="1400"/>
+              <a:t>💡 Use case: Prevents merging broken code into main.</a:t>
+            </a:r>
+          </a:p>
+        </p:txBody>
+      </p:sp>
+      <p:sp>
+        <p:nvSpPr>
+          <p:cNvPr id="7" name="Content Placeholder 10">
+            <a:extLst>
+              <a:ext uri="{FF2B5EF4-FFF2-40B4-BE49-F238E27FC236}">
+                <a16:creationId xmlns:a16="http://schemas.microsoft.com/office/drawing/2014/main" id="{8667FEFB-217A-B765-5314-FF01DD84E902}"/>
+              </a:ext>
+            </a:extLst>
+          </p:cNvPr>
+          <p:cNvSpPr txBox="1">
+            <a:spLocks/>
+          </p:cNvSpPr>
+          <p:nvPr/>
+        </p:nvSpPr>
+        <p:spPr>
+          <a:xfrm>
+            <a:off x="838200" y="4369881"/>
+            <a:ext cx="5364480" cy="2129979"/>
+          </a:xfrm>
+          <a:prstGeom prst="rect">
+            <a:avLst/>
+          </a:prstGeom>
+          <a:ln>
+            <a:solidFill>
+              <a:schemeClr val="tx1"/>
+            </a:solidFill>
+          </a:ln>
+        </p:spPr>
+        <p:txBody>
+          <a:bodyPr vert="horz" lIns="91440" tIns="45720" rIns="91440" bIns="45720" rtlCol="0">
+            <a:normAutofit/>
+          </a:bodyPr>
+          <a:lstStyle>
+            <a:lvl1pPr marL="228600" indent="-228600" algn="l" defTabSz="914400" rtl="0" eaLnBrk="1" latinLnBrk="0" hangingPunct="1">
+              <a:lnSpc>
+                <a:spcPct val="90000"/>
+              </a:lnSpc>
+              <a:spcBef>
+                <a:spcPts val="1000"/>
+              </a:spcBef>
+              <a:buFont typeface="Arial" panose="020B0604020202020204" pitchFamily="34" charset="0"/>
+              <a:buChar char="•"/>
+              <a:defRPr sz="2800" kern="1200">
+                <a:solidFill>
+                  <a:schemeClr val="tx1"/>
+                </a:solidFill>
+                <a:latin typeface="+mn-lt"/>
+                <a:ea typeface="+mn-ea"/>
+                <a:cs typeface="+mn-cs"/>
+              </a:defRPr>
+            </a:lvl1pPr>
+            <a:lvl2pPr marL="685800" indent="-228600" algn="l" defTabSz="914400" rtl="0" eaLnBrk="1" latinLnBrk="0" hangingPunct="1">
+              <a:lnSpc>
+                <a:spcPct val="90000"/>
+              </a:lnSpc>
+              <a:spcBef>
+                <a:spcPts val="500"/>
+              </a:spcBef>
+              <a:buFont typeface="Arial" panose="020B0604020202020204" pitchFamily="34" charset="0"/>
+              <a:buChar char="•"/>
+              <a:defRPr sz="2400" kern="1200">
+                <a:solidFill>
+                  <a:schemeClr val="tx1"/>
+                </a:solidFill>
+                <a:latin typeface="+mn-lt"/>
+                <a:ea typeface="+mn-ea"/>
+                <a:cs typeface="+mn-cs"/>
+              </a:defRPr>
+            </a:lvl2pPr>
+            <a:lvl3pPr marL="1143000" indent="-228600" algn="l" defTabSz="914400" rtl="0" eaLnBrk="1" latinLnBrk="0" hangingPunct="1">
+              <a:lnSpc>
+                <a:spcPct val="90000"/>
+              </a:lnSpc>
+              <a:spcBef>
+                <a:spcPts val="500"/>
+              </a:spcBef>
+              <a:buFont typeface="Arial" panose="020B0604020202020204" pitchFamily="34" charset="0"/>
+              <a:buChar char="•"/>
+              <a:defRPr sz="2000" kern="1200">
+                <a:solidFill>
+                  <a:schemeClr val="tx1"/>
+                </a:solidFill>
+                <a:latin typeface="+mn-lt"/>
+                <a:ea typeface="+mn-ea"/>
+                <a:cs typeface="+mn-cs"/>
+              </a:defRPr>
+            </a:lvl3pPr>
+            <a:lvl4pPr marL="1600200" indent="-228600" algn="l" defTabSz="914400" rtl="0" eaLnBrk="1" latinLnBrk="0" hangingPunct="1">
+              <a:lnSpc>
+                <a:spcPct val="90000"/>
+              </a:lnSpc>
+              <a:spcBef>
+                <a:spcPts val="500"/>
+              </a:spcBef>
+              <a:buFont typeface="Arial" panose="020B0604020202020204" pitchFamily="34" charset="0"/>
+              <a:buChar char="•"/>
+              <a:defRPr sz="1800" kern="1200">
+                <a:solidFill>
+                  <a:schemeClr val="tx1"/>
+                </a:solidFill>
+                <a:latin typeface="+mn-lt"/>
+                <a:ea typeface="+mn-ea"/>
+                <a:cs typeface="+mn-cs"/>
+              </a:defRPr>
+            </a:lvl4pPr>
+            <a:lvl5pPr marL="2057400" indent="-228600" algn="l" defTabSz="914400" rtl="0" eaLnBrk="1" latinLnBrk="0" hangingPunct="1">
+              <a:lnSpc>
+                <a:spcPct val="90000"/>
+              </a:lnSpc>
+              <a:spcBef>
+                <a:spcPts val="500"/>
+              </a:spcBef>
+              <a:buFont typeface="Arial" panose="020B0604020202020204" pitchFamily="34" charset="0"/>
+              <a:buChar char="•"/>
+              <a:defRPr sz="1800" kern="1200">
+                <a:solidFill>
+                  <a:schemeClr val="tx1"/>
+                </a:solidFill>
+                <a:latin typeface="+mn-lt"/>
+                <a:ea typeface="+mn-ea"/>
+                <a:cs typeface="+mn-cs"/>
+              </a:defRPr>
+            </a:lvl5pPr>
+            <a:lvl6pPr marL="2514600" indent="-228600" algn="l" defTabSz="914400" rtl="0" eaLnBrk="1" latinLnBrk="0" hangingPunct="1">
+              <a:lnSpc>
+                <a:spcPct val="90000"/>
+              </a:lnSpc>
+              <a:spcBef>
+                <a:spcPts val="500"/>
+              </a:spcBef>
+              <a:buFont typeface="Arial" panose="020B0604020202020204" pitchFamily="34" charset="0"/>
+              <a:buChar char="•"/>
+              <a:defRPr sz="1800" kern="1200">
+                <a:solidFill>
+                  <a:schemeClr val="tx1"/>
+                </a:solidFill>
+                <a:latin typeface="+mn-lt"/>
+                <a:ea typeface="+mn-ea"/>
+                <a:cs typeface="+mn-cs"/>
+              </a:defRPr>
+            </a:lvl6pPr>
+            <a:lvl7pPr marL="2971800" indent="-228600" algn="l" defTabSz="914400" rtl="0" eaLnBrk="1" latinLnBrk="0" hangingPunct="1">
+              <a:lnSpc>
+                <a:spcPct val="90000"/>
+              </a:lnSpc>
+              <a:spcBef>
+                <a:spcPts val="500"/>
+              </a:spcBef>
+              <a:buFont typeface="Arial" panose="020B0604020202020204" pitchFamily="34" charset="0"/>
+              <a:buChar char="•"/>
+              <a:defRPr sz="1800" kern="1200">
+                <a:solidFill>
+                  <a:schemeClr val="tx1"/>
+                </a:solidFill>
+                <a:latin typeface="+mn-lt"/>
+                <a:ea typeface="+mn-ea"/>
+                <a:cs typeface="+mn-cs"/>
+              </a:defRPr>
+            </a:lvl7pPr>
+            <a:lvl8pPr marL="3429000" indent="-228600" algn="l" defTabSz="914400" rtl="0" eaLnBrk="1" latinLnBrk="0" hangingPunct="1">
+              <a:lnSpc>
+                <a:spcPct val="90000"/>
+              </a:lnSpc>
+              <a:spcBef>
+                <a:spcPts val="500"/>
+              </a:spcBef>
+              <a:buFont typeface="Arial" panose="020B0604020202020204" pitchFamily="34" charset="0"/>
+              <a:buChar char="•"/>
+              <a:defRPr sz="1800" kern="1200">
+                <a:solidFill>
+                  <a:schemeClr val="tx1"/>
+                </a:solidFill>
+                <a:latin typeface="+mn-lt"/>
+                <a:ea typeface="+mn-ea"/>
+                <a:cs typeface="+mn-cs"/>
+              </a:defRPr>
+            </a:lvl8pPr>
+            <a:lvl9pPr marL="3886200" indent="-228600" algn="l" defTabSz="914400" rtl="0" eaLnBrk="1" latinLnBrk="0" hangingPunct="1">
+              <a:lnSpc>
+                <a:spcPct val="90000"/>
+              </a:lnSpc>
+              <a:spcBef>
+                <a:spcPts val="500"/>
+              </a:spcBef>
+              <a:buFont typeface="Arial" panose="020B0604020202020204" pitchFamily="34" charset="0"/>
+              <a:buChar char="•"/>
+              <a:defRPr sz="1800" kern="1200">
+                <a:solidFill>
+                  <a:schemeClr val="tx1"/>
+                </a:solidFill>
+                <a:latin typeface="+mn-lt"/>
+                <a:ea typeface="+mn-ea"/>
+                <a:cs typeface="+mn-cs"/>
+              </a:defRPr>
+            </a:lvl9pPr>
+          </a:lstStyle>
+          <a:p>
+            <a:pPr marL="0" indent="0">
+              <a:lnSpc>
+                <a:spcPct val="100000"/>
+              </a:lnSpc>
+              <a:buFont typeface="Arial" panose="020B0604020202020204" pitchFamily="34" charset="0"/>
+              <a:buNone/>
+            </a:pPr>
+            <a:r>
+              <a:rPr lang="en-US" sz="1400"/>
+              <a:t>3. Restrict Who Can Push to a Branch</a:t>
+            </a:r>
+          </a:p>
+          <a:p>
+            <a:pPr marL="0" indent="0">
+              <a:lnSpc>
+                <a:spcPct val="100000"/>
+              </a:lnSpc>
+              <a:buFont typeface="Arial" panose="020B0604020202020204" pitchFamily="34" charset="0"/>
+              <a:buNone/>
+            </a:pPr>
+            <a:r>
+              <a:rPr lang="en-US" sz="1400"/>
+              <a:t>👉 Limits who can make direct changes to critical branches.</a:t>
+            </a:r>
+          </a:p>
+          <a:p>
+            <a:pPr marL="0" indent="0">
+              <a:lnSpc>
+                <a:spcPct val="100000"/>
+              </a:lnSpc>
+              <a:buFont typeface="Arial" panose="020B0604020202020204" pitchFamily="34" charset="0"/>
+              <a:buNone/>
+            </a:pPr>
+            <a:r>
+              <a:rPr lang="en-US" sz="1400"/>
+              <a:t>Example Rule:</a:t>
+            </a:r>
+          </a:p>
+          <a:p>
+            <a:pPr marL="0" indent="0">
+              <a:lnSpc>
+                <a:spcPct val="100000"/>
+              </a:lnSpc>
+              <a:buFont typeface="Arial" panose="020B0604020202020204" pitchFamily="34" charset="0"/>
+              <a:buNone/>
+            </a:pPr>
+            <a:r>
+              <a:rPr lang="en-US" sz="1400"/>
+              <a:t>✅ Only instructors can push directly to main.</a:t>
+            </a:r>
+          </a:p>
+          <a:p>
+            <a:pPr marL="0" indent="0">
+              <a:lnSpc>
+                <a:spcPct val="100000"/>
+              </a:lnSpc>
+              <a:buFont typeface="Arial" panose="020B0604020202020204" pitchFamily="34" charset="0"/>
+              <a:buNone/>
+            </a:pPr>
+            <a:r>
+              <a:rPr lang="en-US" sz="1400"/>
+              <a:t>✅ Students must use feature branches and open pull requests.</a:t>
+            </a:r>
+          </a:p>
+          <a:p>
+            <a:pPr marL="0" indent="0">
+              <a:lnSpc>
+                <a:spcPct val="100000"/>
+              </a:lnSpc>
+              <a:buFont typeface="Arial" panose="020B0604020202020204" pitchFamily="34" charset="0"/>
+              <a:buNone/>
+            </a:pPr>
+            <a:r>
+              <a:rPr lang="en-US" sz="1400"/>
+              <a:t>💡 Use case: Prevents accidental overwrites by students.</a:t>
+            </a:r>
+          </a:p>
+        </p:txBody>
+      </p:sp>
+      <p:sp>
+        <p:nvSpPr>
+          <p:cNvPr id="8" name="Content Placeholder 10">
+            <a:extLst>
+              <a:ext uri="{FF2B5EF4-FFF2-40B4-BE49-F238E27FC236}">
+                <a16:creationId xmlns:a16="http://schemas.microsoft.com/office/drawing/2014/main" id="{744BDD52-7637-CC7B-E8CA-7C7D5A271794}"/>
+              </a:ext>
+            </a:extLst>
+          </p:cNvPr>
+          <p:cNvSpPr txBox="1">
+            <a:spLocks/>
+          </p:cNvSpPr>
+          <p:nvPr/>
+        </p:nvSpPr>
+        <p:spPr>
+          <a:xfrm>
+            <a:off x="6774180" y="4369880"/>
+            <a:ext cx="5036820" cy="2129979"/>
+          </a:xfrm>
+          <a:prstGeom prst="rect">
+            <a:avLst/>
+          </a:prstGeom>
+          <a:ln>
+            <a:solidFill>
+              <a:schemeClr val="tx1"/>
+            </a:solidFill>
+          </a:ln>
+        </p:spPr>
+        <p:txBody>
+          <a:bodyPr vert="horz" lIns="91440" tIns="45720" rIns="91440" bIns="45720" rtlCol="0">
+            <a:normAutofit/>
+          </a:bodyPr>
+          <a:lstStyle>
+            <a:lvl1pPr marL="228600" indent="-228600" algn="l" defTabSz="914400" rtl="0" eaLnBrk="1" latinLnBrk="0" hangingPunct="1">
+              <a:lnSpc>
+                <a:spcPct val="90000"/>
+              </a:lnSpc>
+              <a:spcBef>
+                <a:spcPts val="1000"/>
+              </a:spcBef>
+              <a:buFont typeface="Arial" panose="020B0604020202020204" pitchFamily="34" charset="0"/>
+              <a:buChar char="•"/>
+              <a:defRPr sz="2800" kern="1200">
+                <a:solidFill>
+                  <a:schemeClr val="tx1"/>
+                </a:solidFill>
+                <a:latin typeface="+mn-lt"/>
+                <a:ea typeface="+mn-ea"/>
+                <a:cs typeface="+mn-cs"/>
+              </a:defRPr>
+            </a:lvl1pPr>
+            <a:lvl2pPr marL="685800" indent="-228600" algn="l" defTabSz="914400" rtl="0" eaLnBrk="1" latinLnBrk="0" hangingPunct="1">
+              <a:lnSpc>
+                <a:spcPct val="90000"/>
+              </a:lnSpc>
+              <a:spcBef>
+                <a:spcPts val="500"/>
+              </a:spcBef>
+              <a:buFont typeface="Arial" panose="020B0604020202020204" pitchFamily="34" charset="0"/>
+              <a:buChar char="•"/>
+              <a:defRPr sz="2400" kern="1200">
+                <a:solidFill>
+                  <a:schemeClr val="tx1"/>
+                </a:solidFill>
+                <a:latin typeface="+mn-lt"/>
+                <a:ea typeface="+mn-ea"/>
+                <a:cs typeface="+mn-cs"/>
+              </a:defRPr>
+            </a:lvl2pPr>
+            <a:lvl3pPr marL="1143000" indent="-228600" algn="l" defTabSz="914400" rtl="0" eaLnBrk="1" latinLnBrk="0" hangingPunct="1">
+              <a:lnSpc>
+                <a:spcPct val="90000"/>
+              </a:lnSpc>
+              <a:spcBef>
+                <a:spcPts val="500"/>
+              </a:spcBef>
+              <a:buFont typeface="Arial" panose="020B0604020202020204" pitchFamily="34" charset="0"/>
+              <a:buChar char="•"/>
+              <a:defRPr sz="2000" kern="1200">
+                <a:solidFill>
+                  <a:schemeClr val="tx1"/>
+                </a:solidFill>
+                <a:latin typeface="+mn-lt"/>
+                <a:ea typeface="+mn-ea"/>
+                <a:cs typeface="+mn-cs"/>
+              </a:defRPr>
+            </a:lvl3pPr>
+            <a:lvl4pPr marL="1600200" indent="-228600" algn="l" defTabSz="914400" rtl="0" eaLnBrk="1" latinLnBrk="0" hangingPunct="1">
+              <a:lnSpc>
+                <a:spcPct val="90000"/>
+              </a:lnSpc>
+              <a:spcBef>
+                <a:spcPts val="500"/>
+              </a:spcBef>
+              <a:buFont typeface="Arial" panose="020B0604020202020204" pitchFamily="34" charset="0"/>
+              <a:buChar char="•"/>
+              <a:defRPr sz="1800" kern="1200">
+                <a:solidFill>
+                  <a:schemeClr val="tx1"/>
+                </a:solidFill>
+                <a:latin typeface="+mn-lt"/>
+                <a:ea typeface="+mn-ea"/>
+                <a:cs typeface="+mn-cs"/>
+              </a:defRPr>
+            </a:lvl4pPr>
+            <a:lvl5pPr marL="2057400" indent="-228600" algn="l" defTabSz="914400" rtl="0" eaLnBrk="1" latinLnBrk="0" hangingPunct="1">
+              <a:lnSpc>
+                <a:spcPct val="90000"/>
+              </a:lnSpc>
+              <a:spcBef>
+                <a:spcPts val="500"/>
+              </a:spcBef>
+              <a:buFont typeface="Arial" panose="020B0604020202020204" pitchFamily="34" charset="0"/>
+              <a:buChar char="•"/>
+              <a:defRPr sz="1800" kern="1200">
+                <a:solidFill>
+                  <a:schemeClr val="tx1"/>
+                </a:solidFill>
+                <a:latin typeface="+mn-lt"/>
+                <a:ea typeface="+mn-ea"/>
+                <a:cs typeface="+mn-cs"/>
+              </a:defRPr>
+            </a:lvl5pPr>
+            <a:lvl6pPr marL="2514600" indent="-228600" algn="l" defTabSz="914400" rtl="0" eaLnBrk="1" latinLnBrk="0" hangingPunct="1">
+              <a:lnSpc>
+                <a:spcPct val="90000"/>
+              </a:lnSpc>
+              <a:spcBef>
+                <a:spcPts val="500"/>
+              </a:spcBef>
+              <a:buFont typeface="Arial" panose="020B0604020202020204" pitchFamily="34" charset="0"/>
+              <a:buChar char="•"/>
+              <a:defRPr sz="1800" kern="1200">
+                <a:solidFill>
+                  <a:schemeClr val="tx1"/>
+                </a:solidFill>
+                <a:latin typeface="+mn-lt"/>
+                <a:ea typeface="+mn-ea"/>
+                <a:cs typeface="+mn-cs"/>
+              </a:defRPr>
+            </a:lvl6pPr>
+            <a:lvl7pPr marL="2971800" indent="-228600" algn="l" defTabSz="914400" rtl="0" eaLnBrk="1" latinLnBrk="0" hangingPunct="1">
+              <a:lnSpc>
+                <a:spcPct val="90000"/>
+              </a:lnSpc>
+              <a:spcBef>
+                <a:spcPts val="500"/>
+              </a:spcBef>
+              <a:buFont typeface="Arial" panose="020B0604020202020204" pitchFamily="34" charset="0"/>
+              <a:buChar char="•"/>
+              <a:defRPr sz="1800" kern="1200">
+                <a:solidFill>
+                  <a:schemeClr val="tx1"/>
+                </a:solidFill>
+                <a:latin typeface="+mn-lt"/>
+                <a:ea typeface="+mn-ea"/>
+                <a:cs typeface="+mn-cs"/>
+              </a:defRPr>
+            </a:lvl7pPr>
+            <a:lvl8pPr marL="3429000" indent="-228600" algn="l" defTabSz="914400" rtl="0" eaLnBrk="1" latinLnBrk="0" hangingPunct="1">
+              <a:lnSpc>
+                <a:spcPct val="90000"/>
+              </a:lnSpc>
+              <a:spcBef>
+                <a:spcPts val="500"/>
+              </a:spcBef>
+              <a:buFont typeface="Arial" panose="020B0604020202020204" pitchFamily="34" charset="0"/>
+              <a:buChar char="•"/>
+              <a:defRPr sz="1800" kern="1200">
+                <a:solidFill>
+                  <a:schemeClr val="tx1"/>
+                </a:solidFill>
+                <a:latin typeface="+mn-lt"/>
+                <a:ea typeface="+mn-ea"/>
+                <a:cs typeface="+mn-cs"/>
+              </a:defRPr>
+            </a:lvl8pPr>
+            <a:lvl9pPr marL="3886200" indent="-228600" algn="l" defTabSz="914400" rtl="0" eaLnBrk="1" latinLnBrk="0" hangingPunct="1">
+              <a:lnSpc>
+                <a:spcPct val="90000"/>
+              </a:lnSpc>
+              <a:spcBef>
+                <a:spcPts val="500"/>
+              </a:spcBef>
+              <a:buFont typeface="Arial" panose="020B0604020202020204" pitchFamily="34" charset="0"/>
+              <a:buChar char="•"/>
+              <a:defRPr sz="1800" kern="1200">
+                <a:solidFill>
+                  <a:schemeClr val="tx1"/>
+                </a:solidFill>
+                <a:latin typeface="+mn-lt"/>
+                <a:ea typeface="+mn-ea"/>
+                <a:cs typeface="+mn-cs"/>
+              </a:defRPr>
+            </a:lvl9pPr>
+          </a:lstStyle>
+          <a:p>
+            <a:pPr marL="0" indent="0">
+              <a:lnSpc>
+                <a:spcPct val="100000"/>
+              </a:lnSpc>
+              <a:buFont typeface="Arial" panose="020B0604020202020204" pitchFamily="34" charset="0"/>
+              <a:buNone/>
+            </a:pPr>
+            <a:r>
+              <a:rPr lang="en-US" sz="1400"/>
+              <a:t>4. Prevent Deletion of Protected Branches</a:t>
+            </a:r>
+          </a:p>
+          <a:p>
+            <a:pPr marL="0" indent="0">
+              <a:lnSpc>
+                <a:spcPct val="100000"/>
+              </a:lnSpc>
+              <a:buFont typeface="Arial" panose="020B0604020202020204" pitchFamily="34" charset="0"/>
+              <a:buNone/>
+            </a:pPr>
+            <a:r>
+              <a:rPr lang="en-US" sz="1400"/>
+              <a:t>👉 Stops accidental or malicious deletion of important branches.</a:t>
+            </a:r>
+          </a:p>
+          <a:p>
+            <a:pPr marL="0" indent="0">
+              <a:lnSpc>
+                <a:spcPct val="100000"/>
+              </a:lnSpc>
+              <a:buFont typeface="Arial" panose="020B0604020202020204" pitchFamily="34" charset="0"/>
+              <a:buNone/>
+            </a:pPr>
+            <a:r>
+              <a:rPr lang="en-US" sz="1400"/>
+              <a:t>Example Rule:</a:t>
+            </a:r>
+          </a:p>
+          <a:p>
+            <a:pPr marL="0" indent="0">
+              <a:lnSpc>
+                <a:spcPct val="100000"/>
+              </a:lnSpc>
+              <a:buFont typeface="Arial" panose="020B0604020202020204" pitchFamily="34" charset="0"/>
+              <a:buNone/>
+            </a:pPr>
+            <a:r>
+              <a:rPr lang="en-US" sz="1400"/>
+              <a:t>✅ Prevent deletion of the main and develop branches.</a:t>
+            </a:r>
+          </a:p>
+          <a:p>
+            <a:pPr marL="0" indent="0">
+              <a:lnSpc>
+                <a:spcPct val="100000"/>
+              </a:lnSpc>
+              <a:buFont typeface="Arial" panose="020B0604020202020204" pitchFamily="34" charset="0"/>
+              <a:buNone/>
+            </a:pPr>
+            <a:r>
+              <a:rPr lang="en-US" sz="1400"/>
+              <a:t>💡 Use case: Ensures project stability and avoids data loss.</a:t>
+            </a:r>
+          </a:p>
+        </p:txBody>
+      </p:sp>
+    </p:spTree>
+    <p:extLst>
+      <p:ext uri="{BB962C8B-B14F-4D97-AF65-F5344CB8AC3E}">
+        <p14:creationId xmlns:p14="http://schemas.microsoft.com/office/powerpoint/2010/main" val="543617448"/>
+      </p:ext>
+    </p:extLst>
+  </p:cSld>
+  <p:clrMapOvr>
+    <a:masterClrMapping/>
+  </p:clrMapOvr>
+</p:sld>
+</file>
+
+<file path=ppt/slides/slide11.xml><?xml version="1.0" encoding="utf-8"?>
+<p:sld xmlns:a="http://schemas.openxmlformats.org/drawingml/2006/main" xmlns:r="http://schemas.openxmlformats.org/officeDocument/2006/relationships" xmlns:p="http://schemas.openxmlformats.org/presentationml/2006/main">
+  <p:cSld>
+    <p:spTree>
+      <p:nvGrpSpPr>
+        <p:cNvPr id="1" name="">
+          <a:extLst>
+            <a:ext uri="{FF2B5EF4-FFF2-40B4-BE49-F238E27FC236}">
+              <a16:creationId xmlns:a16="http://schemas.microsoft.com/office/drawing/2014/main" id="{2C547B91-D324-0341-0502-5B2162A38B99}"/>
+            </a:ext>
+          </a:extLst>
+        </p:cNvPr>
+        <p:cNvGrpSpPr/>
+        <p:nvPr/>
+      </p:nvGrpSpPr>
+      <p:grpSpPr>
+        <a:xfrm>
+          <a:off x="0" y="0"/>
+          <a:ext cx="0" cy="0"/>
+          <a:chOff x="0" y="0"/>
+          <a:chExt cx="0" cy="0"/>
+        </a:xfrm>
+      </p:grpSpPr>
+      <p:sp>
+        <p:nvSpPr>
+          <p:cNvPr id="10" name="Title 9">
+            <a:extLst>
+              <a:ext uri="{FF2B5EF4-FFF2-40B4-BE49-F238E27FC236}">
+                <a16:creationId xmlns:a16="http://schemas.microsoft.com/office/drawing/2014/main" id="{404C2249-DEFA-8756-55A2-7043C71FA497}"/>
+              </a:ext>
+            </a:extLst>
+          </p:cNvPr>
+          <p:cNvSpPr>
+            <a:spLocks noGrp="1"/>
+          </p:cNvSpPr>
+          <p:nvPr>
+            <p:ph type="title"/>
+          </p:nvPr>
+        </p:nvSpPr>
+        <p:spPr>
+          <a:xfrm>
+            <a:off x="838199" y="256848"/>
+            <a:ext cx="10824029" cy="848378"/>
+          </a:xfrm>
+        </p:spPr>
+        <p:txBody>
+          <a:bodyPr/>
+          <a:lstStyle/>
+          <a:p>
+            <a:pPr marL="282575" indent="-282575"/>
+            <a:r>
+              <a:rPr lang="en-US" sz="4400"/>
+              <a:t>1.3 Branching Strategies and Secure Workflows</a:t>
+            </a:r>
+          </a:p>
+        </p:txBody>
+      </p:sp>
+      <p:sp>
+        <p:nvSpPr>
+          <p:cNvPr id="11" name="Content Placeholder 10">
+            <a:extLst>
+              <a:ext uri="{FF2B5EF4-FFF2-40B4-BE49-F238E27FC236}">
+                <a16:creationId xmlns:a16="http://schemas.microsoft.com/office/drawing/2014/main" id="{AFB64EC2-884E-9EC0-089A-5B9748E29B28}"/>
+              </a:ext>
+            </a:extLst>
+          </p:cNvPr>
+          <p:cNvSpPr>
+            <a:spLocks noGrp="1"/>
+          </p:cNvSpPr>
+          <p:nvPr>
+            <p:ph idx="1"/>
+          </p:nvPr>
+        </p:nvSpPr>
+        <p:spPr>
+          <a:xfrm>
+            <a:off x="838200" y="1375873"/>
+            <a:ext cx="10515600" cy="4801090"/>
+          </a:xfrm>
+        </p:spPr>
+        <p:txBody>
+          <a:bodyPr>
+            <a:normAutofit/>
+          </a:bodyPr>
+          <a:lstStyle/>
+          <a:p>
+            <a:pPr marL="282575" indent="-282575"/>
+            <a:r>
+              <a:rPr lang="en-US" sz="3200"/>
+              <a:t>Introduction to branching models (GitFlow, feature branches, trunk-based development).</a:t>
+            </a:r>
+          </a:p>
+          <a:p>
+            <a:pPr marL="282575" indent="-282575"/>
+            <a:r>
+              <a:rPr lang="en-US" sz="3200"/>
+              <a:t>Implementing protected branches to prevent unauthorized changes.</a:t>
+            </a:r>
+          </a:p>
+          <a:p>
+            <a:pPr marL="282575" indent="-282575"/>
+            <a:r>
+              <a:rPr lang="en-US" sz="3200"/>
+              <a:t>Setting up feature branches and submitting pull requests (PRs).</a:t>
+            </a:r>
+          </a:p>
+          <a:p>
+            <a:pPr marL="282575" indent="-282575"/>
+            <a:r>
+              <a:rPr lang="en-US" sz="3200"/>
+              <a:t>Hands-on: Configuring branch protection rules in GitHub.</a:t>
+            </a:r>
+          </a:p>
+        </p:txBody>
+      </p:sp>
+    </p:spTree>
+    <p:extLst>
+      <p:ext uri="{BB962C8B-B14F-4D97-AF65-F5344CB8AC3E}">
+        <p14:creationId xmlns:p14="http://schemas.microsoft.com/office/powerpoint/2010/main" val="2256014701"/>
+      </p:ext>
+    </p:extLst>
+  </p:cSld>
+  <p:clrMapOvr>
+    <a:masterClrMapping/>
+  </p:clrMapOvr>
+</p:sld>
+</file>
+
+<file path=ppt/slides/slide12.xml><?xml version="1.0" encoding="utf-8"?>
+<p:sld xmlns:a="http://schemas.openxmlformats.org/drawingml/2006/main" xmlns:r="http://schemas.openxmlformats.org/officeDocument/2006/relationships" xmlns:p="http://schemas.openxmlformats.org/presentationml/2006/main">
+  <p:cSld>
+    <p:spTree>
+      <p:nvGrpSpPr>
+        <p:cNvPr id="1" name="">
+          <a:extLst>
+            <a:ext uri="{FF2B5EF4-FFF2-40B4-BE49-F238E27FC236}">
+              <a16:creationId xmlns:a16="http://schemas.microsoft.com/office/drawing/2014/main" id="{33D0842A-AE90-0CB0-7BCD-5D3E7EB8B0F9}"/>
+            </a:ext>
+          </a:extLst>
+        </p:cNvPr>
+        <p:cNvGrpSpPr/>
+        <p:nvPr/>
+      </p:nvGrpSpPr>
+      <p:grpSpPr>
+        <a:xfrm>
+          <a:off x="0" y="0"/>
+          <a:ext cx="0" cy="0"/>
+          <a:chOff x="0" y="0"/>
+          <a:chExt cx="0" cy="0"/>
+        </a:xfrm>
+      </p:grpSpPr>
+      <p:sp>
+        <p:nvSpPr>
+          <p:cNvPr id="10" name="Title 9">
+            <a:extLst>
+              <a:ext uri="{FF2B5EF4-FFF2-40B4-BE49-F238E27FC236}">
+                <a16:creationId xmlns:a16="http://schemas.microsoft.com/office/drawing/2014/main" id="{82F1E25C-CBDF-D2BF-4EFC-BC6EA2A24318}"/>
+              </a:ext>
+            </a:extLst>
+          </p:cNvPr>
+          <p:cNvSpPr>
+            <a:spLocks noGrp="1"/>
+          </p:cNvSpPr>
+          <p:nvPr>
+            <p:ph type="title"/>
+          </p:nvPr>
+        </p:nvSpPr>
+        <p:spPr>
+          <a:xfrm>
+            <a:off x="838200" y="256848"/>
+            <a:ext cx="10515600" cy="848378"/>
+          </a:xfrm>
+        </p:spPr>
+        <p:txBody>
+          <a:bodyPr/>
+          <a:lstStyle/>
+          <a:p>
+            <a:pPr marL="282575" indent="-282575"/>
+            <a:r>
+              <a:rPr lang="en-US" sz="4400"/>
+              <a:t> 1.4 Secure Code Contributions and Reviews</a:t>
+            </a:r>
+          </a:p>
+        </p:txBody>
+      </p:sp>
+      <p:sp>
+        <p:nvSpPr>
+          <p:cNvPr id="11" name="Content Placeholder 10">
+            <a:extLst>
+              <a:ext uri="{FF2B5EF4-FFF2-40B4-BE49-F238E27FC236}">
+                <a16:creationId xmlns:a16="http://schemas.microsoft.com/office/drawing/2014/main" id="{43BA8398-B061-1528-A071-27C58D36FC37}"/>
+              </a:ext>
+            </a:extLst>
+          </p:cNvPr>
+          <p:cNvSpPr>
+            <a:spLocks noGrp="1"/>
+          </p:cNvSpPr>
+          <p:nvPr>
+            <p:ph idx="1"/>
+          </p:nvPr>
+        </p:nvSpPr>
+        <p:spPr>
+          <a:xfrm>
+            <a:off x="838200" y="1375873"/>
+            <a:ext cx="10515600" cy="4801090"/>
+          </a:xfrm>
+        </p:spPr>
+        <p:txBody>
+          <a:bodyPr>
+            <a:normAutofit/>
+          </a:bodyPr>
+          <a:lstStyle/>
+          <a:p>
+            <a:pPr marL="282575" indent="-282575"/>
+            <a:r>
+              <a:rPr lang="en-US" sz="3200"/>
+              <a:t>Best practices for code reviews in a secure workflow.</a:t>
+            </a:r>
+          </a:p>
+          <a:p>
+            <a:pPr marL="282575" indent="-282575"/>
+            <a:r>
+              <a:rPr lang="en-US" sz="3200"/>
+              <a:t>Enforcing pull request policies (e.g., requiring approvals, status checks).</a:t>
+            </a:r>
+          </a:p>
+          <a:p>
+            <a:pPr marL="282575" indent="-282575"/>
+            <a:r>
+              <a:rPr lang="en-US" sz="3200"/>
+              <a:t>Hands-on: Conducting a secure pull request workflow (reviewing, commenting, approving).</a:t>
+            </a:r>
+          </a:p>
+          <a:p>
+            <a:pPr marL="282575" indent="-282575"/>
+            <a:r>
+              <a:rPr lang="en-US" sz="3200"/>
+              <a:t>Exercise: Identifying security issues in a sample PR.</a:t>
+            </a:r>
+          </a:p>
+        </p:txBody>
+      </p:sp>
+    </p:spTree>
+    <p:extLst>
+      <p:ext uri="{BB962C8B-B14F-4D97-AF65-F5344CB8AC3E}">
+        <p14:creationId xmlns:p14="http://schemas.microsoft.com/office/powerpoint/2010/main" val="1091019408"/>
+      </p:ext>
+    </p:extLst>
+  </p:cSld>
+  <p:clrMapOvr>
+    <a:masterClrMapping/>
+  </p:clrMapOvr>
+</p:sld>
+</file>
+
+<file path=ppt/slides/slide13.xml><?xml version="1.0" encoding="utf-8"?>
+<p:sld xmlns:a="http://schemas.openxmlformats.org/drawingml/2006/main" xmlns:r="http://schemas.openxmlformats.org/officeDocument/2006/relationships" xmlns:p="http://schemas.openxmlformats.org/presentationml/2006/main">
+  <p:cSld>
+    <p:spTree>
+      <p:nvGrpSpPr>
+        <p:cNvPr id="1" name="">
+          <a:extLst>
+            <a:ext uri="{FF2B5EF4-FFF2-40B4-BE49-F238E27FC236}">
+              <a16:creationId xmlns:a16="http://schemas.microsoft.com/office/drawing/2014/main" id="{0EF9BF30-7E80-2AF6-53CF-E233C84CD86D}"/>
+            </a:ext>
+          </a:extLst>
+        </p:cNvPr>
+        <p:cNvGrpSpPr/>
+        <p:nvPr/>
+      </p:nvGrpSpPr>
+      <p:grpSpPr>
+        <a:xfrm>
+          <a:off x="0" y="0"/>
+          <a:ext cx="0" cy="0"/>
+          <a:chOff x="0" y="0"/>
+          <a:chExt cx="0" cy="0"/>
+        </a:xfrm>
+      </p:grpSpPr>
+      <p:sp>
+        <p:nvSpPr>
+          <p:cNvPr id="10" name="Title 9">
+            <a:extLst>
+              <a:ext uri="{FF2B5EF4-FFF2-40B4-BE49-F238E27FC236}">
+                <a16:creationId xmlns:a16="http://schemas.microsoft.com/office/drawing/2014/main" id="{9B79AAEC-F6EC-01F2-911D-9098E30DACE9}"/>
+              </a:ext>
+            </a:extLst>
+          </p:cNvPr>
+          <p:cNvSpPr>
+            <a:spLocks noGrp="1"/>
+          </p:cNvSpPr>
+          <p:nvPr>
+            <p:ph type="title"/>
+          </p:nvPr>
+        </p:nvSpPr>
+        <p:spPr>
+          <a:xfrm>
+            <a:off x="838200" y="256848"/>
+            <a:ext cx="10515600" cy="848378"/>
+          </a:xfrm>
+        </p:spPr>
+        <p:txBody>
+          <a:bodyPr/>
+          <a:lstStyle/>
+          <a:p>
+            <a:r>
+              <a:rPr lang="en-US"/>
+              <a:t>1.5. Secrets Management / Preventing Leaks</a:t>
+            </a:r>
+          </a:p>
+        </p:txBody>
+      </p:sp>
+      <p:sp>
+        <p:nvSpPr>
+          <p:cNvPr id="11" name="Content Placeholder 10">
+            <a:extLst>
+              <a:ext uri="{FF2B5EF4-FFF2-40B4-BE49-F238E27FC236}">
+                <a16:creationId xmlns:a16="http://schemas.microsoft.com/office/drawing/2014/main" id="{7557BBE6-24F9-C54B-A230-9C140527B775}"/>
+              </a:ext>
+            </a:extLst>
+          </p:cNvPr>
+          <p:cNvSpPr>
+            <a:spLocks noGrp="1"/>
+          </p:cNvSpPr>
+          <p:nvPr>
+            <p:ph idx="1"/>
+          </p:nvPr>
+        </p:nvSpPr>
+        <p:spPr>
+          <a:xfrm>
+            <a:off x="838200" y="1375873"/>
+            <a:ext cx="10515600" cy="4801090"/>
+          </a:xfrm>
+        </p:spPr>
+        <p:txBody>
+          <a:bodyPr>
+            <a:normAutofit fontScale="85000" lnSpcReduction="10000"/>
+          </a:bodyPr>
+          <a:lstStyle/>
+          <a:p>
+            <a:pPr marL="282575" indent="-282575"/>
+            <a:r>
+              <a:rPr lang="en-US" sz="3200"/>
+              <a:t>Why API keys, credentials, and secrets should never be committed.</a:t>
+            </a:r>
+          </a:p>
+          <a:p>
+            <a:pPr marL="282575" indent="-282575"/>
+            <a:r>
+              <a:rPr lang="en-US" sz="3200"/>
+              <a:t>Tools for detecting and preventing secret leaks (git-secrets, truffleHog).</a:t>
+            </a:r>
+          </a:p>
+          <a:p>
+            <a:pPr marL="282575" indent="-282575"/>
+            <a:r>
+              <a:rPr lang="en-US" sz="3200"/>
+              <a:t>Hands-on: Setting up a pre-commit hook to block sensitive data.</a:t>
+            </a:r>
+          </a:p>
+          <a:p>
+            <a:pPr marL="282575" indent="-282575"/>
+            <a:r>
+              <a:rPr lang="en-US" sz="3200"/>
+              <a:t>Exercise: Committing a "leaked" secret and scanning for exposed credentials.</a:t>
+            </a:r>
+          </a:p>
+          <a:p>
+            <a:pPr marL="282575" indent="-282575"/>
+            <a:r>
+              <a:rPr lang="en-US" sz="3200"/>
+              <a:t>6. Automated Security Scanning</a:t>
+            </a:r>
+          </a:p>
+          <a:p>
+            <a:pPr marL="282575" indent="-282575"/>
+            <a:r>
+              <a:rPr lang="en-US" sz="3200"/>
+              <a:t>Overview of static analysis and dependency scanning.</a:t>
+            </a:r>
+          </a:p>
+          <a:p>
+            <a:pPr marL="282575" indent="-282575"/>
+            <a:r>
+              <a:rPr lang="en-US" sz="3200"/>
+              <a:t>Using GitHub Advanced Security, CodeQL, and Dependabot.</a:t>
+            </a:r>
+          </a:p>
+          <a:p>
+            <a:pPr marL="282575" indent="-282575"/>
+            <a:r>
+              <a:rPr lang="en-US" sz="3200"/>
+              <a:t>Hands-on: Running a security scan on a sample repository.</a:t>
+            </a:r>
+          </a:p>
+          <a:p>
+            <a:pPr marL="282575" indent="-282575"/>
+            <a:r>
+              <a:rPr lang="en-US" sz="3200"/>
+              <a:t>Exercise: Interpreting scan results and patching vulnerabilities.</a:t>
+            </a:r>
+          </a:p>
+        </p:txBody>
+      </p:sp>
+    </p:spTree>
+    <p:extLst>
+      <p:ext uri="{BB962C8B-B14F-4D97-AF65-F5344CB8AC3E}">
+        <p14:creationId xmlns:p14="http://schemas.microsoft.com/office/powerpoint/2010/main" val="612910111"/>
+      </p:ext>
+    </p:extLst>
+  </p:cSld>
+  <p:clrMapOvr>
+    <a:masterClrMapping/>
+  </p:clrMapOvr>
+</p:sld>
+</file>
+
+<file path=ppt/slides/slide14.xml><?xml version="1.0" encoding="utf-8"?>
+<p:sld xmlns:a="http://schemas.openxmlformats.org/drawingml/2006/main" xmlns:r="http://schemas.openxmlformats.org/officeDocument/2006/relationships" xmlns:p="http://schemas.openxmlformats.org/presentationml/2006/main">
+  <p:cSld>
+    <p:spTree>
+      <p:nvGrpSpPr>
+        <p:cNvPr id="1" name="">
+          <a:extLst>
+            <a:ext uri="{FF2B5EF4-FFF2-40B4-BE49-F238E27FC236}">
+              <a16:creationId xmlns:a16="http://schemas.microsoft.com/office/drawing/2014/main" id="{A015AAEC-F798-B19F-A486-AA5117560906}"/>
+            </a:ext>
+          </a:extLst>
+        </p:cNvPr>
+        <p:cNvGrpSpPr/>
+        <p:nvPr/>
+      </p:nvGrpSpPr>
+      <p:grpSpPr>
+        <a:xfrm>
+          <a:off x="0" y="0"/>
+          <a:ext cx="0" cy="0"/>
+          <a:chOff x="0" y="0"/>
+          <a:chExt cx="0" cy="0"/>
+        </a:xfrm>
+      </p:grpSpPr>
+      <p:sp>
+        <p:nvSpPr>
+          <p:cNvPr id="10" name="Title 9">
+            <a:extLst>
+              <a:ext uri="{FF2B5EF4-FFF2-40B4-BE49-F238E27FC236}">
+                <a16:creationId xmlns:a16="http://schemas.microsoft.com/office/drawing/2014/main" id="{F103457D-2CA5-DAE1-7CBD-45D8D7352057}"/>
+              </a:ext>
+            </a:extLst>
+          </p:cNvPr>
+          <p:cNvSpPr>
+            <a:spLocks noGrp="1"/>
+          </p:cNvSpPr>
+          <p:nvPr>
+            <p:ph type="title"/>
+          </p:nvPr>
+        </p:nvSpPr>
+        <p:spPr>
+          <a:xfrm>
+            <a:off x="838200" y="256848"/>
+            <a:ext cx="10515600" cy="848378"/>
+          </a:xfrm>
+        </p:spPr>
+        <p:txBody>
+          <a:bodyPr/>
+          <a:lstStyle/>
+          <a:p>
+            <a:r>
+              <a:rPr lang="en-US"/>
+              <a:t>1.6. </a:t>
+            </a:r>
+            <a:r>
+              <a:rPr lang="en-US" sz="4400"/>
+              <a:t>Automated Security Scanning</a:t>
+            </a:r>
+            <a:endParaRPr lang="en-US"/>
+          </a:p>
+        </p:txBody>
+      </p:sp>
+      <p:sp>
+        <p:nvSpPr>
+          <p:cNvPr id="11" name="Content Placeholder 10">
+            <a:extLst>
+              <a:ext uri="{FF2B5EF4-FFF2-40B4-BE49-F238E27FC236}">
+                <a16:creationId xmlns:a16="http://schemas.microsoft.com/office/drawing/2014/main" id="{7E4571C4-D133-67EB-F601-1264B9876F33}"/>
+              </a:ext>
+            </a:extLst>
+          </p:cNvPr>
+          <p:cNvSpPr>
+            <a:spLocks noGrp="1"/>
+          </p:cNvSpPr>
+          <p:nvPr>
+            <p:ph idx="1"/>
+          </p:nvPr>
+        </p:nvSpPr>
+        <p:spPr>
+          <a:xfrm>
+            <a:off x="838200" y="1375873"/>
+            <a:ext cx="10515600" cy="4801090"/>
+          </a:xfrm>
+        </p:spPr>
+        <p:txBody>
+          <a:bodyPr>
+            <a:normAutofit/>
+          </a:bodyPr>
+          <a:lstStyle/>
+          <a:p>
+            <a:pPr marL="282575" indent="-282575"/>
+            <a:r>
+              <a:rPr lang="en-US" sz="3200"/>
+              <a:t>Overview of static analysis and dependency scanning.</a:t>
+            </a:r>
+          </a:p>
+          <a:p>
+            <a:pPr marL="282575" indent="-282575"/>
+            <a:r>
+              <a:rPr lang="en-US" sz="3200"/>
+              <a:t>Using GitHub Advanced Security, CodeQL, and Dependabot.</a:t>
+            </a:r>
+          </a:p>
+          <a:p>
+            <a:pPr marL="282575" indent="-282575"/>
+            <a:r>
+              <a:rPr lang="en-US" sz="3200"/>
+              <a:t>Interpreting scan results and patching vulnerabilities.</a:t>
+            </a:r>
+          </a:p>
+          <a:p>
+            <a:pPr marL="282575" indent="-282575"/>
+            <a:r>
+              <a:rPr lang="en-US" sz="3200"/>
+              <a:t>Hands-on: Run a security scan on a sample repository.</a:t>
+            </a:r>
+          </a:p>
+        </p:txBody>
+      </p:sp>
+    </p:spTree>
+    <p:extLst>
+      <p:ext uri="{BB962C8B-B14F-4D97-AF65-F5344CB8AC3E}">
+        <p14:creationId xmlns:p14="http://schemas.microsoft.com/office/powerpoint/2010/main" val="2536463669"/>
+      </p:ext>
+    </p:extLst>
+  </p:cSld>
+  <p:clrMapOvr>
+    <a:masterClrMapping/>
+  </p:clrMapOvr>
+</p:sld>
+</file>
+
+<file path=ppt/slides/slide15.xml><?xml version="1.0" encoding="utf-8"?>
+<p:sld xmlns:a="http://schemas.openxmlformats.org/drawingml/2006/main" xmlns:r="http://schemas.openxmlformats.org/officeDocument/2006/relationships" xmlns:p="http://schemas.openxmlformats.org/presentationml/2006/main">
+  <p:cSld>
+    <p:spTree>
+      <p:nvGrpSpPr>
+        <p:cNvPr id="1" name="">
+          <a:extLst>
+            <a:ext uri="{FF2B5EF4-FFF2-40B4-BE49-F238E27FC236}">
+              <a16:creationId xmlns:a16="http://schemas.microsoft.com/office/drawing/2014/main" id="{BBE20E9C-EBE0-98B4-D9FB-AA18E9C48655}"/>
+            </a:ext>
+          </a:extLst>
+        </p:cNvPr>
+        <p:cNvGrpSpPr/>
+        <p:nvPr/>
+      </p:nvGrpSpPr>
+      <p:grpSpPr>
+        <a:xfrm>
+          <a:off x="0" y="0"/>
+          <a:ext cx="0" cy="0"/>
+          <a:chOff x="0" y="0"/>
+          <a:chExt cx="0" cy="0"/>
+        </a:xfrm>
+      </p:grpSpPr>
+      <p:sp>
+        <p:nvSpPr>
+          <p:cNvPr id="10" name="Title 9">
+            <a:extLst>
+              <a:ext uri="{FF2B5EF4-FFF2-40B4-BE49-F238E27FC236}">
+                <a16:creationId xmlns:a16="http://schemas.microsoft.com/office/drawing/2014/main" id="{C800F0A4-1323-8F4E-057B-10ED54BA61BA}"/>
+              </a:ext>
+            </a:extLst>
+          </p:cNvPr>
+          <p:cNvSpPr>
+            <a:spLocks noGrp="1"/>
+          </p:cNvSpPr>
+          <p:nvPr>
+            <p:ph type="title"/>
+          </p:nvPr>
+        </p:nvSpPr>
+        <p:spPr>
+          <a:xfrm>
+            <a:off x="838200" y="256848"/>
+            <a:ext cx="10515600" cy="848378"/>
+          </a:xfrm>
+        </p:spPr>
+        <p:txBody>
+          <a:bodyPr/>
+          <a:lstStyle/>
+          <a:p>
+            <a:r>
+              <a:rPr lang="en-US"/>
+              <a:t>1.7 </a:t>
+            </a:r>
+            <a:r>
+              <a:rPr lang="en-US" sz="4400"/>
+              <a:t>Secure Commit Practices</a:t>
+            </a:r>
+            <a:endParaRPr lang="en-US"/>
+          </a:p>
+        </p:txBody>
+      </p:sp>
+      <p:sp>
+        <p:nvSpPr>
+          <p:cNvPr id="11" name="Content Placeholder 10">
+            <a:extLst>
+              <a:ext uri="{FF2B5EF4-FFF2-40B4-BE49-F238E27FC236}">
+                <a16:creationId xmlns:a16="http://schemas.microsoft.com/office/drawing/2014/main" id="{F013569D-5CFB-6D9A-0DC8-99AFE88815A4}"/>
+              </a:ext>
+            </a:extLst>
+          </p:cNvPr>
+          <p:cNvSpPr>
+            <a:spLocks noGrp="1"/>
+          </p:cNvSpPr>
+          <p:nvPr>
+            <p:ph idx="1"/>
+          </p:nvPr>
+        </p:nvSpPr>
+        <p:spPr>
+          <a:xfrm>
+            <a:off x="838200" y="1375873"/>
+            <a:ext cx="10515600" cy="4801090"/>
+          </a:xfrm>
+        </p:spPr>
+        <p:txBody>
+          <a:bodyPr>
+            <a:normAutofit/>
+          </a:bodyPr>
+          <a:lstStyle/>
+          <a:p>
+            <a:pPr marL="282575" indent="-282575"/>
+            <a:r>
+              <a:rPr lang="en-US" sz="3200"/>
+              <a:t>Enforcing GPG/SSH-signed commits for authenticity.</a:t>
+            </a:r>
+          </a:p>
+          <a:p>
+            <a:pPr marL="282575" indent="-282575"/>
+            <a:r>
+              <a:rPr lang="en-US" sz="3200"/>
+              <a:t>Implementing commit message policies (e.g., descriptive messages, linking to issues).</a:t>
+            </a:r>
+          </a:p>
+          <a:p>
+            <a:pPr marL="282575" indent="-282575"/>
+            <a:r>
+              <a:rPr lang="en-US" sz="3200"/>
+              <a:t>Verifying signed commits in a repository.</a:t>
+            </a:r>
+          </a:p>
+          <a:p>
+            <a:pPr marL="282575" indent="-282575"/>
+            <a:r>
+              <a:rPr lang="en-US" sz="3200"/>
+              <a:t>Hands-on: Signing commits with a GPG key.</a:t>
+            </a:r>
+          </a:p>
+        </p:txBody>
+      </p:sp>
+    </p:spTree>
+    <p:extLst>
+      <p:ext uri="{BB962C8B-B14F-4D97-AF65-F5344CB8AC3E}">
+        <p14:creationId xmlns:p14="http://schemas.microsoft.com/office/powerpoint/2010/main" val="196191668"/>
+      </p:ext>
+    </p:extLst>
+  </p:cSld>
+  <p:clrMapOvr>
+    <a:masterClrMapping/>
+  </p:clrMapOvr>
+</p:sld>
+</file>
+
+<file path=ppt/slides/slide16.xml><?xml version="1.0" encoding="utf-8"?>
+<p:sld xmlns:a="http://schemas.openxmlformats.org/drawingml/2006/main" xmlns:r="http://schemas.openxmlformats.org/officeDocument/2006/relationships" xmlns:p="http://schemas.openxmlformats.org/presentationml/2006/main">
+  <p:cSld>
+    <p:spTree>
+      <p:nvGrpSpPr>
+        <p:cNvPr id="1" name="">
+          <a:extLst>
+            <a:ext uri="{FF2B5EF4-FFF2-40B4-BE49-F238E27FC236}">
               <a16:creationId xmlns:a16="http://schemas.microsoft.com/office/drawing/2014/main" id="{1D7BABD3-51ED-32C0-EE63-63B7A3DE7155}"/>
             </a:ext>
           </a:extLst>
@@ -3576,7 +5944,7 @@
 </p:sld>
 </file>
 
-<file path=ppt/slides/slide11.xml><?xml version="1.0" encoding="utf-8"?>
+<file path=ppt/slides/slide17.xml><?xml version="1.0" encoding="utf-8"?>
 <p:sld xmlns:a="http://schemas.openxmlformats.org/drawingml/2006/main" xmlns:r="http://schemas.openxmlformats.org/officeDocument/2006/relationships" xmlns:p="http://schemas.openxmlformats.org/presentationml/2006/main">
   <p:cSld>
     <p:spTree>
@@ -3700,7 +6068,7 @@
 </p:sld>
 </file>
 
-<file path=ppt/slides/slide12.xml><?xml version="1.0" encoding="utf-8"?>
+<file path=ppt/slides/slide18.xml><?xml version="1.0" encoding="utf-8"?>
 <p:sld xmlns:a="http://schemas.openxmlformats.org/drawingml/2006/main" xmlns:r="http://schemas.openxmlformats.org/officeDocument/2006/relationships" xmlns:p="http://schemas.openxmlformats.org/presentationml/2006/main">
   <p:cSld>
     <p:spTree>
@@ -3828,7 +6196,7 @@
 </p:sld>
 </file>
 
-<file path=ppt/slides/slide13.xml><?xml version="1.0" encoding="utf-8"?>
+<file path=ppt/slides/slide19.xml><?xml version="1.0" encoding="utf-8"?>
 <p:sld xmlns:a="http://schemas.openxmlformats.org/drawingml/2006/main" xmlns:r="http://schemas.openxmlformats.org/officeDocument/2006/relationships" xmlns:p="http://schemas.openxmlformats.org/presentationml/2006/main">
   <p:cSld>
     <p:spTree>
@@ -3904,18 +6272,58 @@
         </p:nvSpPr>
         <p:spPr>
           <a:xfrm>
-            <a:off x="838200" y="1375873"/>
-            <a:ext cx="10515600" cy="4801090"/>
+            <a:off x="838200" y="1219200"/>
+            <a:ext cx="10515600" cy="4957763"/>
           </a:xfrm>
         </p:spPr>
         <p:txBody>
           <a:bodyPr>
-            <a:normAutofit/>
+            <a:normAutofit fontScale="70000" lnSpcReduction="20000"/>
           </a:bodyPr>
           <a:lstStyle/>
           <a:p>
-            <a:pPr marL="282575" indent="-282575"/>
-            <a:endParaRPr lang="en-US" sz="3200"/>
+            <a:pPr marL="282575" indent="-282575">
+              <a:lnSpc>
+                <a:spcPct val="120000"/>
+              </a:lnSpc>
+            </a:pPr>
+            <a:r>
+              <a:rPr lang="en-US" sz="3200"/>
+              <a:t>Secure coding environments provide controlled development spaces that incorporate tools, policies, and best practices to minimize security risks during software development. </a:t>
+            </a:r>
+          </a:p>
+          <a:p>
+            <a:pPr marL="282575" indent="-282575">
+              <a:lnSpc>
+                <a:spcPct val="120000"/>
+              </a:lnSpc>
+            </a:pPr>
+            <a:r>
+              <a:rPr lang="en-US" sz="3200"/>
+              <a:t>It includes access controls, such as Role-Based Access Control (RBAC), to restrict unauthorized modifications, code analysis tools for detecting vulnerabilities, and sandboxed environments to isolate untrusted code execution. </a:t>
+            </a:r>
+          </a:p>
+          <a:p>
+            <a:pPr marL="282575" indent="-282575">
+              <a:lnSpc>
+                <a:spcPct val="120000"/>
+              </a:lnSpc>
+            </a:pPr>
+            <a:r>
+              <a:rPr lang="en-US" sz="3200"/>
+              <a:t>Secure development environments often integrate version control protections, like branch protection rules in GitHub, and enforce secure coding standards through automated testing, linting, and dependency scanning (e.g., with Dependabot). </a:t>
+            </a:r>
+          </a:p>
+          <a:p>
+            <a:pPr marL="282575" indent="-282575">
+              <a:lnSpc>
+                <a:spcPct val="120000"/>
+              </a:lnSpc>
+            </a:pPr>
+            <a:r>
+              <a:rPr lang="en-US" sz="3200"/>
+              <a:t>By implementing these security measures, organizations and educators can ensure that software is developed, tested, and deployed with minimal exposure to security threats.</a:t>
+            </a:r>
           </a:p>
         </p:txBody>
       </p:sp>
@@ -3923,422 +6331,6 @@
     <p:extLst>
       <p:ext uri="{BB962C8B-B14F-4D97-AF65-F5344CB8AC3E}">
         <p14:creationId xmlns:p14="http://schemas.microsoft.com/office/powerpoint/2010/main" val="3215577762"/>
-      </p:ext>
-    </p:extLst>
-  </p:cSld>
-  <p:clrMapOvr>
-    <a:masterClrMapping/>
-  </p:clrMapOvr>
-</p:sld>
-</file>
-
-<file path=ppt/slides/slide14.xml><?xml version="1.0" encoding="utf-8"?>
-<p:sld xmlns:a="http://schemas.openxmlformats.org/drawingml/2006/main" xmlns:r="http://schemas.openxmlformats.org/officeDocument/2006/relationships" xmlns:p="http://schemas.openxmlformats.org/presentationml/2006/main">
-  <p:cSld>
-    <p:spTree>
-      <p:nvGrpSpPr>
-        <p:cNvPr id="1" name="">
-          <a:extLst>
-            <a:ext uri="{FF2B5EF4-FFF2-40B4-BE49-F238E27FC236}">
-              <a16:creationId xmlns:a16="http://schemas.microsoft.com/office/drawing/2014/main" id="{CD58E2E4-D5C3-7E0F-D680-F53B22F4D776}"/>
-            </a:ext>
-          </a:extLst>
-        </p:cNvPr>
-        <p:cNvGrpSpPr/>
-        <p:nvPr/>
-      </p:nvGrpSpPr>
-      <p:grpSpPr>
-        <a:xfrm>
-          <a:off x="0" y="0"/>
-          <a:ext cx="0" cy="0"/>
-          <a:chOff x="0" y="0"/>
-          <a:chExt cx="0" cy="0"/>
-        </a:xfrm>
-      </p:grpSpPr>
-      <p:sp>
-        <p:nvSpPr>
-          <p:cNvPr id="10" name="Title 9">
-            <a:extLst>
-              <a:ext uri="{FF2B5EF4-FFF2-40B4-BE49-F238E27FC236}">
-                <a16:creationId xmlns:a16="http://schemas.microsoft.com/office/drawing/2014/main" id="{CEF68961-14AA-FB3C-4C26-3D7775CC0332}"/>
-              </a:ext>
-            </a:extLst>
-          </p:cNvPr>
-          <p:cNvSpPr>
-            <a:spLocks noGrp="1"/>
-          </p:cNvSpPr>
-          <p:nvPr>
-            <p:ph type="title"/>
-          </p:nvPr>
-        </p:nvSpPr>
-        <p:spPr>
-          <a:xfrm>
-            <a:off x="838200" y="256848"/>
-            <a:ext cx="10809718" cy="848378"/>
-          </a:xfrm>
-        </p:spPr>
-        <p:txBody>
-          <a:bodyPr>
-            <a:noAutofit/>
-          </a:bodyPr>
-          <a:lstStyle/>
-          <a:p>
-            <a:r>
-              <a:rPr lang="en-US" sz="3600"/>
-              <a:t>2.2 Using Jupyter Notebooks and Colab for Secure Coding</a:t>
-            </a:r>
-          </a:p>
-        </p:txBody>
-      </p:sp>
-      <p:sp>
-        <p:nvSpPr>
-          <p:cNvPr id="11" name="Content Placeholder 10">
-            <a:extLst>
-              <a:ext uri="{FF2B5EF4-FFF2-40B4-BE49-F238E27FC236}">
-                <a16:creationId xmlns:a16="http://schemas.microsoft.com/office/drawing/2014/main" id="{51B18173-9818-19D6-D961-BE1E195613E9}"/>
-              </a:ext>
-            </a:extLst>
-          </p:cNvPr>
-          <p:cNvSpPr>
-            <a:spLocks noGrp="1"/>
-          </p:cNvSpPr>
-          <p:nvPr>
-            <p:ph idx="1"/>
-          </p:nvPr>
-        </p:nvSpPr>
-        <p:spPr>
-          <a:xfrm>
-            <a:off x="838200" y="1375873"/>
-            <a:ext cx="10515600" cy="4801090"/>
-          </a:xfrm>
-        </p:spPr>
-        <p:txBody>
-          <a:bodyPr>
-            <a:normAutofit/>
-          </a:bodyPr>
-          <a:lstStyle/>
-          <a:p>
-            <a:pPr marL="282575" indent="-282575"/>
-            <a:endParaRPr lang="en-US" sz="3200"/>
-          </a:p>
-        </p:txBody>
-      </p:sp>
-    </p:spTree>
-    <p:extLst>
-      <p:ext uri="{BB962C8B-B14F-4D97-AF65-F5344CB8AC3E}">
-        <p14:creationId xmlns:p14="http://schemas.microsoft.com/office/powerpoint/2010/main" val="2905438888"/>
-      </p:ext>
-    </p:extLst>
-  </p:cSld>
-  <p:clrMapOvr>
-    <a:masterClrMapping/>
-  </p:clrMapOvr>
-</p:sld>
-</file>
-
-<file path=ppt/slides/slide15.xml><?xml version="1.0" encoding="utf-8"?>
-<p:sld xmlns:a="http://schemas.openxmlformats.org/drawingml/2006/main" xmlns:r="http://schemas.openxmlformats.org/officeDocument/2006/relationships" xmlns:p="http://schemas.openxmlformats.org/presentationml/2006/main">
-  <p:cSld>
-    <p:spTree>
-      <p:nvGrpSpPr>
-        <p:cNvPr id="1" name="">
-          <a:extLst>
-            <a:ext uri="{FF2B5EF4-FFF2-40B4-BE49-F238E27FC236}">
-              <a16:creationId xmlns:a16="http://schemas.microsoft.com/office/drawing/2014/main" id="{71F7F48B-00F8-D349-1620-6C4BB7C1F6E6}"/>
-            </a:ext>
-          </a:extLst>
-        </p:cNvPr>
-        <p:cNvGrpSpPr/>
-        <p:nvPr/>
-      </p:nvGrpSpPr>
-      <p:grpSpPr>
-        <a:xfrm>
-          <a:off x="0" y="0"/>
-          <a:ext cx="0" cy="0"/>
-          <a:chOff x="0" y="0"/>
-          <a:chExt cx="0" cy="0"/>
-        </a:xfrm>
-      </p:grpSpPr>
-      <p:sp>
-        <p:nvSpPr>
-          <p:cNvPr id="10" name="Title 9">
-            <a:extLst>
-              <a:ext uri="{FF2B5EF4-FFF2-40B4-BE49-F238E27FC236}">
-                <a16:creationId xmlns:a16="http://schemas.microsoft.com/office/drawing/2014/main" id="{9046873F-0694-788B-C149-D5E5A12A0BA9}"/>
-              </a:ext>
-            </a:extLst>
-          </p:cNvPr>
-          <p:cNvSpPr>
-            <a:spLocks noGrp="1"/>
-          </p:cNvSpPr>
-          <p:nvPr>
-            <p:ph type="title"/>
-          </p:nvPr>
-        </p:nvSpPr>
-        <p:spPr>
-          <a:xfrm>
-            <a:off x="838200" y="256848"/>
-            <a:ext cx="10809718" cy="848378"/>
-          </a:xfrm>
-        </p:spPr>
-        <p:txBody>
-          <a:bodyPr>
-            <a:noAutofit/>
-          </a:bodyPr>
-          <a:lstStyle/>
-          <a:p>
-            <a:r>
-              <a:rPr lang="en-US" sz="3600"/>
-              <a:t>2.3 Using Notebooks for Secure Data Analysis</a:t>
-            </a:r>
-          </a:p>
-        </p:txBody>
-      </p:sp>
-      <p:sp>
-        <p:nvSpPr>
-          <p:cNvPr id="11" name="Content Placeholder 10">
-            <a:extLst>
-              <a:ext uri="{FF2B5EF4-FFF2-40B4-BE49-F238E27FC236}">
-                <a16:creationId xmlns:a16="http://schemas.microsoft.com/office/drawing/2014/main" id="{C112198B-62A3-3CCD-BBB4-5F7A531B1EB6}"/>
-              </a:ext>
-            </a:extLst>
-          </p:cNvPr>
-          <p:cNvSpPr>
-            <a:spLocks noGrp="1"/>
-          </p:cNvSpPr>
-          <p:nvPr>
-            <p:ph idx="1"/>
-          </p:nvPr>
-        </p:nvSpPr>
-        <p:spPr>
-          <a:xfrm>
-            <a:off x="838200" y="1375873"/>
-            <a:ext cx="10515600" cy="4801090"/>
-          </a:xfrm>
-        </p:spPr>
-        <p:txBody>
-          <a:bodyPr>
-            <a:normAutofit/>
-          </a:bodyPr>
-          <a:lstStyle/>
-          <a:p>
-            <a:pPr marL="282575" indent="-282575"/>
-            <a:endParaRPr lang="en-US" sz="3200"/>
-          </a:p>
-        </p:txBody>
-      </p:sp>
-    </p:spTree>
-    <p:extLst>
-      <p:ext uri="{BB962C8B-B14F-4D97-AF65-F5344CB8AC3E}">
-        <p14:creationId xmlns:p14="http://schemas.microsoft.com/office/powerpoint/2010/main" val="3800115359"/>
-      </p:ext>
-    </p:extLst>
-  </p:cSld>
-  <p:clrMapOvr>
-    <a:masterClrMapping/>
-  </p:clrMapOvr>
-</p:sld>
-</file>
-
-<file path=ppt/slides/slide16.xml><?xml version="1.0" encoding="utf-8"?>
-<p:sld xmlns:a="http://schemas.openxmlformats.org/drawingml/2006/main" xmlns:r="http://schemas.openxmlformats.org/officeDocument/2006/relationships" xmlns:p="http://schemas.openxmlformats.org/presentationml/2006/main">
-  <p:cSld>
-    <p:spTree>
-      <p:nvGrpSpPr>
-        <p:cNvPr id="1" name="">
-          <a:extLst>
-            <a:ext uri="{FF2B5EF4-FFF2-40B4-BE49-F238E27FC236}">
-              <a16:creationId xmlns:a16="http://schemas.microsoft.com/office/drawing/2014/main" id="{9C1745D0-D333-B88F-D500-1D01AC76B462}"/>
-            </a:ext>
-          </a:extLst>
-        </p:cNvPr>
-        <p:cNvGrpSpPr/>
-        <p:nvPr/>
-      </p:nvGrpSpPr>
-      <p:grpSpPr>
-        <a:xfrm>
-          <a:off x="0" y="0"/>
-          <a:ext cx="0" cy="0"/>
-          <a:chOff x="0" y="0"/>
-          <a:chExt cx="0" cy="0"/>
-        </a:xfrm>
-      </p:grpSpPr>
-      <p:sp>
-        <p:nvSpPr>
-          <p:cNvPr id="10" name="Title 9">
-            <a:extLst>
-              <a:ext uri="{FF2B5EF4-FFF2-40B4-BE49-F238E27FC236}">
-                <a16:creationId xmlns:a16="http://schemas.microsoft.com/office/drawing/2014/main" id="{1CE47C4D-5624-2880-F8B2-6D63802034A0}"/>
-              </a:ext>
-            </a:extLst>
-          </p:cNvPr>
-          <p:cNvSpPr>
-            <a:spLocks noGrp="1"/>
-          </p:cNvSpPr>
-          <p:nvPr>
-            <p:ph type="title"/>
-          </p:nvPr>
-        </p:nvSpPr>
-        <p:spPr>
-          <a:xfrm>
-            <a:off x="838200" y="256848"/>
-            <a:ext cx="10809718" cy="848378"/>
-          </a:xfrm>
-        </p:spPr>
-        <p:txBody>
-          <a:bodyPr>
-            <a:noAutofit/>
-          </a:bodyPr>
-          <a:lstStyle/>
-          <a:p>
-            <a:r>
-              <a:rPr lang="en-US" sz="3600"/>
-              <a:t>3.1 Secure Coding Basics: Input Validation</a:t>
-            </a:r>
-          </a:p>
-        </p:txBody>
-      </p:sp>
-      <p:sp>
-        <p:nvSpPr>
-          <p:cNvPr id="11" name="Content Placeholder 10">
-            <a:extLst>
-              <a:ext uri="{FF2B5EF4-FFF2-40B4-BE49-F238E27FC236}">
-                <a16:creationId xmlns:a16="http://schemas.microsoft.com/office/drawing/2014/main" id="{2EB4C9A6-5396-D452-59E5-1C7A1C34B1CA}"/>
-              </a:ext>
-            </a:extLst>
-          </p:cNvPr>
-          <p:cNvSpPr>
-            <a:spLocks noGrp="1"/>
-          </p:cNvSpPr>
-          <p:nvPr>
-            <p:ph idx="1"/>
-          </p:nvPr>
-        </p:nvSpPr>
-        <p:spPr>
-          <a:xfrm>
-            <a:off x="838200" y="1375873"/>
-            <a:ext cx="10515600" cy="4801090"/>
-          </a:xfrm>
-        </p:spPr>
-        <p:txBody>
-          <a:bodyPr>
-            <a:normAutofit/>
-          </a:bodyPr>
-          <a:lstStyle/>
-          <a:p>
-            <a:pPr marL="282575" indent="-282575"/>
-            <a:endParaRPr lang="en-US" sz="3200"/>
-          </a:p>
-        </p:txBody>
-      </p:sp>
-    </p:spTree>
-    <p:extLst>
-      <p:ext uri="{BB962C8B-B14F-4D97-AF65-F5344CB8AC3E}">
-        <p14:creationId xmlns:p14="http://schemas.microsoft.com/office/powerpoint/2010/main" val="2495910325"/>
-      </p:ext>
-    </p:extLst>
-  </p:cSld>
-  <p:clrMapOvr>
-    <a:masterClrMapping/>
-  </p:clrMapOvr>
-</p:sld>
-</file>
-
-<file path=ppt/slides/slide17.xml><?xml version="1.0" encoding="utf-8"?>
-<p:sld xmlns:a="http://schemas.openxmlformats.org/drawingml/2006/main" xmlns:r="http://schemas.openxmlformats.org/officeDocument/2006/relationships" xmlns:p="http://schemas.openxmlformats.org/presentationml/2006/main">
-  <p:cSld>
-    <p:spTree>
-      <p:nvGrpSpPr>
-        <p:cNvPr id="1" name="">
-          <a:extLst>
-            <a:ext uri="{FF2B5EF4-FFF2-40B4-BE49-F238E27FC236}">
-              <a16:creationId xmlns:a16="http://schemas.microsoft.com/office/drawing/2014/main" id="{40A771A6-7906-ED6B-A908-BB4C04A0026F}"/>
-            </a:ext>
-          </a:extLst>
-        </p:cNvPr>
-        <p:cNvGrpSpPr/>
-        <p:nvPr/>
-      </p:nvGrpSpPr>
-      <p:grpSpPr>
-        <a:xfrm>
-          <a:off x="0" y="0"/>
-          <a:ext cx="0" cy="0"/>
-          <a:chOff x="0" y="0"/>
-          <a:chExt cx="0" cy="0"/>
-        </a:xfrm>
-      </p:grpSpPr>
-      <p:sp>
-        <p:nvSpPr>
-          <p:cNvPr id="10" name="Title 9">
-            <a:extLst>
-              <a:ext uri="{FF2B5EF4-FFF2-40B4-BE49-F238E27FC236}">
-                <a16:creationId xmlns:a16="http://schemas.microsoft.com/office/drawing/2014/main" id="{11610D1C-9617-EF88-6B0D-23C1A2A4BCE7}"/>
-              </a:ext>
-            </a:extLst>
-          </p:cNvPr>
-          <p:cNvSpPr>
-            <a:spLocks noGrp="1"/>
-          </p:cNvSpPr>
-          <p:nvPr>
-            <p:ph type="title"/>
-          </p:nvPr>
-        </p:nvSpPr>
-        <p:spPr>
-          <a:xfrm>
-            <a:off x="838200" y="256848"/>
-            <a:ext cx="10809718" cy="848378"/>
-          </a:xfrm>
-        </p:spPr>
-        <p:txBody>
-          <a:bodyPr>
-            <a:noAutofit/>
-          </a:bodyPr>
-          <a:lstStyle/>
-          <a:p>
-            <a:r>
-              <a:rPr lang="en-US" sz="3600"/>
-              <a:t>3.2 Python Coding Style Guidelines for Maintainable Code</a:t>
-            </a:r>
-          </a:p>
-        </p:txBody>
-      </p:sp>
-      <p:sp>
-        <p:nvSpPr>
-          <p:cNvPr id="11" name="Content Placeholder 10">
-            <a:extLst>
-              <a:ext uri="{FF2B5EF4-FFF2-40B4-BE49-F238E27FC236}">
-                <a16:creationId xmlns:a16="http://schemas.microsoft.com/office/drawing/2014/main" id="{BD147611-9C34-AD47-5210-D36D8FD398DF}"/>
-              </a:ext>
-            </a:extLst>
-          </p:cNvPr>
-          <p:cNvSpPr>
-            <a:spLocks noGrp="1"/>
-          </p:cNvSpPr>
-          <p:nvPr>
-            <p:ph idx="1"/>
-          </p:nvPr>
-        </p:nvSpPr>
-        <p:spPr>
-          <a:xfrm>
-            <a:off x="838200" y="1375873"/>
-            <a:ext cx="10515600" cy="4801090"/>
-          </a:xfrm>
-        </p:spPr>
-        <p:txBody>
-          <a:bodyPr>
-            <a:normAutofit/>
-          </a:bodyPr>
-          <a:lstStyle/>
-          <a:p>
-            <a:pPr marL="282575" indent="-282575"/>
-            <a:endParaRPr lang="en-US" sz="3200"/>
-          </a:p>
-        </p:txBody>
-      </p:sp>
-    </p:spTree>
-    <p:extLst>
-      <p:ext uri="{BB962C8B-B14F-4D97-AF65-F5344CB8AC3E}">
-        <p14:creationId xmlns:p14="http://schemas.microsoft.com/office/powerpoint/2010/main" val="31640725"/>
       </p:ext>
     </p:extLst>
   </p:cSld>
@@ -4502,7 +6494,558 @@
 </p:sld>
 </file>
 
+<file path=ppt/slides/slide20.xml><?xml version="1.0" encoding="utf-8"?>
+<p:sld xmlns:a="http://schemas.openxmlformats.org/drawingml/2006/main" xmlns:r="http://schemas.openxmlformats.org/officeDocument/2006/relationships" xmlns:p="http://schemas.openxmlformats.org/presentationml/2006/main">
+  <p:cSld>
+    <p:spTree>
+      <p:nvGrpSpPr>
+        <p:cNvPr id="1" name="">
+          <a:extLst>
+            <a:ext uri="{FF2B5EF4-FFF2-40B4-BE49-F238E27FC236}">
+              <a16:creationId xmlns:a16="http://schemas.microsoft.com/office/drawing/2014/main" id="{CD58E2E4-D5C3-7E0F-D680-F53B22F4D776}"/>
+            </a:ext>
+          </a:extLst>
+        </p:cNvPr>
+        <p:cNvGrpSpPr/>
+        <p:nvPr/>
+      </p:nvGrpSpPr>
+      <p:grpSpPr>
+        <a:xfrm>
+          <a:off x="0" y="0"/>
+          <a:ext cx="0" cy="0"/>
+          <a:chOff x="0" y="0"/>
+          <a:chExt cx="0" cy="0"/>
+        </a:xfrm>
+      </p:grpSpPr>
+      <p:sp>
+        <p:nvSpPr>
+          <p:cNvPr id="10" name="Title 9">
+            <a:extLst>
+              <a:ext uri="{FF2B5EF4-FFF2-40B4-BE49-F238E27FC236}">
+                <a16:creationId xmlns:a16="http://schemas.microsoft.com/office/drawing/2014/main" id="{CEF68961-14AA-FB3C-4C26-3D7775CC0332}"/>
+              </a:ext>
+            </a:extLst>
+          </p:cNvPr>
+          <p:cNvSpPr>
+            <a:spLocks noGrp="1"/>
+          </p:cNvSpPr>
+          <p:nvPr>
+            <p:ph type="title"/>
+          </p:nvPr>
+        </p:nvSpPr>
+        <p:spPr>
+          <a:xfrm>
+            <a:off x="838200" y="256848"/>
+            <a:ext cx="10809718" cy="848378"/>
+          </a:xfrm>
+        </p:spPr>
+        <p:txBody>
+          <a:bodyPr>
+            <a:noAutofit/>
+          </a:bodyPr>
+          <a:lstStyle/>
+          <a:p>
+            <a:r>
+              <a:rPr lang="en-US" sz="3600"/>
+              <a:t>2.2 Using Jupyter Notebooks and Colab for Secure Coding</a:t>
+            </a:r>
+          </a:p>
+        </p:txBody>
+      </p:sp>
+      <p:sp>
+        <p:nvSpPr>
+          <p:cNvPr id="11" name="Content Placeholder 10">
+            <a:extLst>
+              <a:ext uri="{FF2B5EF4-FFF2-40B4-BE49-F238E27FC236}">
+                <a16:creationId xmlns:a16="http://schemas.microsoft.com/office/drawing/2014/main" id="{51B18173-9818-19D6-D961-BE1E195613E9}"/>
+              </a:ext>
+            </a:extLst>
+          </p:cNvPr>
+          <p:cNvSpPr>
+            <a:spLocks noGrp="1"/>
+          </p:cNvSpPr>
+          <p:nvPr>
+            <p:ph idx="1"/>
+          </p:nvPr>
+        </p:nvSpPr>
+        <p:spPr>
+          <a:xfrm>
+            <a:off x="838200" y="1375873"/>
+            <a:ext cx="10515600" cy="4801090"/>
+          </a:xfrm>
+        </p:spPr>
+        <p:txBody>
+          <a:bodyPr>
+            <a:normAutofit/>
+          </a:bodyPr>
+          <a:lstStyle/>
+          <a:p>
+            <a:pPr marL="282575" indent="-282575"/>
+            <a:endParaRPr lang="en-US" sz="3200"/>
+          </a:p>
+        </p:txBody>
+      </p:sp>
+    </p:spTree>
+    <p:extLst>
+      <p:ext uri="{BB962C8B-B14F-4D97-AF65-F5344CB8AC3E}">
+        <p14:creationId xmlns:p14="http://schemas.microsoft.com/office/powerpoint/2010/main" val="2905438888"/>
+      </p:ext>
+    </p:extLst>
+  </p:cSld>
+  <p:clrMapOvr>
+    <a:masterClrMapping/>
+  </p:clrMapOvr>
+</p:sld>
+</file>
+
+<file path=ppt/slides/slide21.xml><?xml version="1.0" encoding="utf-8"?>
+<p:sld xmlns:a="http://schemas.openxmlformats.org/drawingml/2006/main" xmlns:r="http://schemas.openxmlformats.org/officeDocument/2006/relationships" xmlns:p="http://schemas.openxmlformats.org/presentationml/2006/main">
+  <p:cSld>
+    <p:spTree>
+      <p:nvGrpSpPr>
+        <p:cNvPr id="1" name="">
+          <a:extLst>
+            <a:ext uri="{FF2B5EF4-FFF2-40B4-BE49-F238E27FC236}">
+              <a16:creationId xmlns:a16="http://schemas.microsoft.com/office/drawing/2014/main" id="{71F7F48B-00F8-D349-1620-6C4BB7C1F6E6}"/>
+            </a:ext>
+          </a:extLst>
+        </p:cNvPr>
+        <p:cNvGrpSpPr/>
+        <p:nvPr/>
+      </p:nvGrpSpPr>
+      <p:grpSpPr>
+        <a:xfrm>
+          <a:off x="0" y="0"/>
+          <a:ext cx="0" cy="0"/>
+          <a:chOff x="0" y="0"/>
+          <a:chExt cx="0" cy="0"/>
+        </a:xfrm>
+      </p:grpSpPr>
+      <p:sp>
+        <p:nvSpPr>
+          <p:cNvPr id="10" name="Title 9">
+            <a:extLst>
+              <a:ext uri="{FF2B5EF4-FFF2-40B4-BE49-F238E27FC236}">
+                <a16:creationId xmlns:a16="http://schemas.microsoft.com/office/drawing/2014/main" id="{9046873F-0694-788B-C149-D5E5A12A0BA9}"/>
+              </a:ext>
+            </a:extLst>
+          </p:cNvPr>
+          <p:cNvSpPr>
+            <a:spLocks noGrp="1"/>
+          </p:cNvSpPr>
+          <p:nvPr>
+            <p:ph type="title"/>
+          </p:nvPr>
+        </p:nvSpPr>
+        <p:spPr>
+          <a:xfrm>
+            <a:off x="838200" y="256848"/>
+            <a:ext cx="10809718" cy="848378"/>
+          </a:xfrm>
+        </p:spPr>
+        <p:txBody>
+          <a:bodyPr>
+            <a:noAutofit/>
+          </a:bodyPr>
+          <a:lstStyle/>
+          <a:p>
+            <a:r>
+              <a:rPr lang="en-US" sz="3600"/>
+              <a:t>2.3 Using Notebooks for Secure Data Analysis</a:t>
+            </a:r>
+          </a:p>
+        </p:txBody>
+      </p:sp>
+      <p:sp>
+        <p:nvSpPr>
+          <p:cNvPr id="11" name="Content Placeholder 10">
+            <a:extLst>
+              <a:ext uri="{FF2B5EF4-FFF2-40B4-BE49-F238E27FC236}">
+                <a16:creationId xmlns:a16="http://schemas.microsoft.com/office/drawing/2014/main" id="{C112198B-62A3-3CCD-BBB4-5F7A531B1EB6}"/>
+              </a:ext>
+            </a:extLst>
+          </p:cNvPr>
+          <p:cNvSpPr>
+            <a:spLocks noGrp="1"/>
+          </p:cNvSpPr>
+          <p:nvPr>
+            <p:ph idx="1"/>
+          </p:nvPr>
+        </p:nvSpPr>
+        <p:spPr>
+          <a:xfrm>
+            <a:off x="838200" y="1375873"/>
+            <a:ext cx="10515600" cy="4801090"/>
+          </a:xfrm>
+        </p:spPr>
+        <p:txBody>
+          <a:bodyPr>
+            <a:normAutofit/>
+          </a:bodyPr>
+          <a:lstStyle/>
+          <a:p>
+            <a:pPr marL="282575" indent="-282575"/>
+            <a:endParaRPr lang="en-US" sz="3200"/>
+          </a:p>
+        </p:txBody>
+      </p:sp>
+    </p:spTree>
+    <p:extLst>
+      <p:ext uri="{BB962C8B-B14F-4D97-AF65-F5344CB8AC3E}">
+        <p14:creationId xmlns:p14="http://schemas.microsoft.com/office/powerpoint/2010/main" val="3800115359"/>
+      </p:ext>
+    </p:extLst>
+  </p:cSld>
+  <p:clrMapOvr>
+    <a:masterClrMapping/>
+  </p:clrMapOvr>
+</p:sld>
+</file>
+
+<file path=ppt/slides/slide22.xml><?xml version="1.0" encoding="utf-8"?>
+<p:sld xmlns:a="http://schemas.openxmlformats.org/drawingml/2006/main" xmlns:r="http://schemas.openxmlformats.org/officeDocument/2006/relationships" xmlns:p="http://schemas.openxmlformats.org/presentationml/2006/main">
+  <p:cSld>
+    <p:spTree>
+      <p:nvGrpSpPr>
+        <p:cNvPr id="1" name="">
+          <a:extLst>
+            <a:ext uri="{FF2B5EF4-FFF2-40B4-BE49-F238E27FC236}">
+              <a16:creationId xmlns:a16="http://schemas.microsoft.com/office/drawing/2014/main" id="{9C1745D0-D333-B88F-D500-1D01AC76B462}"/>
+            </a:ext>
+          </a:extLst>
+        </p:cNvPr>
+        <p:cNvGrpSpPr/>
+        <p:nvPr/>
+      </p:nvGrpSpPr>
+      <p:grpSpPr>
+        <a:xfrm>
+          <a:off x="0" y="0"/>
+          <a:ext cx="0" cy="0"/>
+          <a:chOff x="0" y="0"/>
+          <a:chExt cx="0" cy="0"/>
+        </a:xfrm>
+      </p:grpSpPr>
+      <p:sp>
+        <p:nvSpPr>
+          <p:cNvPr id="10" name="Title 9">
+            <a:extLst>
+              <a:ext uri="{FF2B5EF4-FFF2-40B4-BE49-F238E27FC236}">
+                <a16:creationId xmlns:a16="http://schemas.microsoft.com/office/drawing/2014/main" id="{1CE47C4D-5624-2880-F8B2-6D63802034A0}"/>
+              </a:ext>
+            </a:extLst>
+          </p:cNvPr>
+          <p:cNvSpPr>
+            <a:spLocks noGrp="1"/>
+          </p:cNvSpPr>
+          <p:nvPr>
+            <p:ph type="title"/>
+          </p:nvPr>
+        </p:nvSpPr>
+        <p:spPr>
+          <a:xfrm>
+            <a:off x="838200" y="256848"/>
+            <a:ext cx="10809718" cy="848378"/>
+          </a:xfrm>
+        </p:spPr>
+        <p:txBody>
+          <a:bodyPr>
+            <a:noAutofit/>
+          </a:bodyPr>
+          <a:lstStyle/>
+          <a:p>
+            <a:r>
+              <a:rPr lang="en-US" sz="3600"/>
+              <a:t>3.1 Secure Coding Basics: Input Validation</a:t>
+            </a:r>
+          </a:p>
+        </p:txBody>
+      </p:sp>
+      <p:sp>
+        <p:nvSpPr>
+          <p:cNvPr id="11" name="Content Placeholder 10">
+            <a:extLst>
+              <a:ext uri="{FF2B5EF4-FFF2-40B4-BE49-F238E27FC236}">
+                <a16:creationId xmlns:a16="http://schemas.microsoft.com/office/drawing/2014/main" id="{2EB4C9A6-5396-D452-59E5-1C7A1C34B1CA}"/>
+              </a:ext>
+            </a:extLst>
+          </p:cNvPr>
+          <p:cNvSpPr>
+            <a:spLocks noGrp="1"/>
+          </p:cNvSpPr>
+          <p:nvPr>
+            <p:ph idx="1"/>
+          </p:nvPr>
+        </p:nvSpPr>
+        <p:spPr>
+          <a:xfrm>
+            <a:off x="838200" y="1375873"/>
+            <a:ext cx="10515600" cy="4801090"/>
+          </a:xfrm>
+        </p:spPr>
+        <p:txBody>
+          <a:bodyPr>
+            <a:normAutofit/>
+          </a:bodyPr>
+          <a:lstStyle/>
+          <a:p>
+            <a:pPr marL="282575" indent="-282575"/>
+            <a:endParaRPr lang="en-US" sz="3200"/>
+          </a:p>
+        </p:txBody>
+      </p:sp>
+    </p:spTree>
+    <p:extLst>
+      <p:ext uri="{BB962C8B-B14F-4D97-AF65-F5344CB8AC3E}">
+        <p14:creationId xmlns:p14="http://schemas.microsoft.com/office/powerpoint/2010/main" val="2495910325"/>
+      </p:ext>
+    </p:extLst>
+  </p:cSld>
+  <p:clrMapOvr>
+    <a:masterClrMapping/>
+  </p:clrMapOvr>
+</p:sld>
+</file>
+
+<file path=ppt/slides/slide23.xml><?xml version="1.0" encoding="utf-8"?>
+<p:sld xmlns:a="http://schemas.openxmlformats.org/drawingml/2006/main" xmlns:r="http://schemas.openxmlformats.org/officeDocument/2006/relationships" xmlns:p="http://schemas.openxmlformats.org/presentationml/2006/main">
+  <p:cSld>
+    <p:spTree>
+      <p:nvGrpSpPr>
+        <p:cNvPr id="1" name="">
+          <a:extLst>
+            <a:ext uri="{FF2B5EF4-FFF2-40B4-BE49-F238E27FC236}">
+              <a16:creationId xmlns:a16="http://schemas.microsoft.com/office/drawing/2014/main" id="{40A771A6-7906-ED6B-A908-BB4C04A0026F}"/>
+            </a:ext>
+          </a:extLst>
+        </p:cNvPr>
+        <p:cNvGrpSpPr/>
+        <p:nvPr/>
+      </p:nvGrpSpPr>
+      <p:grpSpPr>
+        <a:xfrm>
+          <a:off x="0" y="0"/>
+          <a:ext cx="0" cy="0"/>
+          <a:chOff x="0" y="0"/>
+          <a:chExt cx="0" cy="0"/>
+        </a:xfrm>
+      </p:grpSpPr>
+      <p:sp>
+        <p:nvSpPr>
+          <p:cNvPr id="10" name="Title 9">
+            <a:extLst>
+              <a:ext uri="{FF2B5EF4-FFF2-40B4-BE49-F238E27FC236}">
+                <a16:creationId xmlns:a16="http://schemas.microsoft.com/office/drawing/2014/main" id="{11610D1C-9617-EF88-6B0D-23C1A2A4BCE7}"/>
+              </a:ext>
+            </a:extLst>
+          </p:cNvPr>
+          <p:cNvSpPr>
+            <a:spLocks noGrp="1"/>
+          </p:cNvSpPr>
+          <p:nvPr>
+            <p:ph type="title"/>
+          </p:nvPr>
+        </p:nvSpPr>
+        <p:spPr>
+          <a:xfrm>
+            <a:off x="838200" y="256848"/>
+            <a:ext cx="10809718" cy="848378"/>
+          </a:xfrm>
+        </p:spPr>
+        <p:txBody>
+          <a:bodyPr>
+            <a:noAutofit/>
+          </a:bodyPr>
+          <a:lstStyle/>
+          <a:p>
+            <a:r>
+              <a:rPr lang="en-US" sz="3600"/>
+              <a:t>3.2 Python Coding Style Guidelines for Maintainable Code</a:t>
+            </a:r>
+          </a:p>
+        </p:txBody>
+      </p:sp>
+      <p:sp>
+        <p:nvSpPr>
+          <p:cNvPr id="11" name="Content Placeholder 10">
+            <a:extLst>
+              <a:ext uri="{FF2B5EF4-FFF2-40B4-BE49-F238E27FC236}">
+                <a16:creationId xmlns:a16="http://schemas.microsoft.com/office/drawing/2014/main" id="{BD147611-9C34-AD47-5210-D36D8FD398DF}"/>
+              </a:ext>
+            </a:extLst>
+          </p:cNvPr>
+          <p:cNvSpPr>
+            <a:spLocks noGrp="1"/>
+          </p:cNvSpPr>
+          <p:nvPr>
+            <p:ph idx="1"/>
+          </p:nvPr>
+        </p:nvSpPr>
+        <p:spPr>
+          <a:xfrm>
+            <a:off x="838200" y="1375873"/>
+            <a:ext cx="10515600" cy="4801090"/>
+          </a:xfrm>
+        </p:spPr>
+        <p:txBody>
+          <a:bodyPr>
+            <a:normAutofit/>
+          </a:bodyPr>
+          <a:lstStyle/>
+          <a:p>
+            <a:pPr marL="282575" indent="-282575"/>
+            <a:endParaRPr lang="en-US" sz="3200"/>
+          </a:p>
+        </p:txBody>
+      </p:sp>
+    </p:spTree>
+    <p:extLst>
+      <p:ext uri="{BB962C8B-B14F-4D97-AF65-F5344CB8AC3E}">
+        <p14:creationId xmlns:p14="http://schemas.microsoft.com/office/powerpoint/2010/main" val="31640725"/>
+      </p:ext>
+    </p:extLst>
+  </p:cSld>
+  <p:clrMapOvr>
+    <a:masterClrMapping/>
+  </p:clrMapOvr>
+</p:sld>
+</file>
+
 <file path=ppt/slides/slide3.xml><?xml version="1.0" encoding="utf-8"?>
+<p:sld xmlns:a="http://schemas.openxmlformats.org/drawingml/2006/main" xmlns:r="http://schemas.openxmlformats.org/officeDocument/2006/relationships" xmlns:p="http://schemas.openxmlformats.org/presentationml/2006/main">
+  <p:cSld>
+    <p:spTree>
+      <p:nvGrpSpPr>
+        <p:cNvPr id="1" name="">
+          <a:extLst>
+            <a:ext uri="{FF2B5EF4-FFF2-40B4-BE49-F238E27FC236}">
+              <a16:creationId xmlns:a16="http://schemas.microsoft.com/office/drawing/2014/main" id="{943EDA66-9776-DF72-BB1A-73A50CAE0759}"/>
+            </a:ext>
+          </a:extLst>
+        </p:cNvPr>
+        <p:cNvGrpSpPr/>
+        <p:nvPr/>
+      </p:nvGrpSpPr>
+      <p:grpSpPr>
+        <a:xfrm>
+          <a:off x="0" y="0"/>
+          <a:ext cx="0" cy="0"/>
+          <a:chOff x="0" y="0"/>
+          <a:chExt cx="0" cy="0"/>
+        </a:xfrm>
+      </p:grpSpPr>
+      <p:sp>
+        <p:nvSpPr>
+          <p:cNvPr id="10" name="Title 9">
+            <a:extLst>
+              <a:ext uri="{FF2B5EF4-FFF2-40B4-BE49-F238E27FC236}">
+                <a16:creationId xmlns:a16="http://schemas.microsoft.com/office/drawing/2014/main" id="{9CC779B4-3594-DB91-27A3-28F1C86DE4AD}"/>
+              </a:ext>
+            </a:extLst>
+          </p:cNvPr>
+          <p:cNvSpPr>
+            <a:spLocks noGrp="1"/>
+          </p:cNvSpPr>
+          <p:nvPr>
+            <p:ph type="title"/>
+          </p:nvPr>
+        </p:nvSpPr>
+        <p:spPr>
+          <a:xfrm>
+            <a:off x="838200" y="256848"/>
+            <a:ext cx="10515600" cy="848378"/>
+          </a:xfrm>
+        </p:spPr>
+        <p:txBody>
+          <a:bodyPr>
+            <a:noAutofit/>
+          </a:bodyPr>
+          <a:lstStyle/>
+          <a:p>
+            <a:r>
+              <a:rPr lang="en-US"/>
+              <a:t>1.1 Introduction to Secure Version Control</a:t>
+            </a:r>
+          </a:p>
+        </p:txBody>
+      </p:sp>
+      <p:sp>
+        <p:nvSpPr>
+          <p:cNvPr id="11" name="Content Placeholder 10">
+            <a:extLst>
+              <a:ext uri="{FF2B5EF4-FFF2-40B4-BE49-F238E27FC236}">
+                <a16:creationId xmlns:a16="http://schemas.microsoft.com/office/drawing/2014/main" id="{3FBDD9F2-2560-FE55-0FAE-2B2B9DAE6391}"/>
+              </a:ext>
+            </a:extLst>
+          </p:cNvPr>
+          <p:cNvSpPr>
+            <a:spLocks noGrp="1"/>
+          </p:cNvSpPr>
+          <p:nvPr>
+            <p:ph idx="1"/>
+          </p:nvPr>
+        </p:nvSpPr>
+        <p:spPr>
+          <a:xfrm>
+            <a:off x="838200" y="1375873"/>
+            <a:ext cx="10515600" cy="4801090"/>
+          </a:xfrm>
+        </p:spPr>
+        <p:txBody>
+          <a:bodyPr>
+            <a:normAutofit fontScale="92500"/>
+          </a:bodyPr>
+          <a:lstStyle/>
+          <a:p>
+            <a:pPr marL="282575" indent="-282575"/>
+            <a:r>
+              <a:rPr lang="en-US" sz="3200"/>
+              <a:t>Git and GitHub allow students to learn secure coding practices, conduct peer reviews, and detect vulnerabilities early in the development cycle. </a:t>
+            </a:r>
+          </a:p>
+          <a:p>
+            <a:pPr marL="282575" indent="-282575"/>
+            <a:r>
+              <a:rPr lang="en-US" sz="3200"/>
+              <a:t>Multiple contributors can work on projects without conflicts.</a:t>
+            </a:r>
+          </a:p>
+          <a:p>
+            <a:pPr marL="282575" indent="-282575"/>
+            <a:r>
+              <a:rPr lang="en-US" sz="3200"/>
+              <a:t>Improves reproducibility by offering transparency and traceability in research projects.</a:t>
+            </a:r>
+          </a:p>
+          <a:p>
+            <a:pPr marL="282575" indent="-282575"/>
+            <a:r>
+              <a:rPr lang="en-US" sz="3200"/>
+              <a:t>Enforces access control and permissions by restricting  unauthorized modifications using protected branches.</a:t>
+            </a:r>
+          </a:p>
+          <a:p>
+            <a:pPr marL="282575" indent="-282575"/>
+            <a:r>
+              <a:rPr lang="en-US" sz="3200"/>
+              <a:t>Encourages structured, versioned, and well-documented coding workflows.</a:t>
+            </a:r>
+          </a:p>
+        </p:txBody>
+      </p:sp>
+    </p:spTree>
+    <p:extLst>
+      <p:ext uri="{BB962C8B-B14F-4D97-AF65-F5344CB8AC3E}">
+        <p14:creationId xmlns:p14="http://schemas.microsoft.com/office/powerpoint/2010/main" val="3584772327"/>
+      </p:ext>
+    </p:extLst>
+  </p:cSld>
+  <p:clrMapOvr>
+    <a:masterClrMapping/>
+  </p:clrMapOvr>
+</p:sld>
+</file>
+
+<file path=ppt/slides/slide4.xml><?xml version="1.0" encoding="utf-8"?>
 <p:sld xmlns:a="http://schemas.openxmlformats.org/drawingml/2006/main" xmlns:r="http://schemas.openxmlformats.org/officeDocument/2006/relationships" xmlns:p="http://schemas.openxmlformats.org/presentationml/2006/main">
   <p:cSld>
     <p:spTree>
@@ -4578,41 +7121,81 @@
         </p:nvSpPr>
         <p:spPr>
           <a:xfrm>
-            <a:off x="838200" y="1375873"/>
-            <a:ext cx="10515600" cy="4801090"/>
+            <a:off x="838200" y="1204957"/>
+            <a:ext cx="10515600" cy="4972006"/>
           </a:xfrm>
         </p:spPr>
         <p:txBody>
           <a:bodyPr>
-            <a:normAutofit/>
+            <a:normAutofit fontScale="62500" lnSpcReduction="20000"/>
           </a:bodyPr>
           <a:lstStyle/>
           <a:p>
             <a:pPr marL="282575" indent="-282575"/>
             <a:r>
+              <a:rPr lang="en-US" sz="3200" b="1"/>
+              <a:t>Git</a:t>
+            </a:r>
+            <a:r>
               <a:rPr lang="en-US" sz="3200"/>
-              <a:t>Overview of version control systems (focus on Git, GitHub).</a:t>
+              <a:t> ensures code changes are tracked, managed, and reviewed systematically for security and accountability.</a:t>
             </a:r>
           </a:p>
           <a:p>
             <a:pPr marL="282575" indent="-282575"/>
             <a:r>
               <a:rPr lang="en-US" sz="3200"/>
-              <a:t>Importance of secure development practices in academic settings.</a:t>
+              <a:t>Branching and merging allow teams to develop features and security patches separately before integrating them into the main codebase.</a:t>
             </a:r>
           </a:p>
           <a:p>
             <a:pPr marL="282575" indent="-282575"/>
             <a:r>
               <a:rPr lang="en-US" sz="3200"/>
-              <a:t>Common security pitfalls in version control (e.g., exposing secrets, poor access management).</a:t>
+              <a:t>Commit history and diffs provide visibility into changes, helping to identify and prevent security vulnerabilities.</a:t>
             </a:r>
           </a:p>
           <a:p>
             <a:pPr marL="282575" indent="-282575"/>
             <a:r>
               <a:rPr lang="en-US" sz="3200"/>
-              <a:t>Hands-on: Setting up a secure GitHub repository (private vs. public).</a:t>
+              <a:t>Rollback and recovery capabilities enable reverting to previous versions to mitigate security breaches or accidental changes.</a:t>
+            </a:r>
+          </a:p>
+          <a:p>
+            <a:pPr marL="282575" indent="-282575"/>
+            <a:endParaRPr lang="en-US" sz="1600"/>
+          </a:p>
+          <a:p>
+            <a:pPr marL="282575" indent="-282575"/>
+            <a:r>
+              <a:rPr lang="en-US" sz="3200" b="1"/>
+              <a:t>GitHub</a:t>
+            </a:r>
+            <a:r>
+              <a:rPr lang="en-US" sz="3200"/>
+              <a:t> provides cloud-based tools for managing repositories, enforcing security policies, and controlling access.</a:t>
+            </a:r>
+          </a:p>
+          <a:p>
+            <a:pPr marL="282575" indent="-282575"/>
+            <a:r>
+              <a:rPr lang="en-US" sz="3200"/>
+              <a:t>Pull requests and code reviews ensure changes are reviewed by peers before merging, reducing the risk of introducing vulnerabilities.</a:t>
+            </a:r>
+          </a:p>
+          <a:p>
+            <a:pPr marL="282575" indent="-282575"/>
+            <a:r>
+              <a:rPr lang="en-US" sz="3200"/>
+              <a:t>Security tools in GitHub (e.g., Dependabot, secret scanning, code scanning) help detect vulnerabilities in dependencies and source code.</a:t>
+            </a:r>
+          </a:p>
+          <a:p>
+            <a:pPr marL="282575" indent="-282575"/>
+            <a:r>
+              <a:rPr lang="en-US" sz="3200"/>
+              <a:t>Access controls and compliance features, such as protected branches and role-based permissions, enforce secure coding practices and industry standards.</a:t>
             </a:r>
           </a:p>
         </p:txBody>
@@ -4630,7 +7213,114 @@
 </p:sld>
 </file>
 
-<file path=ppt/slides/slide4.xml><?xml version="1.0" encoding="utf-8"?>
+<file path=ppt/slides/slide5.xml><?xml version="1.0" encoding="utf-8"?>
+<p:sld xmlns:a="http://schemas.openxmlformats.org/drawingml/2006/main" xmlns:r="http://schemas.openxmlformats.org/officeDocument/2006/relationships" xmlns:p="http://schemas.openxmlformats.org/presentationml/2006/main">
+  <p:cSld>
+    <p:spTree>
+      <p:nvGrpSpPr>
+        <p:cNvPr id="1" name="">
+          <a:extLst>
+            <a:ext uri="{FF2B5EF4-FFF2-40B4-BE49-F238E27FC236}">
+              <a16:creationId xmlns:a16="http://schemas.microsoft.com/office/drawing/2014/main" id="{15828146-386D-8E56-4610-EC70327B2F63}"/>
+            </a:ext>
+          </a:extLst>
+        </p:cNvPr>
+        <p:cNvGrpSpPr/>
+        <p:nvPr/>
+      </p:nvGrpSpPr>
+      <p:grpSpPr>
+        <a:xfrm>
+          <a:off x="0" y="0"/>
+          <a:ext cx="0" cy="0"/>
+          <a:chOff x="0" y="0"/>
+          <a:chExt cx="0" cy="0"/>
+        </a:xfrm>
+      </p:grpSpPr>
+      <p:sp>
+        <p:nvSpPr>
+          <p:cNvPr id="10" name="Title 9">
+            <a:extLst>
+              <a:ext uri="{FF2B5EF4-FFF2-40B4-BE49-F238E27FC236}">
+                <a16:creationId xmlns:a16="http://schemas.microsoft.com/office/drawing/2014/main" id="{FBDE352B-D371-09DE-8239-41C7C9EE0BF8}"/>
+              </a:ext>
+            </a:extLst>
+          </p:cNvPr>
+          <p:cNvSpPr>
+            <a:spLocks noGrp="1"/>
+          </p:cNvSpPr>
+          <p:nvPr>
+            <p:ph type="title"/>
+          </p:nvPr>
+        </p:nvSpPr>
+        <p:spPr>
+          <a:xfrm>
+            <a:off x="838200" y="256848"/>
+            <a:ext cx="10515600" cy="848378"/>
+          </a:xfrm>
+        </p:spPr>
+        <p:txBody>
+          <a:bodyPr>
+            <a:noAutofit/>
+          </a:bodyPr>
+          <a:lstStyle/>
+          <a:p>
+            <a:r>
+              <a:rPr lang="en-US"/>
+              <a:t>1.1 Introduction to Secure Version Control</a:t>
+            </a:r>
+          </a:p>
+        </p:txBody>
+      </p:sp>
+      <p:sp>
+        <p:nvSpPr>
+          <p:cNvPr id="11" name="Content Placeholder 10">
+            <a:extLst>
+              <a:ext uri="{FF2B5EF4-FFF2-40B4-BE49-F238E27FC236}">
+                <a16:creationId xmlns:a16="http://schemas.microsoft.com/office/drawing/2014/main" id="{2DE612B2-F3BE-E853-3504-5285543090BB}"/>
+              </a:ext>
+            </a:extLst>
+          </p:cNvPr>
+          <p:cNvSpPr>
+            <a:spLocks noGrp="1"/>
+          </p:cNvSpPr>
+          <p:nvPr>
+            <p:ph idx="1"/>
+          </p:nvPr>
+        </p:nvSpPr>
+        <p:spPr>
+          <a:xfrm>
+            <a:off x="838200" y="1375873"/>
+            <a:ext cx="10515600" cy="4801090"/>
+          </a:xfrm>
+        </p:spPr>
+        <p:txBody>
+          <a:bodyPr>
+            <a:normAutofit/>
+          </a:bodyPr>
+          <a:lstStyle/>
+          <a:p>
+            <a:pPr marL="282575" indent="-282575"/>
+            <a:r>
+              <a:rPr lang="en-US" sz="3200"/>
+              <a:t>Hands-on: Setting up a secure GitHub repository (private vs. public), using Dependabot to scan dependencies.</a:t>
+            </a:r>
+          </a:p>
+        </p:txBody>
+      </p:sp>
+    </p:spTree>
+    <p:extLst>
+      <p:ext uri="{BB962C8B-B14F-4D97-AF65-F5344CB8AC3E}">
+        <p14:creationId xmlns:p14="http://schemas.microsoft.com/office/powerpoint/2010/main" val="841127966"/>
+      </p:ext>
+    </p:extLst>
+  </p:cSld>
+  <p:clrMapOvr>
+    <a:masterClrMapping/>
+  </p:clrMapOvr>
+</p:sld>
+</file>
+
+<file path=ppt/slides/slide6.xml><?xml version="1.0" encoding="utf-8"?>
 <p:sld xmlns:a="http://schemas.openxmlformats.org/drawingml/2006/main" xmlns:r="http://schemas.openxmlformats.org/officeDocument/2006/relationships" xmlns:p="http://schemas.openxmlformats.org/presentationml/2006/main">
   <p:cSld>
     <p:spTree>
@@ -4706,41 +7396,77 @@
         </p:nvSpPr>
         <p:spPr>
           <a:xfrm>
-            <a:off x="838200" y="1375873"/>
-            <a:ext cx="10515600" cy="4801090"/>
+            <a:off x="838200" y="1203960"/>
+            <a:ext cx="10515600" cy="4973003"/>
           </a:xfrm>
         </p:spPr>
         <p:txBody>
           <a:bodyPr>
-            <a:normAutofit/>
+            <a:normAutofit fontScale="92500"/>
           </a:bodyPr>
           <a:lstStyle/>
           <a:p>
-            <a:pPr marL="282575" indent="-282575"/>
-            <a:r>
-              <a:rPr lang="en-US" sz="3200"/>
-              <a:t>Enforcing multi-factor authentication (MFA) for access.</a:t>
-            </a:r>
-          </a:p>
-          <a:p>
-            <a:pPr marL="282575" indent="-282575"/>
-            <a:r>
-              <a:rPr lang="en-US" sz="3200"/>
-              <a:t>Using role-based access control (RBAC) to manage permissions.</a:t>
-            </a:r>
-          </a:p>
-          <a:p>
-            <a:pPr marL="282575" indent="-282575"/>
-            <a:r>
-              <a:rPr lang="en-US" sz="3200"/>
-              <a:t>Assigning appropriate repository roles to students.</a:t>
-            </a:r>
-          </a:p>
-          <a:p>
-            <a:pPr marL="282575" indent="-282575"/>
-            <a:r>
-              <a:rPr lang="en-US" sz="3200"/>
-              <a:t>Hands-on: Creating a GitHub repository with secure settings.</a:t>
+            <a:pPr marL="282575" indent="-282575">
+              <a:lnSpc>
+                <a:spcPct val="120000"/>
+              </a:lnSpc>
+            </a:pPr>
+            <a:r>
+              <a:rPr lang="en-US" sz="2400"/>
+              <a:t>GitHub uses Multi-Factor Authentication (MFA) to enhance account security by requiring users to provide an additional verification factor beyond their password. </a:t>
+            </a:r>
+          </a:p>
+          <a:p>
+            <a:pPr marL="282575" indent="-282575">
+              <a:lnSpc>
+                <a:spcPct val="120000"/>
+              </a:lnSpc>
+            </a:pPr>
+            <a:r>
+              <a:rPr lang="en-US" sz="2400"/>
+              <a:t>Users can enable MFA through time-based one-time passwords (TOTP) generated by authenticator apps like Google Authenticator or Authy, security keys that support </a:t>
+            </a:r>
+            <a:r>
+              <a:rPr lang="en-US" sz="2400">
+                <a:hlinkClick r:id="rId2"/>
+              </a:rPr>
+              <a:t>FIDO2</a:t>
+            </a:r>
+            <a:r>
+              <a:rPr lang="en-US" sz="2400"/>
+              <a:t>/</a:t>
+            </a:r>
+            <a:r>
+              <a:rPr lang="en-US" sz="2400">
+                <a:hlinkClick r:id="rId3"/>
+              </a:rPr>
+              <a:t>WebAuthn</a:t>
+            </a:r>
+            <a:r>
+              <a:rPr lang="en-US" sz="2400"/>
+              <a:t>, or SMS-based authentication (less recommended due to security concerns). </a:t>
+            </a:r>
+          </a:p>
+          <a:p>
+            <a:pPr marL="282575" indent="-282575">
+              <a:lnSpc>
+                <a:spcPct val="120000"/>
+              </a:lnSpc>
+            </a:pPr>
+            <a:r>
+              <a:rPr lang="en-US" sz="2400"/>
+              <a:t>Once enabled, MFA is required during login and when performing sensitive actions, such as modifying account settings or accessing repositories with heightened security policies. </a:t>
+            </a:r>
+          </a:p>
+          <a:p>
+            <a:pPr marL="282575" indent="-282575">
+              <a:lnSpc>
+                <a:spcPct val="120000"/>
+              </a:lnSpc>
+            </a:pPr>
+            <a:r>
+              <a:rPr lang="en-US" sz="2400"/>
+              <a:t>Additionally, GitHub allows organizations to enforce MFA for members, ensuring stronger protection for repositories and codebases.</a:t>
             </a:r>
           </a:p>
         </p:txBody>
@@ -4749,260 +7475,6 @@
     <p:extLst>
       <p:ext uri="{BB962C8B-B14F-4D97-AF65-F5344CB8AC3E}">
         <p14:creationId xmlns:p14="http://schemas.microsoft.com/office/powerpoint/2010/main" val="3064009092"/>
-      </p:ext>
-    </p:extLst>
-  </p:cSld>
-  <p:clrMapOvr>
-    <a:masterClrMapping/>
-  </p:clrMapOvr>
-</p:sld>
-</file>
-
-<file path=ppt/slides/slide5.xml><?xml version="1.0" encoding="utf-8"?>
-<p:sld xmlns:a="http://schemas.openxmlformats.org/drawingml/2006/main" xmlns:r="http://schemas.openxmlformats.org/officeDocument/2006/relationships" xmlns:p="http://schemas.openxmlformats.org/presentationml/2006/main">
-  <p:cSld>
-    <p:spTree>
-      <p:nvGrpSpPr>
-        <p:cNvPr id="1" name="">
-          <a:extLst>
-            <a:ext uri="{FF2B5EF4-FFF2-40B4-BE49-F238E27FC236}">
-              <a16:creationId xmlns:a16="http://schemas.microsoft.com/office/drawing/2014/main" id="{2C547B91-D324-0341-0502-5B2162A38B99}"/>
-            </a:ext>
-          </a:extLst>
-        </p:cNvPr>
-        <p:cNvGrpSpPr/>
-        <p:nvPr/>
-      </p:nvGrpSpPr>
-      <p:grpSpPr>
-        <a:xfrm>
-          <a:off x="0" y="0"/>
-          <a:ext cx="0" cy="0"/>
-          <a:chOff x="0" y="0"/>
-          <a:chExt cx="0" cy="0"/>
-        </a:xfrm>
-      </p:grpSpPr>
-      <p:sp>
-        <p:nvSpPr>
-          <p:cNvPr id="10" name="Title 9">
-            <a:extLst>
-              <a:ext uri="{FF2B5EF4-FFF2-40B4-BE49-F238E27FC236}">
-                <a16:creationId xmlns:a16="http://schemas.microsoft.com/office/drawing/2014/main" id="{404C2249-DEFA-8756-55A2-7043C71FA497}"/>
-              </a:ext>
-            </a:extLst>
-          </p:cNvPr>
-          <p:cNvSpPr>
-            <a:spLocks noGrp="1"/>
-          </p:cNvSpPr>
-          <p:nvPr>
-            <p:ph type="title"/>
-          </p:nvPr>
-        </p:nvSpPr>
-        <p:spPr>
-          <a:xfrm>
-            <a:off x="838199" y="256848"/>
-            <a:ext cx="10824029" cy="848378"/>
-          </a:xfrm>
-        </p:spPr>
-        <p:txBody>
-          <a:bodyPr/>
-          <a:lstStyle/>
-          <a:p>
-            <a:pPr marL="282575" indent="-282575"/>
-            <a:r>
-              <a:rPr lang="en-US" sz="4400"/>
-              <a:t>1.3 Branching Strategies and Secure Workflows</a:t>
-            </a:r>
-          </a:p>
-        </p:txBody>
-      </p:sp>
-      <p:sp>
-        <p:nvSpPr>
-          <p:cNvPr id="11" name="Content Placeholder 10">
-            <a:extLst>
-              <a:ext uri="{FF2B5EF4-FFF2-40B4-BE49-F238E27FC236}">
-                <a16:creationId xmlns:a16="http://schemas.microsoft.com/office/drawing/2014/main" id="{AFB64EC2-884E-9EC0-089A-5B9748E29B28}"/>
-              </a:ext>
-            </a:extLst>
-          </p:cNvPr>
-          <p:cNvSpPr>
-            <a:spLocks noGrp="1"/>
-          </p:cNvSpPr>
-          <p:nvPr>
-            <p:ph idx="1"/>
-          </p:nvPr>
-        </p:nvSpPr>
-        <p:spPr>
-          <a:xfrm>
-            <a:off x="838200" y="1375873"/>
-            <a:ext cx="10515600" cy="4801090"/>
-          </a:xfrm>
-        </p:spPr>
-        <p:txBody>
-          <a:bodyPr>
-            <a:normAutofit/>
-          </a:bodyPr>
-          <a:lstStyle/>
-          <a:p>
-            <a:pPr marL="282575" indent="-282575"/>
-            <a:r>
-              <a:rPr lang="en-US" sz="3200"/>
-              <a:t>Introduction to branching models (GitFlow, feature branches, trunk-based development).</a:t>
-            </a:r>
-          </a:p>
-          <a:p>
-            <a:pPr marL="282575" indent="-282575"/>
-            <a:r>
-              <a:rPr lang="en-US" sz="3200"/>
-              <a:t>Implementing protected branches to prevent unauthorized changes.</a:t>
-            </a:r>
-          </a:p>
-          <a:p>
-            <a:pPr marL="282575" indent="-282575"/>
-            <a:r>
-              <a:rPr lang="en-US" sz="3200"/>
-              <a:t>Setting up feature branches and submitting pull requests (PRs).</a:t>
-            </a:r>
-          </a:p>
-          <a:p>
-            <a:pPr marL="282575" indent="-282575"/>
-            <a:r>
-              <a:rPr lang="en-US" sz="3200"/>
-              <a:t>Hands-on: Configuring branch protection rules in GitHub.</a:t>
-            </a:r>
-          </a:p>
-        </p:txBody>
-      </p:sp>
-    </p:spTree>
-    <p:extLst>
-      <p:ext uri="{BB962C8B-B14F-4D97-AF65-F5344CB8AC3E}">
-        <p14:creationId xmlns:p14="http://schemas.microsoft.com/office/powerpoint/2010/main" val="2256014701"/>
-      </p:ext>
-    </p:extLst>
-  </p:cSld>
-  <p:clrMapOvr>
-    <a:masterClrMapping/>
-  </p:clrMapOvr>
-</p:sld>
-</file>
-
-<file path=ppt/slides/slide6.xml><?xml version="1.0" encoding="utf-8"?>
-<p:sld xmlns:a="http://schemas.openxmlformats.org/drawingml/2006/main" xmlns:r="http://schemas.openxmlformats.org/officeDocument/2006/relationships" xmlns:p="http://schemas.openxmlformats.org/presentationml/2006/main">
-  <p:cSld>
-    <p:spTree>
-      <p:nvGrpSpPr>
-        <p:cNvPr id="1" name="">
-          <a:extLst>
-            <a:ext uri="{FF2B5EF4-FFF2-40B4-BE49-F238E27FC236}">
-              <a16:creationId xmlns:a16="http://schemas.microsoft.com/office/drawing/2014/main" id="{33D0842A-AE90-0CB0-7BCD-5D3E7EB8B0F9}"/>
-            </a:ext>
-          </a:extLst>
-        </p:cNvPr>
-        <p:cNvGrpSpPr/>
-        <p:nvPr/>
-      </p:nvGrpSpPr>
-      <p:grpSpPr>
-        <a:xfrm>
-          <a:off x="0" y="0"/>
-          <a:ext cx="0" cy="0"/>
-          <a:chOff x="0" y="0"/>
-          <a:chExt cx="0" cy="0"/>
-        </a:xfrm>
-      </p:grpSpPr>
-      <p:sp>
-        <p:nvSpPr>
-          <p:cNvPr id="10" name="Title 9">
-            <a:extLst>
-              <a:ext uri="{FF2B5EF4-FFF2-40B4-BE49-F238E27FC236}">
-                <a16:creationId xmlns:a16="http://schemas.microsoft.com/office/drawing/2014/main" id="{82F1E25C-CBDF-D2BF-4EFC-BC6EA2A24318}"/>
-              </a:ext>
-            </a:extLst>
-          </p:cNvPr>
-          <p:cNvSpPr>
-            <a:spLocks noGrp="1"/>
-          </p:cNvSpPr>
-          <p:nvPr>
-            <p:ph type="title"/>
-          </p:nvPr>
-        </p:nvSpPr>
-        <p:spPr>
-          <a:xfrm>
-            <a:off x="838200" y="256848"/>
-            <a:ext cx="10515600" cy="848378"/>
-          </a:xfrm>
-        </p:spPr>
-        <p:txBody>
-          <a:bodyPr/>
-          <a:lstStyle/>
-          <a:p>
-            <a:pPr marL="282575" indent="-282575"/>
-            <a:r>
-              <a:rPr lang="en-US" sz="4400"/>
-              <a:t> 1.4 Secure Code Contributions and Reviews</a:t>
-            </a:r>
-          </a:p>
-        </p:txBody>
-      </p:sp>
-      <p:sp>
-        <p:nvSpPr>
-          <p:cNvPr id="11" name="Content Placeholder 10">
-            <a:extLst>
-              <a:ext uri="{FF2B5EF4-FFF2-40B4-BE49-F238E27FC236}">
-                <a16:creationId xmlns:a16="http://schemas.microsoft.com/office/drawing/2014/main" id="{43BA8398-B061-1528-A071-27C58D36FC37}"/>
-              </a:ext>
-            </a:extLst>
-          </p:cNvPr>
-          <p:cNvSpPr>
-            <a:spLocks noGrp="1"/>
-          </p:cNvSpPr>
-          <p:nvPr>
-            <p:ph idx="1"/>
-          </p:nvPr>
-        </p:nvSpPr>
-        <p:spPr>
-          <a:xfrm>
-            <a:off x="838200" y="1375873"/>
-            <a:ext cx="10515600" cy="4801090"/>
-          </a:xfrm>
-        </p:spPr>
-        <p:txBody>
-          <a:bodyPr>
-            <a:normAutofit/>
-          </a:bodyPr>
-          <a:lstStyle/>
-          <a:p>
-            <a:pPr marL="282575" indent="-282575"/>
-            <a:r>
-              <a:rPr lang="en-US" sz="3200"/>
-              <a:t>Best practices for code reviews in a secure workflow.</a:t>
-            </a:r>
-          </a:p>
-          <a:p>
-            <a:pPr marL="282575" indent="-282575"/>
-            <a:r>
-              <a:rPr lang="en-US" sz="3200"/>
-              <a:t>Enforcing pull request policies (e.g., requiring approvals, status checks).</a:t>
-            </a:r>
-          </a:p>
-          <a:p>
-            <a:pPr marL="282575" indent="-282575"/>
-            <a:r>
-              <a:rPr lang="en-US" sz="3200"/>
-              <a:t>Hands-on: Conducting a secure pull request workflow (reviewing, commenting, approving).</a:t>
-            </a:r>
-          </a:p>
-          <a:p>
-            <a:pPr marL="282575" indent="-282575"/>
-            <a:r>
-              <a:rPr lang="en-US" sz="3200"/>
-              <a:t>Exercise: Identifying security issues in a sample PR.</a:t>
-            </a:r>
-          </a:p>
-        </p:txBody>
-      </p:sp>
-    </p:spTree>
-    <p:extLst>
-      <p:ext uri="{BB962C8B-B14F-4D97-AF65-F5344CB8AC3E}">
-        <p14:creationId xmlns:p14="http://schemas.microsoft.com/office/powerpoint/2010/main" val="1091019408"/>
       </p:ext>
     </p:extLst>
   </p:cSld>
@@ -5020,7 +7492,7 @@
         <p:cNvPr id="1" name="">
           <a:extLst>
             <a:ext uri="{FF2B5EF4-FFF2-40B4-BE49-F238E27FC236}">
-              <a16:creationId xmlns:a16="http://schemas.microsoft.com/office/drawing/2014/main" id="{0EF9BF30-7E80-2AF6-53CF-E233C84CD86D}"/>
+              <a16:creationId xmlns:a16="http://schemas.microsoft.com/office/drawing/2014/main" id="{05639206-2367-8448-5F56-EC04C277B0BB}"/>
             </a:ext>
           </a:extLst>
         </p:cNvPr>
@@ -5040,7 +7512,7 @@
           <p:cNvPr id="10" name="Title 9">
             <a:extLst>
               <a:ext uri="{FF2B5EF4-FFF2-40B4-BE49-F238E27FC236}">
-                <a16:creationId xmlns:a16="http://schemas.microsoft.com/office/drawing/2014/main" id="{9B79AAEC-F6EC-01F2-911D-9098E30DACE9}"/>
+                <a16:creationId xmlns:a16="http://schemas.microsoft.com/office/drawing/2014/main" id="{FF8E37B1-8F69-00AC-0ADB-937DB05A80D0}"/>
               </a:ext>
             </a:extLst>
           </p:cNvPr>
@@ -5058,12 +7530,14 @@
           </a:xfrm>
         </p:spPr>
         <p:txBody>
-          <a:bodyPr/>
+          <a:bodyPr>
+            <a:noAutofit/>
+          </a:bodyPr>
           <a:lstStyle/>
           <a:p>
             <a:r>
               <a:rPr lang="en-US"/>
-              <a:t>1.5. Secrets Management / Preventing Leaks</a:t>
+              <a:t>Role-Based Access Control (RBAC)</a:t>
             </a:r>
           </a:p>
         </p:txBody>
@@ -5073,7 +7547,7 @@
           <p:cNvPr id="11" name="Content Placeholder 10">
             <a:extLst>
               <a:ext uri="{FF2B5EF4-FFF2-40B4-BE49-F238E27FC236}">
-                <a16:creationId xmlns:a16="http://schemas.microsoft.com/office/drawing/2014/main" id="{7557BBE6-24F9-C54B-A230-9C140527B775}"/>
+                <a16:creationId xmlns:a16="http://schemas.microsoft.com/office/drawing/2014/main" id="{063D6459-4107-9FB7-79D6-709B5E33D57B}"/>
               </a:ext>
             </a:extLst>
           </p:cNvPr>
@@ -5086,76 +7560,63 @@
         </p:nvSpPr>
         <p:spPr>
           <a:xfrm>
-            <a:off x="838200" y="1375873"/>
-            <a:ext cx="10515600" cy="4801090"/>
+            <a:off x="838200" y="1242060"/>
+            <a:ext cx="10515600" cy="4934903"/>
           </a:xfrm>
         </p:spPr>
         <p:txBody>
           <a:bodyPr>
-            <a:normAutofit fontScale="85000" lnSpcReduction="10000"/>
+            <a:normAutofit fontScale="85000" lnSpcReduction="20000"/>
           </a:bodyPr>
           <a:lstStyle/>
           <a:p>
-            <a:pPr marL="282575" indent="-282575"/>
+            <a:pPr marL="282575" indent="-282575">
+              <a:lnSpc>
+                <a:spcPct val="110000"/>
+              </a:lnSpc>
+            </a:pPr>
+            <a:r>
+              <a:rPr lang="en-US" sz="3200">
+                <a:hlinkClick r:id="rId2"/>
+              </a:rPr>
+              <a:t>RBAC</a:t>
+            </a:r>
             <a:r>
               <a:rPr lang="en-US" sz="3200"/>
-              <a:t>Why API keys, credentials, and secrets should never be committed.</a:t>
-            </a:r>
-          </a:p>
-          <a:p>
-            <a:pPr marL="282575" indent="-282575"/>
+              <a:t> is a security model that restricts system access based on predefined roles assigned to users, ensuring they have only the necessary permissions to perform their tasks. </a:t>
+            </a:r>
+          </a:p>
+          <a:p>
+            <a:pPr marL="282575" indent="-282575">
+              <a:lnSpc>
+                <a:spcPct val="110000"/>
+              </a:lnSpc>
+            </a:pPr>
             <a:r>
               <a:rPr lang="en-US" sz="3200"/>
-              <a:t>Tools for detecting and preventing secret leaks (git-secrets, truffleHog).</a:t>
-            </a:r>
-          </a:p>
-          <a:p>
-            <a:pPr marL="282575" indent="-282575"/>
+              <a:t>Instead of granting individual permissions directly, RBAC assigns permissions to roles, which are then assigned to users, simplifying access management and reducing security risks. </a:t>
+            </a:r>
+          </a:p>
+          <a:p>
+            <a:pPr marL="282575" indent="-282575">
+              <a:lnSpc>
+                <a:spcPct val="110000"/>
+              </a:lnSpc>
+            </a:pPr>
             <a:r>
               <a:rPr lang="en-US" sz="3200"/>
-              <a:t>Hands-on: Setting up a pre-commit hook to block sensitive data.</a:t>
-            </a:r>
-          </a:p>
-          <a:p>
-            <a:pPr marL="282575" indent="-282575"/>
+              <a:t>Originally formalized by NIST, RBAC is widely used in enterprise environments, databases, operating systems, and cloud platforms to enforce least privilege and improve compliance with security policies. </a:t>
+            </a:r>
+          </a:p>
+          <a:p>
+            <a:pPr marL="282575" indent="-282575">
+              <a:lnSpc>
+                <a:spcPct val="110000"/>
+              </a:lnSpc>
+            </a:pPr>
             <a:r>
               <a:rPr lang="en-US" sz="3200"/>
-              <a:t>Exercise: Committing a "leaked" secret and scanning for exposed credentials.</a:t>
-            </a:r>
-          </a:p>
-          <a:p>
-            <a:pPr marL="282575" indent="-282575"/>
-            <a:r>
-              <a:rPr lang="en-US" sz="3200"/>
-              <a:t>6. Automated Security Scanning</a:t>
-            </a:r>
-          </a:p>
-          <a:p>
-            <a:pPr marL="282575" indent="-282575"/>
-            <a:r>
-              <a:rPr lang="en-US" sz="3200"/>
-              <a:t>Overview of static analysis and dependency scanning.</a:t>
-            </a:r>
-          </a:p>
-          <a:p>
-            <a:pPr marL="282575" indent="-282575"/>
-            <a:r>
-              <a:rPr lang="en-US" sz="3200"/>
-              <a:t>Using GitHub Advanced Security, CodeQL, and Dependabot.</a:t>
-            </a:r>
-          </a:p>
-          <a:p>
-            <a:pPr marL="282575" indent="-282575"/>
-            <a:r>
-              <a:rPr lang="en-US" sz="3200"/>
-              <a:t>Hands-on: Running a security scan on a sample repository.</a:t>
-            </a:r>
-          </a:p>
-          <a:p>
-            <a:pPr marL="282575" indent="-282575"/>
-            <a:r>
-              <a:rPr lang="en-US" sz="3200"/>
-              <a:t>Exercise: Interpreting scan results and patching vulnerabilities.</a:t>
+              <a:t>It helps organizations efficiently manage user access, streamline administrative tasks, and minimize the risk of unauthorized actions.</a:t>
             </a:r>
           </a:p>
         </p:txBody>
@@ -5163,7 +7624,7 @@
     </p:spTree>
     <p:extLst>
       <p:ext uri="{BB962C8B-B14F-4D97-AF65-F5344CB8AC3E}">
-        <p14:creationId xmlns:p14="http://schemas.microsoft.com/office/powerpoint/2010/main" val="612910111"/>
+        <p14:creationId xmlns:p14="http://schemas.microsoft.com/office/powerpoint/2010/main" val="1181577867"/>
       </p:ext>
     </p:extLst>
   </p:cSld>
@@ -5181,7 +7642,7 @@
         <p:cNvPr id="1" name="">
           <a:extLst>
             <a:ext uri="{FF2B5EF4-FFF2-40B4-BE49-F238E27FC236}">
-              <a16:creationId xmlns:a16="http://schemas.microsoft.com/office/drawing/2014/main" id="{A015AAEC-F798-B19F-A486-AA5117560906}"/>
+              <a16:creationId xmlns:a16="http://schemas.microsoft.com/office/drawing/2014/main" id="{E975BC51-6305-0FEF-38F0-62A4D5A402FD}"/>
             </a:ext>
           </a:extLst>
         </p:cNvPr>
@@ -5201,7 +7662,7 @@
           <p:cNvPr id="10" name="Title 9">
             <a:extLst>
               <a:ext uri="{FF2B5EF4-FFF2-40B4-BE49-F238E27FC236}">
-                <a16:creationId xmlns:a16="http://schemas.microsoft.com/office/drawing/2014/main" id="{F103457D-2CA5-DAE1-7CBD-45D8D7352057}"/>
+                <a16:creationId xmlns:a16="http://schemas.microsoft.com/office/drawing/2014/main" id="{B5BA03EF-AAD4-364C-9EC8-2426758D5626}"/>
               </a:ext>
             </a:extLst>
           </p:cNvPr>
@@ -5219,18 +7680,15 @@
           </a:xfrm>
         </p:spPr>
         <p:txBody>
-          <a:bodyPr/>
+          <a:bodyPr>
+            <a:noAutofit/>
+          </a:bodyPr>
           <a:lstStyle/>
           <a:p>
             <a:r>
               <a:rPr lang="en-US"/>
-              <a:t>1.6. </a:t>
-            </a:r>
-            <a:r>
-              <a:rPr lang="en-US" sz="4400"/>
-              <a:t>Automated Security Scanning</a:t>
-            </a:r>
-            <a:endParaRPr lang="en-US"/>
+              <a:t>Student Repository Roles</a:t>
+            </a:r>
           </a:p>
         </p:txBody>
       </p:sp>
@@ -5239,7 +7697,7 @@
           <p:cNvPr id="11" name="Content Placeholder 10">
             <a:extLst>
               <a:ext uri="{FF2B5EF4-FFF2-40B4-BE49-F238E27FC236}">
-                <a16:creationId xmlns:a16="http://schemas.microsoft.com/office/drawing/2014/main" id="{7E4571C4-D133-67EB-F601-1264B9876F33}"/>
+                <a16:creationId xmlns:a16="http://schemas.microsoft.com/office/drawing/2014/main" id="{DD29C7A3-9A45-A9C6-D189-C76B79E6CCDA}"/>
               </a:ext>
             </a:extLst>
           </p:cNvPr>
@@ -5258,35 +7716,51 @@
         </p:spPr>
         <p:txBody>
           <a:bodyPr>
-            <a:normAutofit/>
+            <a:normAutofit fontScale="77500" lnSpcReduction="20000"/>
           </a:bodyPr>
           <a:lstStyle/>
           <a:p>
-            <a:pPr marL="282575" indent="-282575"/>
+            <a:pPr marL="282575" indent="-282575">
+              <a:lnSpc>
+                <a:spcPct val="110000"/>
+              </a:lnSpc>
+            </a:pPr>
             <a:r>
               <a:rPr lang="en-US" sz="3200"/>
-              <a:t>Overview of static analysis and dependency scanning.</a:t>
-            </a:r>
-          </a:p>
-          <a:p>
-            <a:pPr marL="282575" indent="-282575"/>
+              <a:t>It is essential to balance access control with collaborative learning when using GitHub in a classroom environment. </a:t>
+            </a:r>
+          </a:p>
+          <a:p>
+            <a:pPr marL="282575" indent="-282575">
+              <a:lnSpc>
+                <a:spcPct val="110000"/>
+              </a:lnSpc>
+            </a:pPr>
             <a:r>
               <a:rPr lang="en-US" sz="3200"/>
-              <a:t>Using GitHub Advanced Security, CodeQL, and Dependabot.</a:t>
-            </a:r>
-          </a:p>
-          <a:p>
-            <a:pPr marL="282575" indent="-282575"/>
+              <a:t>The goal is to promote collaboration while maintaining the integrity of the repository and preventing accidental or unauthorized modifications.</a:t>
+            </a:r>
+          </a:p>
+          <a:p>
+            <a:pPr marL="282575" indent="-282575">
+              <a:lnSpc>
+                <a:spcPct val="110000"/>
+              </a:lnSpc>
+            </a:pPr>
             <a:r>
               <a:rPr lang="en-US" sz="3200"/>
-              <a:t>Interpreting scan results and patching vulnerabilities.</a:t>
-            </a:r>
-          </a:p>
-          <a:p>
-            <a:pPr marL="282575" indent="-282575"/>
+              <a:t>Instructors can assign Read access to students who only need to view a repository, Write access for those contributing code without merging, and Maintain or Admin roles for team leads or advanced students managing repository settings. </a:t>
+            </a:r>
+          </a:p>
+          <a:p>
+            <a:pPr marL="282575" indent="-282575">
+              <a:lnSpc>
+                <a:spcPct val="110000"/>
+              </a:lnSpc>
+            </a:pPr>
             <a:r>
               <a:rPr lang="en-US" sz="3200"/>
-              <a:t>Hands-on: Run a security scan on a sample repository.</a:t>
+              <a:t>Branch protection rules allows instructors to ensure students follow proper version control workflows, such as requiring pull requests and code reviews before merging. </a:t>
             </a:r>
           </a:p>
         </p:txBody>
@@ -5294,7 +7768,7 @@
     </p:spTree>
     <p:extLst>
       <p:ext uri="{BB962C8B-B14F-4D97-AF65-F5344CB8AC3E}">
-        <p14:creationId xmlns:p14="http://schemas.microsoft.com/office/powerpoint/2010/main" val="2536463669"/>
+        <p14:creationId xmlns:p14="http://schemas.microsoft.com/office/powerpoint/2010/main" val="4167986369"/>
       </p:ext>
     </p:extLst>
   </p:cSld>
@@ -5312,7 +7786,7 @@
         <p:cNvPr id="1" name="">
           <a:extLst>
             <a:ext uri="{FF2B5EF4-FFF2-40B4-BE49-F238E27FC236}">
-              <a16:creationId xmlns:a16="http://schemas.microsoft.com/office/drawing/2014/main" id="{BBE20E9C-EBE0-98B4-D9FB-AA18E9C48655}"/>
+              <a16:creationId xmlns:a16="http://schemas.microsoft.com/office/drawing/2014/main" id="{514C363B-5E6C-097D-B9A3-201AD641469C}"/>
             </a:ext>
           </a:extLst>
         </p:cNvPr>
@@ -5332,7 +7806,7 @@
           <p:cNvPr id="10" name="Title 9">
             <a:extLst>
               <a:ext uri="{FF2B5EF4-FFF2-40B4-BE49-F238E27FC236}">
-                <a16:creationId xmlns:a16="http://schemas.microsoft.com/office/drawing/2014/main" id="{C800F0A4-1323-8F4E-057B-10ED54BA61BA}"/>
+                <a16:creationId xmlns:a16="http://schemas.microsoft.com/office/drawing/2014/main" id="{B71EF1A4-2618-2390-1F9F-0868824453F8}"/>
               </a:ext>
             </a:extLst>
           </p:cNvPr>
@@ -5350,18 +7824,15 @@
           </a:xfrm>
         </p:spPr>
         <p:txBody>
-          <a:bodyPr/>
-          <a:lstStyle/>
-          <a:p>
-            <a:r>
-              <a:rPr lang="en-US"/>
-              <a:t>1.7 </a:t>
-            </a:r>
-            <a:r>
-              <a:rPr lang="en-US" sz="4400"/>
-              <a:t>Secure Commit Practices</a:t>
-            </a:r>
-            <a:endParaRPr lang="en-US"/>
+          <a:bodyPr>
+            <a:noAutofit/>
+          </a:bodyPr>
+          <a:lstStyle/>
+          <a:p>
+            <a:r>
+              <a:rPr lang="en-US" sz="4000"/>
+              <a:t>How to Create Branch Protection Rules in GitHub</a:t>
+            </a:r>
           </a:p>
         </p:txBody>
       </p:sp>
@@ -5370,7 +7841,7 @@
           <p:cNvPr id="11" name="Content Placeholder 10">
             <a:extLst>
               <a:ext uri="{FF2B5EF4-FFF2-40B4-BE49-F238E27FC236}">
-                <a16:creationId xmlns:a16="http://schemas.microsoft.com/office/drawing/2014/main" id="{F013569D-5CFB-6D9A-0DC8-99AFE88815A4}"/>
+                <a16:creationId xmlns:a16="http://schemas.microsoft.com/office/drawing/2014/main" id="{61D52030-DF36-48B0-CF4C-BD540C668ED1}"/>
               </a:ext>
             </a:extLst>
           </p:cNvPr>
@@ -5383,41 +7854,145 @@
         </p:nvSpPr>
         <p:spPr>
           <a:xfrm>
-            <a:off x="838200" y="1375873"/>
-            <a:ext cx="10515600" cy="4801090"/>
+            <a:off x="838200" y="1105226"/>
+            <a:ext cx="10515600" cy="5495925"/>
           </a:xfrm>
         </p:spPr>
         <p:txBody>
           <a:bodyPr>
-            <a:normAutofit/>
+            <a:normAutofit fontScale="55000" lnSpcReduction="20000"/>
           </a:bodyPr>
           <a:lstStyle/>
           <a:p>
-            <a:pPr marL="282575" indent="-282575"/>
+            <a:pPr marL="282575" indent="-282575">
+              <a:lnSpc>
+                <a:spcPct val="110000"/>
+              </a:lnSpc>
+            </a:pPr>
             <a:r>
               <a:rPr lang="en-US" sz="3200"/>
-              <a:t>Enforcing GPG/SSH-signed commits for authenticity.</a:t>
-            </a:r>
-          </a:p>
-          <a:p>
-            <a:pPr marL="282575" indent="-282575"/>
+              <a:t>Branch protection rules in GitHub help enforce version control best practices by restricting direct changes to important branches. To set them up:</a:t>
+            </a:r>
+          </a:p>
+          <a:p>
+            <a:pPr marL="282575" indent="-282575">
+              <a:lnSpc>
+                <a:spcPct val="110000"/>
+              </a:lnSpc>
+            </a:pPr>
             <a:r>
               <a:rPr lang="en-US" sz="3200"/>
-              <a:t>Implementing commit message policies (e.g., descriptive messages, linking to issues).</a:t>
-            </a:r>
-          </a:p>
-          <a:p>
-            <a:pPr marL="282575" indent="-282575"/>
+              <a:t>1️⃣ to your repository on GitHub. Click on the "Settings" tab.In the left sidebar, under "Code and automation", click "Branches".</a:t>
+            </a:r>
+          </a:p>
+          <a:p>
+            <a:pPr marL="282575" indent="-282575">
+              <a:lnSpc>
+                <a:spcPct val="110000"/>
+              </a:lnSpc>
+            </a:pPr>
             <a:r>
               <a:rPr lang="en-US" sz="3200"/>
-              <a:t>Verifying signed commits in a repository.</a:t>
-            </a:r>
-          </a:p>
-          <a:p>
-            <a:pPr marL="282575" indent="-282575"/>
+              <a:t>2️⃣In the "Branch protection rules" section, click "Add rule". In the "Branch name pattern" field, enter the branch name you want to protect (e.g., main, develop, or use wildcards like feature/*).</a:t>
+            </a:r>
+          </a:p>
+          <a:p>
+            <a:pPr marL="282575" indent="-282575">
+              <a:lnSpc>
+                <a:spcPct val="110000"/>
+              </a:lnSpc>
+            </a:pPr>
             <a:r>
               <a:rPr lang="en-US" sz="3200"/>
-              <a:t>Hands-on: Signing commits with a GPG key.</a:t>
+              <a:t>3️⃣ Select Protection Options</a:t>
+            </a:r>
+          </a:p>
+          <a:p>
+            <a:pPr marL="282575" indent="-282575">
+              <a:lnSpc>
+                <a:spcPct val="110000"/>
+              </a:lnSpc>
+            </a:pPr>
+            <a:r>
+              <a:rPr lang="en-US" sz="3200"/>
+              <a:t>GitHub provides several protection rules you can enable:</a:t>
+            </a:r>
+          </a:p>
+          <a:p>
+            <a:pPr marL="739775" lvl="1" indent="-282575">
+              <a:lnSpc>
+                <a:spcPct val="110000"/>
+              </a:lnSpc>
+            </a:pPr>
+            <a:r>
+              <a:rPr lang="en-US" sz="2800"/>
+              <a:t>✅ Require pull request reviews before mergingSet a required number of approvals (e.g., at least one review).Block self-reviews to enforce team feedback.</a:t>
+            </a:r>
+          </a:p>
+          <a:p>
+            <a:pPr marL="739775" lvl="1" indent="-282575">
+              <a:lnSpc>
+                <a:spcPct val="110000"/>
+              </a:lnSpc>
+            </a:pPr>
+            <a:r>
+              <a:rPr lang="en-US" sz="2800"/>
+              <a:t>✅ Require status checks to pass before mergingEnsure automated tests (CI/CD) pass before merging.Select specific checks (e.g., Linting, Unit Tests, Build).</a:t>
+            </a:r>
+          </a:p>
+          <a:p>
+            <a:pPr marL="739775" lvl="1" indent="-282575">
+              <a:lnSpc>
+                <a:spcPct val="110000"/>
+              </a:lnSpc>
+            </a:pPr>
+            <a:r>
+              <a:rPr lang="en-US" sz="2800"/>
+              <a:t>✅ Require commit signaturesEnforce cryptographic signatures to verify commit authenticity.</a:t>
+            </a:r>
+          </a:p>
+          <a:p>
+            <a:pPr marL="739775" lvl="1" indent="-282575">
+              <a:lnSpc>
+                <a:spcPct val="110000"/>
+              </a:lnSpc>
+            </a:pPr>
+            <a:r>
+              <a:rPr lang="en-US" sz="2800"/>
+              <a:t>✅ Restrict who can push to the branchAllow only instructors or specific team members to push directly.</a:t>
+            </a:r>
+          </a:p>
+          <a:p>
+            <a:pPr marL="739775" lvl="1" indent="-282575">
+              <a:lnSpc>
+                <a:spcPct val="110000"/>
+              </a:lnSpc>
+            </a:pPr>
+            <a:r>
+              <a:rPr lang="en-US" sz="2800"/>
+              <a:t>✅ Require branches to be up to date before mergingPrevent merging outdated branches to avoid conflicts</a:t>
+            </a:r>
+          </a:p>
+          <a:p>
+            <a:pPr marL="739775" lvl="1" indent="-282575">
+              <a:lnSpc>
+                <a:spcPct val="110000"/>
+              </a:lnSpc>
+            </a:pPr>
+            <a:r>
+              <a:rPr lang="en-US" sz="2800"/>
+              <a:t>✅ Prevent branch deletionStops accidental or malicious deletion of protected branches.</a:t>
+            </a:r>
+          </a:p>
+          <a:p>
+            <a:pPr marL="282575" indent="-282575">
+              <a:lnSpc>
+                <a:spcPct val="110000"/>
+              </a:lnSpc>
+            </a:pPr>
+            <a:r>
+              <a:rPr lang="en-US" sz="3200"/>
+              <a:t>4️⃣ Save the RuleReview the settings.Click "Create" to apply the protection rule.</a:t>
             </a:r>
           </a:p>
         </p:txBody>
@@ -5425,7 +8000,7 @@
     </p:spTree>
     <p:extLst>
       <p:ext uri="{BB962C8B-B14F-4D97-AF65-F5344CB8AC3E}">
-        <p14:creationId xmlns:p14="http://schemas.microsoft.com/office/powerpoint/2010/main" val="196191668"/>
+        <p14:creationId xmlns:p14="http://schemas.microsoft.com/office/powerpoint/2010/main" val="863121346"/>
       </p:ext>
     </p:extLst>
   </p:cSld>
@@ -5748,4 +8323,319 @@
     </a:ext>
   </a:extLst>
 </a:theme>
+</file>
+
+<file path=ppt/theme/theme2.xml><?xml version="1.0" encoding="utf-8"?>
+<a:theme xmlns:a="http://schemas.openxmlformats.org/drawingml/2006/main" name="Office Theme">
+  <a:themeElements>
+    <a:clrScheme name="Office">
+      <a:dk1>
+        <a:sysClr val="windowText" lastClr="000000"/>
+      </a:dk1>
+      <a:lt1>
+        <a:sysClr val="window" lastClr="FFFFFF"/>
+      </a:lt1>
+      <a:dk2>
+        <a:srgbClr val="0E2841"/>
+      </a:dk2>
+      <a:lt2>
+        <a:srgbClr val="E8E8E8"/>
+      </a:lt2>
+      <a:accent1>
+        <a:srgbClr val="156082"/>
+      </a:accent1>
+      <a:accent2>
+        <a:srgbClr val="E97132"/>
+      </a:accent2>
+      <a:accent3>
+        <a:srgbClr val="196B24"/>
+      </a:accent3>
+      <a:accent4>
+        <a:srgbClr val="0F9ED5"/>
+      </a:accent4>
+      <a:accent5>
+        <a:srgbClr val="A02B93"/>
+      </a:accent5>
+      <a:accent6>
+        <a:srgbClr val="4EA72E"/>
+      </a:accent6>
+      <a:hlink>
+        <a:srgbClr val="467886"/>
+      </a:hlink>
+      <a:folHlink>
+        <a:srgbClr val="96607D"/>
+      </a:folHlink>
+    </a:clrScheme>
+    <a:fontScheme name="Office">
+      <a:majorFont>
+        <a:latin typeface="Aptos Display" panose="02110004020202020204"/>
+        <a:ea typeface=""/>
+        <a:cs typeface=""/>
+        <a:font script="Jpan" typeface="游ゴシック Light"/>
+        <a:font script="Hang" typeface="맑은 고딕"/>
+        <a:font script="Hans" typeface="等线 Light"/>
+        <a:font script="Hant" typeface="新細明體"/>
+        <a:font script="Arab" typeface="Times New Roman"/>
+        <a:font script="Hebr" typeface="Times New Roman"/>
+        <a:font script="Thai" typeface="Angsana New"/>
+        <a:font script="Ethi" typeface="Nyala"/>
+        <a:font script="Beng" typeface="Vrinda"/>
+        <a:font script="Gujr" typeface="Shruti"/>
+        <a:font script="Khmr" typeface="MoolBoran"/>
+        <a:font script="Knda" typeface="Tunga"/>
+        <a:font script="Guru" typeface="Raavi"/>
+        <a:font script="Cans" typeface="Euphemia"/>
+        <a:font script="Cher" typeface="Plantagenet Cherokee"/>
+        <a:font script="Yiii" typeface="Microsoft Yi Baiti"/>
+        <a:font script="Tibt" typeface="Microsoft Himalaya"/>
+        <a:font script="Thaa" typeface="MV Boli"/>
+        <a:font script="Deva" typeface="Mangal"/>
+        <a:font script="Telu" typeface="Gautami"/>
+        <a:font script="Taml" typeface="Latha"/>
+        <a:font script="Syrc" typeface="Estrangelo Edessa"/>
+        <a:font script="Orya" typeface="Kalinga"/>
+        <a:font script="Mlym" typeface="Kartika"/>
+        <a:font script="Laoo" typeface="DokChampa"/>
+        <a:font script="Sinh" typeface="Iskoola Pota"/>
+        <a:font script="Mong" typeface="Mongolian Baiti"/>
+        <a:font script="Viet" typeface="Times New Roman"/>
+        <a:font script="Uigh" typeface="Microsoft Uighur"/>
+        <a:font script="Geor" typeface="Sylfaen"/>
+        <a:font script="Armn" typeface="Arial"/>
+        <a:font script="Bugi" typeface="Leelawadee UI"/>
+        <a:font script="Bopo" typeface="Microsoft JhengHei"/>
+        <a:font script="Java" typeface="Javanese Text"/>
+        <a:font script="Lisu" typeface="Segoe UI"/>
+        <a:font script="Mymr" typeface="Myanmar Text"/>
+        <a:font script="Nkoo" typeface="Ebrima"/>
+        <a:font script="Olck" typeface="Nirmala UI"/>
+        <a:font script="Osma" typeface="Ebrima"/>
+        <a:font script="Phag" typeface="Phagspa"/>
+        <a:font script="Syrn" typeface="Estrangelo Edessa"/>
+        <a:font script="Syrj" typeface="Estrangelo Edessa"/>
+        <a:font script="Syre" typeface="Estrangelo Edessa"/>
+        <a:font script="Sora" typeface="Nirmala UI"/>
+        <a:font script="Tale" typeface="Microsoft Tai Le"/>
+        <a:font script="Talu" typeface="Microsoft New Tai Lue"/>
+        <a:font script="Tfng" typeface="Ebrima"/>
+      </a:majorFont>
+      <a:minorFont>
+        <a:latin typeface="Aptos" panose="02110004020202020204"/>
+        <a:ea typeface=""/>
+        <a:cs typeface=""/>
+        <a:font script="Jpan" typeface="游ゴシック"/>
+        <a:font script="Hang" typeface="맑은 고딕"/>
+        <a:font script="Hans" typeface="等线"/>
+        <a:font script="Hant" typeface="新細明體"/>
+        <a:font script="Arab" typeface="Arial"/>
+        <a:font script="Hebr" typeface="Arial"/>
+        <a:font script="Thai" typeface="Cordia New"/>
+        <a:font script="Ethi" typeface="Nyala"/>
+        <a:font script="Beng" typeface="Vrinda"/>
+        <a:font script="Gujr" typeface="Shruti"/>
+        <a:font script="Khmr" typeface="DaunPenh"/>
+        <a:font script="Knda" typeface="Tunga"/>
+        <a:font script="Guru" typeface="Raavi"/>
+        <a:font script="Cans" typeface="Euphemia"/>
+        <a:font script="Cher" typeface="Plantagenet Cherokee"/>
+        <a:font script="Yiii" typeface="Microsoft Yi Baiti"/>
+        <a:font script="Tibt" typeface="Microsoft Himalaya"/>
+        <a:font script="Thaa" typeface="MV Boli"/>
+        <a:font script="Deva" typeface="Mangal"/>
+        <a:font script="Telu" typeface="Gautami"/>
+        <a:font script="Taml" typeface="Latha"/>
+        <a:font script="Syrc" typeface="Estrangelo Edessa"/>
+        <a:font script="Orya" typeface="Kalinga"/>
+        <a:font script="Mlym" typeface="Kartika"/>
+        <a:font script="Laoo" typeface="DokChampa"/>
+        <a:font script="Sinh" typeface="Iskoola Pota"/>
+        <a:font script="Mong" typeface="Mongolian Baiti"/>
+        <a:font script="Viet" typeface="Arial"/>
+        <a:font script="Uigh" typeface="Microsoft Uighur"/>
+        <a:font script="Geor" typeface="Sylfaen"/>
+        <a:font script="Armn" typeface="Arial"/>
+        <a:font script="Bugi" typeface="Leelawadee UI"/>
+        <a:font script="Bopo" typeface="Microsoft JhengHei"/>
+        <a:font script="Java" typeface="Javanese Text"/>
+        <a:font script="Lisu" typeface="Segoe UI"/>
+        <a:font script="Mymr" typeface="Myanmar Text"/>
+        <a:font script="Nkoo" typeface="Ebrima"/>
+        <a:font script="Olck" typeface="Nirmala UI"/>
+        <a:font script="Osma" typeface="Ebrima"/>
+        <a:font script="Phag" typeface="Phagspa"/>
+        <a:font script="Syrn" typeface="Estrangelo Edessa"/>
+        <a:font script="Syrj" typeface="Estrangelo Edessa"/>
+        <a:font script="Syre" typeface="Estrangelo Edessa"/>
+        <a:font script="Sora" typeface="Nirmala UI"/>
+        <a:font script="Tale" typeface="Microsoft Tai Le"/>
+        <a:font script="Talu" typeface="Microsoft New Tai Lue"/>
+        <a:font script="Tfng" typeface="Ebrima"/>
+      </a:minorFont>
+    </a:fontScheme>
+    <a:fmtScheme name="Office">
+      <a:fillStyleLst>
+        <a:solidFill>
+          <a:schemeClr val="phClr"/>
+        </a:solidFill>
+        <a:gradFill rotWithShape="1">
+          <a:gsLst>
+            <a:gs pos="0">
+              <a:schemeClr val="phClr">
+                <a:lumMod val="110000"/>
+                <a:satMod val="105000"/>
+                <a:tint val="67000"/>
+              </a:schemeClr>
+            </a:gs>
+            <a:gs pos="50000">
+              <a:schemeClr val="phClr">
+                <a:lumMod val="105000"/>
+                <a:satMod val="103000"/>
+                <a:tint val="73000"/>
+              </a:schemeClr>
+            </a:gs>
+            <a:gs pos="100000">
+              <a:schemeClr val="phClr">
+                <a:lumMod val="105000"/>
+                <a:satMod val="109000"/>
+                <a:tint val="81000"/>
+              </a:schemeClr>
+            </a:gs>
+          </a:gsLst>
+          <a:lin ang="5400000" scaled="0"/>
+        </a:gradFill>
+        <a:gradFill rotWithShape="1">
+          <a:gsLst>
+            <a:gs pos="0">
+              <a:schemeClr val="phClr">
+                <a:satMod val="103000"/>
+                <a:lumMod val="102000"/>
+                <a:tint val="94000"/>
+              </a:schemeClr>
+            </a:gs>
+            <a:gs pos="50000">
+              <a:schemeClr val="phClr">
+                <a:satMod val="110000"/>
+                <a:lumMod val="100000"/>
+                <a:shade val="100000"/>
+              </a:schemeClr>
+            </a:gs>
+            <a:gs pos="100000">
+              <a:schemeClr val="phClr">
+                <a:lumMod val="99000"/>
+                <a:satMod val="120000"/>
+                <a:shade val="78000"/>
+              </a:schemeClr>
+            </a:gs>
+          </a:gsLst>
+          <a:lin ang="5400000" scaled="0"/>
+        </a:gradFill>
+      </a:fillStyleLst>
+      <a:lnStyleLst>
+        <a:ln w="12700" cap="flat" cmpd="sng" algn="ctr">
+          <a:solidFill>
+            <a:schemeClr val="phClr"/>
+          </a:solidFill>
+          <a:prstDash val="solid"/>
+          <a:miter lim="800000"/>
+        </a:ln>
+        <a:ln w="19050" cap="flat" cmpd="sng" algn="ctr">
+          <a:solidFill>
+            <a:schemeClr val="phClr"/>
+          </a:solidFill>
+          <a:prstDash val="solid"/>
+          <a:miter lim="800000"/>
+        </a:ln>
+        <a:ln w="25400" cap="flat" cmpd="sng" algn="ctr">
+          <a:solidFill>
+            <a:schemeClr val="phClr"/>
+          </a:solidFill>
+          <a:prstDash val="solid"/>
+          <a:miter lim="800000"/>
+        </a:ln>
+      </a:lnStyleLst>
+      <a:effectStyleLst>
+        <a:effectStyle>
+          <a:effectLst/>
+        </a:effectStyle>
+        <a:effectStyle>
+          <a:effectLst/>
+        </a:effectStyle>
+        <a:effectStyle>
+          <a:effectLst>
+            <a:outerShdw blurRad="57150" dist="19050" dir="5400000" algn="ctr" rotWithShape="0">
+              <a:srgbClr val="000000">
+                <a:alpha val="63000"/>
+              </a:srgbClr>
+            </a:outerShdw>
+          </a:effectLst>
+        </a:effectStyle>
+      </a:effectStyleLst>
+      <a:bgFillStyleLst>
+        <a:solidFill>
+          <a:schemeClr val="phClr"/>
+        </a:solidFill>
+        <a:solidFill>
+          <a:schemeClr val="phClr">
+            <a:tint val="95000"/>
+            <a:satMod val="170000"/>
+          </a:schemeClr>
+        </a:solidFill>
+        <a:gradFill rotWithShape="1">
+          <a:gsLst>
+            <a:gs pos="0">
+              <a:schemeClr val="phClr">
+                <a:tint val="93000"/>
+                <a:satMod val="150000"/>
+                <a:shade val="98000"/>
+                <a:lumMod val="102000"/>
+              </a:schemeClr>
+            </a:gs>
+            <a:gs pos="50000">
+              <a:schemeClr val="phClr">
+                <a:tint val="98000"/>
+                <a:satMod val="130000"/>
+                <a:shade val="90000"/>
+                <a:lumMod val="103000"/>
+              </a:schemeClr>
+            </a:gs>
+            <a:gs pos="100000">
+              <a:schemeClr val="phClr">
+                <a:shade val="63000"/>
+                <a:satMod val="120000"/>
+              </a:schemeClr>
+            </a:gs>
+          </a:gsLst>
+          <a:lin ang="5400000" scaled="0"/>
+        </a:gradFill>
+      </a:bgFillStyleLst>
+    </a:fmtScheme>
+  </a:themeElements>
+  <a:objectDefaults>
+    <a:lnDef>
+      <a:spPr/>
+      <a:bodyPr/>
+      <a:lstStyle/>
+      <a:style>
+        <a:lnRef idx="2">
+          <a:schemeClr val="accent1"/>
+        </a:lnRef>
+        <a:fillRef idx="0">
+          <a:schemeClr val="accent1"/>
+        </a:fillRef>
+        <a:effectRef idx="1">
+          <a:schemeClr val="accent1"/>
+        </a:effectRef>
+        <a:fontRef idx="minor">
+          <a:schemeClr val="tx1"/>
+        </a:fontRef>
+      </a:style>
+    </a:lnDef>
+  </a:objectDefaults>
+  <a:extraClrSchemeLst/>
+  <a:extLst>
+    <a:ext uri="{05A4C25C-085E-4340-85A3-A5531E510DB2}">
+      <thm15:themeFamily xmlns:thm15="http://schemas.microsoft.com/office/thememl/2012/main" name="Office Theme" id="{2E142A2C-CD16-42D6-873A-C26D2A0506FA}" vid="{1BDDFF52-6CD6-40A5-AB3C-68EB2F1E4D0A}"/>
+    </a:ext>
+  </a:extLst>
+</a:theme>
 </file>
--- a/Slides-Day1.pptx
+++ b/Slides-Day1.pptx
@@ -5,7 +5,7 @@
     <p:sldMasterId id="2147483648" r:id="rId1"/>
   </p:sldMasterIdLst>
   <p:notesMasterIdLst>
-    <p:notesMasterId r:id="rId25"/>
+    <p:notesMasterId r:id="rId34"/>
   </p:notesMasterIdLst>
   <p:sldIdLst>
     <p:sldId id="277" r:id="rId2"/>
@@ -31,6 +31,15 @@
     <p:sldId id="276" r:id="rId22"/>
     <p:sldId id="273" r:id="rId23"/>
     <p:sldId id="275" r:id="rId24"/>
+    <p:sldId id="284" r:id="rId25"/>
+    <p:sldId id="285" r:id="rId26"/>
+    <p:sldId id="286" r:id="rId27"/>
+    <p:sldId id="287" r:id="rId28"/>
+    <p:sldId id="288" r:id="rId29"/>
+    <p:sldId id="289" r:id="rId30"/>
+    <p:sldId id="290" r:id="rId31"/>
+    <p:sldId id="291" r:id="rId32"/>
+    <p:sldId id="292" r:id="rId33"/>
   </p:sldIdLst>
   <p:sldSz cx="12192000" cy="6858000"/>
   <p:notesSz cx="6858000" cy="9144000"/>
@@ -219,7 +228,7 @@
           <a:p>
             <a:fld id="{826287C1-7E9C-4D69-8005-B03B9EFC4376}" type="datetimeFigureOut">
               <a:rPr lang="en-US" smtClean="0"/>
-              <a:t>2/23/2025</a:t>
+              <a:t>2/26/2025</a:t>
             </a:fld>
             <a:endParaRPr lang="en-US"/>
           </a:p>
@@ -950,7 +959,7 @@
           <a:p>
             <a:fld id="{2F598FE8-610D-4628-AF37-AB11EA0DA6DB}" type="datetimeFigureOut">
               <a:rPr lang="en-US" smtClean="0"/>
-              <a:t>2/23/2025</a:t>
+              <a:t>2/26/2025</a:t>
             </a:fld>
             <a:endParaRPr lang="en-US"/>
           </a:p>
@@ -1148,7 +1157,7 @@
           <a:p>
             <a:fld id="{2F598FE8-610D-4628-AF37-AB11EA0DA6DB}" type="datetimeFigureOut">
               <a:rPr lang="en-US" smtClean="0"/>
-              <a:t>2/23/2025</a:t>
+              <a:t>2/26/2025</a:t>
             </a:fld>
             <a:endParaRPr lang="en-US"/>
           </a:p>
@@ -1356,7 +1365,7 @@
           <a:p>
             <a:fld id="{2F598FE8-610D-4628-AF37-AB11EA0DA6DB}" type="datetimeFigureOut">
               <a:rPr lang="en-US" smtClean="0"/>
-              <a:t>2/23/2025</a:t>
+              <a:t>2/26/2025</a:t>
             </a:fld>
             <a:endParaRPr lang="en-US"/>
           </a:p>
@@ -1554,7 +1563,7 @@
           <a:p>
             <a:fld id="{2F598FE8-610D-4628-AF37-AB11EA0DA6DB}" type="datetimeFigureOut">
               <a:rPr lang="en-US" smtClean="0"/>
-              <a:t>2/23/2025</a:t>
+              <a:t>2/26/2025</a:t>
             </a:fld>
             <a:endParaRPr lang="en-US"/>
           </a:p>
@@ -1829,7 +1838,7 @@
           <a:p>
             <a:fld id="{2F598FE8-610D-4628-AF37-AB11EA0DA6DB}" type="datetimeFigureOut">
               <a:rPr lang="en-US" smtClean="0"/>
-              <a:t>2/23/2025</a:t>
+              <a:t>2/26/2025</a:t>
             </a:fld>
             <a:endParaRPr lang="en-US"/>
           </a:p>
@@ -2094,7 +2103,7 @@
           <a:p>
             <a:fld id="{2F598FE8-610D-4628-AF37-AB11EA0DA6DB}" type="datetimeFigureOut">
               <a:rPr lang="en-US" smtClean="0"/>
-              <a:t>2/23/2025</a:t>
+              <a:t>2/26/2025</a:t>
             </a:fld>
             <a:endParaRPr lang="en-US"/>
           </a:p>
@@ -2506,7 +2515,7 @@
           <a:p>
             <a:fld id="{2F598FE8-610D-4628-AF37-AB11EA0DA6DB}" type="datetimeFigureOut">
               <a:rPr lang="en-US" smtClean="0"/>
-              <a:t>2/23/2025</a:t>
+              <a:t>2/26/2025</a:t>
             </a:fld>
             <a:endParaRPr lang="en-US"/>
           </a:p>
@@ -2647,7 +2656,7 @@
           <a:p>
             <a:fld id="{2F598FE8-610D-4628-AF37-AB11EA0DA6DB}" type="datetimeFigureOut">
               <a:rPr lang="en-US" smtClean="0"/>
-              <a:t>2/23/2025</a:t>
+              <a:t>2/26/2025</a:t>
             </a:fld>
             <a:endParaRPr lang="en-US"/>
           </a:p>
@@ -2760,7 +2769,7 @@
           <a:p>
             <a:fld id="{2F598FE8-610D-4628-AF37-AB11EA0DA6DB}" type="datetimeFigureOut">
               <a:rPr lang="en-US" smtClean="0"/>
-              <a:t>2/23/2025</a:t>
+              <a:t>2/26/2025</a:t>
             </a:fld>
             <a:endParaRPr lang="en-US"/>
           </a:p>
@@ -3071,7 +3080,7 @@
           <a:p>
             <a:fld id="{2F598FE8-610D-4628-AF37-AB11EA0DA6DB}" type="datetimeFigureOut">
               <a:rPr lang="en-US" smtClean="0"/>
-              <a:t>2/23/2025</a:t>
+              <a:t>2/26/2025</a:t>
             </a:fld>
             <a:endParaRPr lang="en-US"/>
           </a:p>
@@ -3359,7 +3368,7 @@
           <a:p>
             <a:fld id="{2F598FE8-610D-4628-AF37-AB11EA0DA6DB}" type="datetimeFigureOut">
               <a:rPr lang="en-US" smtClean="0"/>
-              <a:t>2/23/2025</a:t>
+              <a:t>2/26/2025</a:t>
             </a:fld>
             <a:endParaRPr lang="en-US"/>
           </a:p>
@@ -3600,7 +3609,7 @@
           <a:p>
             <a:fld id="{2F598FE8-610D-4628-AF37-AB11EA0DA6DB}" type="datetimeFigureOut">
               <a:rPr lang="en-US" smtClean="0"/>
-              <a:t>2/23/2025</a:t>
+              <a:t>2/26/2025</a:t>
             </a:fld>
             <a:endParaRPr lang="en-US"/>
           </a:p>
@@ -5188,7 +5197,7 @@
             <a:pPr marL="282575" indent="-282575"/>
             <a:r>
               <a:rPr lang="en-US" sz="4400"/>
-              <a:t>1.3 Branching Strategies and Secure Workflows</a:t>
+              <a:t>Branching Strategies and Secure Workflows</a:t>
             </a:r>
           </a:p>
         </p:txBody>
@@ -5315,7 +5324,7 @@
             <a:pPr marL="282575" indent="-282575"/>
             <a:r>
               <a:rPr lang="en-US" sz="4400"/>
-              <a:t> 1.4 Secure Code Contributions and Reviews</a:t>
+              <a:t> Secure Code Contributions and Reviews</a:t>
             </a:r>
           </a:p>
         </p:txBody>
@@ -5441,7 +5450,7 @@
           <a:p>
             <a:r>
               <a:rPr lang="en-US"/>
-              <a:t>1.5. Secrets Management / Preventing Leaks</a:t>
+              <a:t>Secrets Management / Preventing Leaks</a:t>
             </a:r>
           </a:p>
         </p:txBody>
@@ -5601,10 +5610,6 @@
           <a:lstStyle/>
           <a:p>
             <a:r>
-              <a:rPr lang="en-US"/>
-              <a:t>1.6. </a:t>
-            </a:r>
-            <a:r>
               <a:rPr lang="en-US" sz="4400"/>
               <a:t>Automated Security Scanning</a:t>
             </a:r>
@@ -5732,10 +5737,6 @@
           <a:lstStyle/>
           <a:p>
             <a:r>
-              <a:rPr lang="en-US"/>
-              <a:t>1.7 </a:t>
-            </a:r>
-            <a:r>
               <a:rPr lang="en-US" sz="4400"/>
               <a:t>Secure Commit Practices</a:t>
             </a:r>
@@ -5863,10 +5864,6 @@
           <a:lstStyle/>
           <a:p>
             <a:r>
-              <a:rPr lang="en-US"/>
-              <a:t>1.8 </a:t>
-            </a:r>
-            <a:r>
               <a:rPr lang="en-US" sz="4400"/>
               <a:t>Access Control and Incident Response</a:t>
             </a:r>
@@ -5994,12 +5991,8 @@
           <a:lstStyle/>
           <a:p>
             <a:r>
-              <a:rPr lang="en-US"/>
-              <a:t>1.9 </a:t>
-            </a:r>
-            <a:r>
               <a:rPr lang="en-US" sz="4400"/>
-              <a:t>. Backup and Disaster Recovery</a:t>
+              <a:t>Backup and Disaster Recovery</a:t>
             </a:r>
             <a:endParaRPr lang="en-US"/>
           </a:p>
@@ -6120,8 +6113,8 @@
           <a:lstStyle/>
           <a:p>
             <a:r>
-              <a:rPr lang="en-US" sz="3600"/>
-              <a:t>1.10 Integration with Secure Development Environments</a:t>
+              <a:rPr lang="en-US" sz="4000"/>
+              <a:t>Integration with Secure Development Environments</a:t>
             </a:r>
           </a:p>
         </p:txBody>
@@ -6848,7 +6841,7 @@
         <p:spPr>
           <a:xfrm>
             <a:off x="838200" y="256848"/>
-            <a:ext cx="10809718" cy="848378"/>
+            <a:ext cx="11216640" cy="848378"/>
           </a:xfrm>
         </p:spPr>
         <p:txBody>
@@ -6858,8 +6851,8 @@
           <a:lstStyle/>
           <a:p>
             <a:r>
-              <a:rPr lang="en-US" sz="3600"/>
-              <a:t>3.2 Python Coding Style Guidelines for Maintainable Code</a:t>
+              <a:rPr lang="en-US" sz="4000"/>
+              <a:t>Python Coding Style Guidelines for Maintainable Code</a:t>
             </a:r>
           </a:p>
         </p:txBody>
@@ -6882,8 +6875,8 @@
         </p:nvSpPr>
         <p:spPr>
           <a:xfrm>
-            <a:off x="838200" y="1375873"/>
-            <a:ext cx="10515600" cy="4801090"/>
+            <a:off x="838200" y="1105226"/>
+            <a:ext cx="10515600" cy="5071737"/>
           </a:xfrm>
         </p:spPr>
         <p:txBody>
@@ -6893,7 +6886,37 @@
           <a:lstStyle/>
           <a:p>
             <a:pPr marL="282575" indent="-282575"/>
-            <a:endParaRPr lang="en-US" sz="3200"/>
+            <a:r>
+              <a:rPr lang="en-US">
+                <a:hlinkClick r:id="rId2"/>
+              </a:rPr>
+              <a:t>PEP 8</a:t>
+            </a:r>
+            <a:r>
+              <a:rPr lang="en-US"/>
+              <a:t>, Python’s style guide, includes several guidelines that contribute to writing maintainable and more secure Python code. </a:t>
+            </a:r>
+          </a:p>
+          <a:p>
+            <a:pPr marL="282575" indent="-282575"/>
+            <a:r>
+              <a:rPr lang="en-US"/>
+              <a:t>As instructors of introductory programming courses, we have the opportunity to impart the need for code style discipline and best practices early in a student's learning journey. </a:t>
+            </a:r>
+          </a:p>
+          <a:p>
+            <a:pPr marL="282575" indent="-282575"/>
+            <a:r>
+              <a:rPr lang="en-US"/>
+              <a:t>By emphasizing the importance of concepts such as the items included below, we help students develop habits that lead to more reliable and professional software. </a:t>
+            </a:r>
+          </a:p>
+          <a:p>
+            <a:pPr marL="282575" indent="-282575"/>
+            <a:r>
+              <a:rPr lang="en-US"/>
+              <a:t>Teaching these principles not only enhances code readability but also fosters a mindset that prioritizes security and maintainability—critical skills for any aspiring developer.</a:t>
+            </a:r>
           </a:p>
         </p:txBody>
       </p:sp>
@@ -6901,6 +6924,1076 @@
     <p:extLst>
       <p:ext uri="{BB962C8B-B14F-4D97-AF65-F5344CB8AC3E}">
         <p14:creationId xmlns:p14="http://schemas.microsoft.com/office/powerpoint/2010/main" val="31640725"/>
+      </p:ext>
+    </p:extLst>
+  </p:cSld>
+  <p:clrMapOvr>
+    <a:masterClrMapping/>
+  </p:clrMapOvr>
+</p:sld>
+</file>
+
+<file path=ppt/slides/slide24.xml><?xml version="1.0" encoding="utf-8"?>
+<p:sld xmlns:a="http://schemas.openxmlformats.org/drawingml/2006/main" xmlns:r="http://schemas.openxmlformats.org/officeDocument/2006/relationships" xmlns:p="http://schemas.openxmlformats.org/presentationml/2006/main">
+  <p:cSld>
+    <p:spTree>
+      <p:nvGrpSpPr>
+        <p:cNvPr id="1" name="">
+          <a:extLst>
+            <a:ext uri="{FF2B5EF4-FFF2-40B4-BE49-F238E27FC236}">
+              <a16:creationId xmlns:a16="http://schemas.microsoft.com/office/drawing/2014/main" id="{5339FC88-F33A-42FD-C371-B86F57801480}"/>
+            </a:ext>
+          </a:extLst>
+        </p:cNvPr>
+        <p:cNvGrpSpPr/>
+        <p:nvPr/>
+      </p:nvGrpSpPr>
+      <p:grpSpPr>
+        <a:xfrm>
+          <a:off x="0" y="0"/>
+          <a:ext cx="0" cy="0"/>
+          <a:chOff x="0" y="0"/>
+          <a:chExt cx="0" cy="0"/>
+        </a:xfrm>
+      </p:grpSpPr>
+      <p:sp>
+        <p:nvSpPr>
+          <p:cNvPr id="10" name="Title 9">
+            <a:extLst>
+              <a:ext uri="{FF2B5EF4-FFF2-40B4-BE49-F238E27FC236}">
+                <a16:creationId xmlns:a16="http://schemas.microsoft.com/office/drawing/2014/main" id="{4AD6EF36-DB50-810D-4FB7-E8E20BBB4ADE}"/>
+              </a:ext>
+            </a:extLst>
+          </p:cNvPr>
+          <p:cNvSpPr>
+            <a:spLocks noGrp="1"/>
+          </p:cNvSpPr>
+          <p:nvPr>
+            <p:ph type="title"/>
+          </p:nvPr>
+        </p:nvSpPr>
+        <p:spPr>
+          <a:xfrm>
+            <a:off x="838200" y="256848"/>
+            <a:ext cx="11216640" cy="848378"/>
+          </a:xfrm>
+        </p:spPr>
+        <p:txBody>
+          <a:bodyPr>
+            <a:noAutofit/>
+          </a:bodyPr>
+          <a:lstStyle/>
+          <a:p>
+            <a:pPr marL="0" indent="0">
+              <a:buNone/>
+            </a:pPr>
+            <a:r>
+              <a:rPr lang="en-US" sz="4000"/>
+              <a:t>1. Readability and Maintainability</a:t>
+            </a:r>
+          </a:p>
+        </p:txBody>
+      </p:sp>
+      <p:sp>
+        <p:nvSpPr>
+          <p:cNvPr id="11" name="Content Placeholder 10">
+            <a:extLst>
+              <a:ext uri="{FF2B5EF4-FFF2-40B4-BE49-F238E27FC236}">
+                <a16:creationId xmlns:a16="http://schemas.microsoft.com/office/drawing/2014/main" id="{EE9CA143-B9D6-2815-A52C-EAB0F68BDBA6}"/>
+              </a:ext>
+            </a:extLst>
+          </p:cNvPr>
+          <p:cNvSpPr>
+            <a:spLocks noGrp="1"/>
+          </p:cNvSpPr>
+          <p:nvPr>
+            <p:ph idx="1"/>
+          </p:nvPr>
+        </p:nvSpPr>
+        <p:spPr>
+          <a:xfrm>
+            <a:off x="838200" y="1105226"/>
+            <a:ext cx="10515600" cy="5071737"/>
+          </a:xfrm>
+        </p:spPr>
+        <p:txBody>
+          <a:bodyPr>
+            <a:normAutofit/>
+          </a:bodyPr>
+          <a:lstStyle/>
+          <a:p>
+            <a:pPr marL="457200"/>
+            <a:r>
+              <a:rPr lang="en-US" sz="3200"/>
+              <a:t>Consistent Indentation (</a:t>
+            </a:r>
+            <a:r>
+              <a:rPr lang="en-US" sz="3200">
+                <a:hlinkClick r:id="rId2"/>
+              </a:rPr>
+              <a:t>PEP 8 Reference</a:t>
+            </a:r>
+            <a:r>
+              <a:rPr lang="en-US" sz="3200"/>
+              <a:t>)</a:t>
+            </a:r>
+          </a:p>
+          <a:p>
+            <a:pPr marL="914400" lvl="1"/>
+            <a:r>
+              <a:rPr lang="en-US" sz="2800"/>
+              <a:t>Use 4 spaces per indentation level to avoid confusion that could lead to logical errors.</a:t>
+            </a:r>
+          </a:p>
+          <a:p>
+            <a:pPr marL="457200"/>
+            <a:r>
+              <a:rPr lang="en-US" sz="3200"/>
+              <a:t>Maximum Line Length (</a:t>
+            </a:r>
+            <a:r>
+              <a:rPr lang="en-US" sz="3200">
+                <a:hlinkClick r:id="rId3"/>
+              </a:rPr>
+              <a:t>PEP 8 Reference</a:t>
+            </a:r>
+            <a:r>
+              <a:rPr lang="en-US" sz="3200"/>
+              <a:t>)</a:t>
+            </a:r>
+          </a:p>
+          <a:p>
+            <a:pPr marL="914400" lvl="1"/>
+            <a:r>
+              <a:rPr lang="en-US" sz="2800"/>
+              <a:t>79 characters prevents the need for horizontal scrolling, making it easier to audit code for security flaws.</a:t>
+            </a:r>
+          </a:p>
+        </p:txBody>
+      </p:sp>
+    </p:spTree>
+    <p:extLst>
+      <p:ext uri="{BB962C8B-B14F-4D97-AF65-F5344CB8AC3E}">
+        <p14:creationId xmlns:p14="http://schemas.microsoft.com/office/powerpoint/2010/main" val="1711417951"/>
+      </p:ext>
+    </p:extLst>
+  </p:cSld>
+  <p:clrMapOvr>
+    <a:masterClrMapping/>
+  </p:clrMapOvr>
+</p:sld>
+</file>
+
+<file path=ppt/slides/slide25.xml><?xml version="1.0" encoding="utf-8"?>
+<p:sld xmlns:a="http://schemas.openxmlformats.org/drawingml/2006/main" xmlns:r="http://schemas.openxmlformats.org/officeDocument/2006/relationships" xmlns:p="http://schemas.openxmlformats.org/presentationml/2006/main">
+  <p:cSld>
+    <p:spTree>
+      <p:nvGrpSpPr>
+        <p:cNvPr id="1" name="">
+          <a:extLst>
+            <a:ext uri="{FF2B5EF4-FFF2-40B4-BE49-F238E27FC236}">
+              <a16:creationId xmlns:a16="http://schemas.microsoft.com/office/drawing/2014/main" id="{CD9E956B-FE93-829B-E1C5-F97530C0208A}"/>
+            </a:ext>
+          </a:extLst>
+        </p:cNvPr>
+        <p:cNvGrpSpPr/>
+        <p:nvPr/>
+      </p:nvGrpSpPr>
+      <p:grpSpPr>
+        <a:xfrm>
+          <a:off x="0" y="0"/>
+          <a:ext cx="0" cy="0"/>
+          <a:chOff x="0" y="0"/>
+          <a:chExt cx="0" cy="0"/>
+        </a:xfrm>
+      </p:grpSpPr>
+      <p:sp>
+        <p:nvSpPr>
+          <p:cNvPr id="10" name="Title 9">
+            <a:extLst>
+              <a:ext uri="{FF2B5EF4-FFF2-40B4-BE49-F238E27FC236}">
+                <a16:creationId xmlns:a16="http://schemas.microsoft.com/office/drawing/2014/main" id="{B4D0CB47-548A-7B7E-7032-3E15FE4AB7B9}"/>
+              </a:ext>
+            </a:extLst>
+          </p:cNvPr>
+          <p:cNvSpPr>
+            <a:spLocks noGrp="1"/>
+          </p:cNvSpPr>
+          <p:nvPr>
+            <p:ph type="title"/>
+          </p:nvPr>
+        </p:nvSpPr>
+        <p:spPr>
+          <a:xfrm>
+            <a:off x="838200" y="256848"/>
+            <a:ext cx="11216640" cy="848378"/>
+          </a:xfrm>
+        </p:spPr>
+        <p:txBody>
+          <a:bodyPr>
+            <a:noAutofit/>
+          </a:bodyPr>
+          <a:lstStyle/>
+          <a:p>
+            <a:pPr marL="0" indent="0">
+              <a:buNone/>
+            </a:pPr>
+            <a:r>
+              <a:rPr lang="en-US" sz="4000"/>
+              <a:t>2. Naming Conventions for Clarity and Security </a:t>
+            </a:r>
+          </a:p>
+        </p:txBody>
+      </p:sp>
+      <p:sp>
+        <p:nvSpPr>
+          <p:cNvPr id="11" name="Content Placeholder 10">
+            <a:extLst>
+              <a:ext uri="{FF2B5EF4-FFF2-40B4-BE49-F238E27FC236}">
+                <a16:creationId xmlns:a16="http://schemas.microsoft.com/office/drawing/2014/main" id="{A76534E0-5320-F76B-C2D5-3CD1A3F7135F}"/>
+              </a:ext>
+            </a:extLst>
+          </p:cNvPr>
+          <p:cNvSpPr>
+            <a:spLocks noGrp="1"/>
+          </p:cNvSpPr>
+          <p:nvPr>
+            <p:ph idx="1"/>
+          </p:nvPr>
+        </p:nvSpPr>
+        <p:spPr>
+          <a:xfrm>
+            <a:off x="838200" y="1105226"/>
+            <a:ext cx="10515600" cy="5071737"/>
+          </a:xfrm>
+        </p:spPr>
+        <p:txBody>
+          <a:bodyPr>
+            <a:normAutofit/>
+          </a:bodyPr>
+          <a:lstStyle/>
+          <a:p>
+            <a:pPr marL="685800" indent="-457200"/>
+            <a:r>
+              <a:rPr lang="en-US" sz="3200">
+                <a:hlinkClick r:id="rId2"/>
+              </a:rPr>
+              <a:t>PEP 8 Reference</a:t>
+            </a:r>
+            <a:endParaRPr lang="en-US" sz="3200"/>
+          </a:p>
+          <a:p>
+            <a:pPr marL="685800" indent="-457200"/>
+            <a:r>
+              <a:rPr lang="en-US" sz="3200"/>
+              <a:t>Use meaningful names for variables, functions, and classes.</a:t>
+            </a:r>
+          </a:p>
+          <a:p>
+            <a:pPr marL="685800" indent="-457200"/>
+            <a:r>
+              <a:rPr lang="en-US" sz="3200"/>
+              <a:t>Avoid names that resemble Python built-ins (e.g., don’t name a variable id, list, or eval).</a:t>
+            </a:r>
+          </a:p>
+          <a:p>
+            <a:pPr marL="685800" indent="-457200"/>
+            <a:r>
+              <a:rPr lang="en-US" sz="3200"/>
+              <a:t>Use CAPITALIZED_NAMES for constants that shouldn’t be modified.</a:t>
+            </a:r>
+          </a:p>
+        </p:txBody>
+      </p:sp>
+    </p:spTree>
+    <p:extLst>
+      <p:ext uri="{BB962C8B-B14F-4D97-AF65-F5344CB8AC3E}">
+        <p14:creationId xmlns:p14="http://schemas.microsoft.com/office/powerpoint/2010/main" val="3073900577"/>
+      </p:ext>
+    </p:extLst>
+  </p:cSld>
+  <p:clrMapOvr>
+    <a:masterClrMapping/>
+  </p:clrMapOvr>
+</p:sld>
+</file>
+
+<file path=ppt/slides/slide26.xml><?xml version="1.0" encoding="utf-8"?>
+<p:sld xmlns:a="http://schemas.openxmlformats.org/drawingml/2006/main" xmlns:r="http://schemas.openxmlformats.org/officeDocument/2006/relationships" xmlns:p="http://schemas.openxmlformats.org/presentationml/2006/main">
+  <p:cSld>
+    <p:spTree>
+      <p:nvGrpSpPr>
+        <p:cNvPr id="1" name="">
+          <a:extLst>
+            <a:ext uri="{FF2B5EF4-FFF2-40B4-BE49-F238E27FC236}">
+              <a16:creationId xmlns:a16="http://schemas.microsoft.com/office/drawing/2014/main" id="{2AA5BAA2-4F2C-E02D-C826-A3DE5DD9060C}"/>
+            </a:ext>
+          </a:extLst>
+        </p:cNvPr>
+        <p:cNvGrpSpPr/>
+        <p:nvPr/>
+      </p:nvGrpSpPr>
+      <p:grpSpPr>
+        <a:xfrm>
+          <a:off x="0" y="0"/>
+          <a:ext cx="0" cy="0"/>
+          <a:chOff x="0" y="0"/>
+          <a:chExt cx="0" cy="0"/>
+        </a:xfrm>
+      </p:grpSpPr>
+      <p:sp>
+        <p:nvSpPr>
+          <p:cNvPr id="10" name="Title 9">
+            <a:extLst>
+              <a:ext uri="{FF2B5EF4-FFF2-40B4-BE49-F238E27FC236}">
+                <a16:creationId xmlns:a16="http://schemas.microsoft.com/office/drawing/2014/main" id="{D920FB9B-7D0A-9704-A56C-68BCF3D1FB10}"/>
+              </a:ext>
+            </a:extLst>
+          </p:cNvPr>
+          <p:cNvSpPr>
+            <a:spLocks noGrp="1"/>
+          </p:cNvSpPr>
+          <p:nvPr>
+            <p:ph type="title"/>
+          </p:nvPr>
+        </p:nvSpPr>
+        <p:spPr>
+          <a:xfrm>
+            <a:off x="838200" y="256848"/>
+            <a:ext cx="11216640" cy="848378"/>
+          </a:xfrm>
+        </p:spPr>
+        <p:txBody>
+          <a:bodyPr>
+            <a:noAutofit/>
+          </a:bodyPr>
+          <a:lstStyle/>
+          <a:p>
+            <a:pPr marL="0" indent="0">
+              <a:buNone/>
+            </a:pPr>
+            <a:r>
+              <a:rPr lang="en-US" sz="4000"/>
+              <a:t>3. Avoid wildcard imports</a:t>
+            </a:r>
+          </a:p>
+        </p:txBody>
+      </p:sp>
+      <p:sp>
+        <p:nvSpPr>
+          <p:cNvPr id="11" name="Content Placeholder 10">
+            <a:extLst>
+              <a:ext uri="{FF2B5EF4-FFF2-40B4-BE49-F238E27FC236}">
+                <a16:creationId xmlns:a16="http://schemas.microsoft.com/office/drawing/2014/main" id="{0B70714E-72E3-047C-F20A-822A4744D2CA}"/>
+              </a:ext>
+            </a:extLst>
+          </p:cNvPr>
+          <p:cNvSpPr>
+            <a:spLocks noGrp="1"/>
+          </p:cNvSpPr>
+          <p:nvPr>
+            <p:ph idx="1"/>
+          </p:nvPr>
+        </p:nvSpPr>
+        <p:spPr>
+          <a:xfrm>
+            <a:off x="838200" y="1105226"/>
+            <a:ext cx="10515600" cy="5071737"/>
+          </a:xfrm>
+        </p:spPr>
+        <p:txBody>
+          <a:bodyPr>
+            <a:normAutofit/>
+          </a:bodyPr>
+          <a:lstStyle/>
+          <a:p>
+            <a:pPr marL="685800" indent="-457200"/>
+            <a:r>
+              <a:rPr lang="en-US" sz="3200">
+                <a:hlinkClick r:id="rId2"/>
+              </a:rPr>
+              <a:t>PEP 8 Reference</a:t>
+            </a:r>
+            <a:endParaRPr lang="en-US" sz="3200"/>
+          </a:p>
+          <a:p>
+            <a:pPr marL="685800" indent="-457200"/>
+            <a:r>
+              <a:rPr lang="en-US" sz="3200"/>
+              <a:t>Avoid</a:t>
+            </a:r>
+          </a:p>
+          <a:p>
+            <a:pPr marL="685800" indent="0">
+              <a:buNone/>
+            </a:pPr>
+            <a:endParaRPr lang="en-US" sz="1400">
+              <a:latin typeface="Consolas" panose="020B0609020204030204" pitchFamily="49" charset="0"/>
+            </a:endParaRPr>
+          </a:p>
+          <a:p>
+            <a:pPr marL="1371600" indent="0">
+              <a:buNone/>
+            </a:pPr>
+            <a:r>
+              <a:rPr lang="en-US" sz="3200">
+                <a:latin typeface="Consolas" panose="020B0609020204030204" pitchFamily="49" charset="0"/>
+              </a:rPr>
+              <a:t>from module import *</a:t>
+            </a:r>
+          </a:p>
+          <a:p>
+            <a:pPr marL="685800" indent="0">
+              <a:buNone/>
+            </a:pPr>
+            <a:endParaRPr lang="en-US" sz="1400">
+              <a:latin typeface="Consolas" panose="020B0609020204030204" pitchFamily="49" charset="0"/>
+            </a:endParaRPr>
+          </a:p>
+          <a:p>
+            <a:pPr marL="685800" indent="-457200"/>
+            <a:r>
+              <a:rPr lang="en-US" sz="3200"/>
+              <a:t>This can introduce unintended variables and functions into the namespace, leading to unpredictable behavior.</a:t>
+            </a:r>
+          </a:p>
+        </p:txBody>
+      </p:sp>
+    </p:spTree>
+    <p:extLst>
+      <p:ext uri="{BB962C8B-B14F-4D97-AF65-F5344CB8AC3E}">
+        <p14:creationId xmlns:p14="http://schemas.microsoft.com/office/powerpoint/2010/main" val="2932058948"/>
+      </p:ext>
+    </p:extLst>
+  </p:cSld>
+  <p:clrMapOvr>
+    <a:masterClrMapping/>
+  </p:clrMapOvr>
+</p:sld>
+</file>
+
+<file path=ppt/slides/slide27.xml><?xml version="1.0" encoding="utf-8"?>
+<p:sld xmlns:a="http://schemas.openxmlformats.org/drawingml/2006/main" xmlns:r="http://schemas.openxmlformats.org/officeDocument/2006/relationships" xmlns:p="http://schemas.openxmlformats.org/presentationml/2006/main">
+  <p:cSld>
+    <p:spTree>
+      <p:nvGrpSpPr>
+        <p:cNvPr id="1" name="">
+          <a:extLst>
+            <a:ext uri="{FF2B5EF4-FFF2-40B4-BE49-F238E27FC236}">
+              <a16:creationId xmlns:a16="http://schemas.microsoft.com/office/drawing/2014/main" id="{1589BEF1-D61E-0DC1-DF36-7DFDB0C8B223}"/>
+            </a:ext>
+          </a:extLst>
+        </p:cNvPr>
+        <p:cNvGrpSpPr/>
+        <p:nvPr/>
+      </p:nvGrpSpPr>
+      <p:grpSpPr>
+        <a:xfrm>
+          <a:off x="0" y="0"/>
+          <a:ext cx="0" cy="0"/>
+          <a:chOff x="0" y="0"/>
+          <a:chExt cx="0" cy="0"/>
+        </a:xfrm>
+      </p:grpSpPr>
+      <p:sp>
+        <p:nvSpPr>
+          <p:cNvPr id="10" name="Title 9">
+            <a:extLst>
+              <a:ext uri="{FF2B5EF4-FFF2-40B4-BE49-F238E27FC236}">
+                <a16:creationId xmlns:a16="http://schemas.microsoft.com/office/drawing/2014/main" id="{72B159BB-6236-2170-CED9-22CD9345C4D3}"/>
+              </a:ext>
+            </a:extLst>
+          </p:cNvPr>
+          <p:cNvSpPr>
+            <a:spLocks noGrp="1"/>
+          </p:cNvSpPr>
+          <p:nvPr>
+            <p:ph type="title"/>
+          </p:nvPr>
+        </p:nvSpPr>
+        <p:spPr>
+          <a:xfrm>
+            <a:off x="838200" y="256848"/>
+            <a:ext cx="11216640" cy="848378"/>
+          </a:xfrm>
+        </p:spPr>
+        <p:txBody>
+          <a:bodyPr>
+            <a:noAutofit/>
+          </a:bodyPr>
+          <a:lstStyle/>
+          <a:p>
+            <a:pPr marL="0" indent="0">
+              <a:buNone/>
+            </a:pPr>
+            <a:r>
+              <a:rPr lang="en-US" sz="4000"/>
+              <a:t>4. Whitespace and Readability to Avoid Logical Errors </a:t>
+            </a:r>
+          </a:p>
+        </p:txBody>
+      </p:sp>
+      <p:sp>
+        <p:nvSpPr>
+          <p:cNvPr id="11" name="Content Placeholder 10">
+            <a:extLst>
+              <a:ext uri="{FF2B5EF4-FFF2-40B4-BE49-F238E27FC236}">
+                <a16:creationId xmlns:a16="http://schemas.microsoft.com/office/drawing/2014/main" id="{174C0219-E75C-B2EF-E289-9B7A03AB3526}"/>
+              </a:ext>
+            </a:extLst>
+          </p:cNvPr>
+          <p:cNvSpPr>
+            <a:spLocks noGrp="1"/>
+          </p:cNvSpPr>
+          <p:nvPr>
+            <p:ph idx="1"/>
+          </p:nvPr>
+        </p:nvSpPr>
+        <p:spPr>
+          <a:xfrm>
+            <a:off x="838200" y="1105226"/>
+            <a:ext cx="10515600" cy="5495926"/>
+          </a:xfrm>
+        </p:spPr>
+        <p:txBody>
+          <a:bodyPr>
+            <a:normAutofit fontScale="77500" lnSpcReduction="20000"/>
+          </a:bodyPr>
+          <a:lstStyle/>
+          <a:p>
+            <a:pPr marL="685800" indent="-457200"/>
+            <a:r>
+              <a:rPr lang="en-US" sz="3200">
+                <a:hlinkClick r:id="rId2"/>
+              </a:rPr>
+              <a:t>PEP 8 Reference</a:t>
+            </a:r>
+            <a:endParaRPr lang="en-US" sz="3200"/>
+          </a:p>
+          <a:p>
+            <a:pPr marL="685800" indent="-457200"/>
+            <a:r>
+              <a:rPr lang="en-US" sz="3200"/>
+              <a:t>Use spaces around operators and after commas to improve readability. Do this:</a:t>
+            </a:r>
+          </a:p>
+          <a:p>
+            <a:pPr marL="685800" indent="-457200"/>
+            <a:endParaRPr lang="en-US" sz="1600">
+              <a:latin typeface="Consolas" panose="020B0609020204030204" pitchFamily="49" charset="0"/>
+            </a:endParaRPr>
+          </a:p>
+          <a:p>
+            <a:pPr marL="1431925" indent="0">
+              <a:buNone/>
+            </a:pPr>
+            <a:r>
+              <a:rPr lang="en-US" sz="2600" b="1">
+                <a:latin typeface="Consolas" panose="020B0609020204030204" pitchFamily="49" charset="0"/>
+              </a:rPr>
+              <a:t>x = a + b</a:t>
+            </a:r>
+          </a:p>
+          <a:p>
+            <a:pPr marL="685800" indent="0">
+              <a:buNone/>
+            </a:pPr>
+            <a:endParaRPr lang="en-US" sz="1600"/>
+          </a:p>
+          <a:p>
+            <a:pPr marL="685800" indent="0">
+              <a:buNone/>
+            </a:pPr>
+            <a:r>
+              <a:rPr lang="en-US" sz="3200"/>
+              <a:t>instead of:</a:t>
+            </a:r>
+          </a:p>
+          <a:p>
+            <a:pPr marL="685800" indent="0">
+              <a:buNone/>
+            </a:pPr>
+            <a:endParaRPr lang="en-US" sz="1600" b="1">
+              <a:latin typeface="Consolas" panose="020B0609020204030204" pitchFamily="49" charset="0"/>
+            </a:endParaRPr>
+          </a:p>
+          <a:p>
+            <a:pPr marL="1431925" indent="0">
+              <a:buNone/>
+            </a:pPr>
+            <a:r>
+              <a:rPr lang="en-US" sz="2600" b="1">
+                <a:latin typeface="Consolas" panose="020B0609020204030204" pitchFamily="49" charset="0"/>
+              </a:rPr>
+              <a:t>x=a+b</a:t>
+            </a:r>
+          </a:p>
+          <a:p>
+            <a:pPr marL="1431925" indent="0">
+              <a:buNone/>
+            </a:pPr>
+            <a:endParaRPr lang="en-US" sz="1600" b="1">
+              <a:latin typeface="Consolas" panose="020B0609020204030204" pitchFamily="49" charset="0"/>
+            </a:endParaRPr>
+          </a:p>
+          <a:p>
+            <a:pPr marL="685800" indent="-457200"/>
+            <a:r>
+              <a:rPr lang="en-US" sz="3200"/>
+              <a:t>Avoid extraneous whitespace in expressions. Instead of:</a:t>
+            </a:r>
+          </a:p>
+          <a:p>
+            <a:pPr marL="685800" indent="-457200"/>
+            <a:endParaRPr lang="en-US" sz="1400"/>
+          </a:p>
+          <a:p>
+            <a:pPr marL="1431925" indent="0">
+              <a:buNone/>
+            </a:pPr>
+            <a:r>
+              <a:rPr lang="en-US" b="1">
+                <a:latin typeface="Consolas" panose="020B0609020204030204" pitchFamily="49" charset="0"/>
+              </a:rPr>
+              <a:t>x = (a + b ) # (trailing space inside parentheses)</a:t>
+            </a:r>
+          </a:p>
+          <a:p>
+            <a:pPr marL="685800" indent="-457200"/>
+            <a:endParaRPr lang="en-US" sz="1400" b="1">
+              <a:latin typeface="Consolas" panose="020B0609020204030204" pitchFamily="49" charset="0"/>
+            </a:endParaRPr>
+          </a:p>
+          <a:p>
+            <a:pPr marL="685800" indent="-457200"/>
+            <a:r>
+              <a:rPr lang="en-US" sz="3200"/>
+              <a:t>Do this: </a:t>
+            </a:r>
+          </a:p>
+          <a:p>
+            <a:pPr marL="685800" indent="-457200"/>
+            <a:endParaRPr lang="en-US" sz="1400"/>
+          </a:p>
+          <a:p>
+            <a:pPr marL="1431925" indent="0">
+              <a:buNone/>
+            </a:pPr>
+            <a:r>
+              <a:rPr lang="en-US" sz="2700" b="1">
+                <a:latin typeface="Consolas" panose="020B0609020204030204" pitchFamily="49" charset="0"/>
+              </a:rPr>
+              <a:t>x = (a + b)</a:t>
+            </a:r>
+          </a:p>
+          <a:p>
+            <a:pPr marL="685800" indent="-457200"/>
+            <a:endParaRPr lang="en-US" sz="3200"/>
+          </a:p>
+        </p:txBody>
+      </p:sp>
+    </p:spTree>
+    <p:extLst>
+      <p:ext uri="{BB962C8B-B14F-4D97-AF65-F5344CB8AC3E}">
+        <p14:creationId xmlns:p14="http://schemas.microsoft.com/office/powerpoint/2010/main" val="2622009618"/>
+      </p:ext>
+    </p:extLst>
+  </p:cSld>
+  <p:clrMapOvr>
+    <a:masterClrMapping/>
+  </p:clrMapOvr>
+</p:sld>
+</file>
+
+<file path=ppt/slides/slide28.xml><?xml version="1.0" encoding="utf-8"?>
+<p:sld xmlns:a="http://schemas.openxmlformats.org/drawingml/2006/main" xmlns:r="http://schemas.openxmlformats.org/officeDocument/2006/relationships" xmlns:p="http://schemas.openxmlformats.org/presentationml/2006/main">
+  <p:cSld>
+    <p:spTree>
+      <p:nvGrpSpPr>
+        <p:cNvPr id="1" name="">
+          <a:extLst>
+            <a:ext uri="{FF2B5EF4-FFF2-40B4-BE49-F238E27FC236}">
+              <a16:creationId xmlns:a16="http://schemas.microsoft.com/office/drawing/2014/main" id="{6E30BDED-B964-D3D7-586F-05FA224BB6A3}"/>
+            </a:ext>
+          </a:extLst>
+        </p:cNvPr>
+        <p:cNvGrpSpPr/>
+        <p:nvPr/>
+      </p:nvGrpSpPr>
+      <p:grpSpPr>
+        <a:xfrm>
+          <a:off x="0" y="0"/>
+          <a:ext cx="0" cy="0"/>
+          <a:chOff x="0" y="0"/>
+          <a:chExt cx="0" cy="0"/>
+        </a:xfrm>
+      </p:grpSpPr>
+      <p:sp>
+        <p:nvSpPr>
+          <p:cNvPr id="10" name="Title 9">
+            <a:extLst>
+              <a:ext uri="{FF2B5EF4-FFF2-40B4-BE49-F238E27FC236}">
+                <a16:creationId xmlns:a16="http://schemas.microsoft.com/office/drawing/2014/main" id="{9574C39F-7009-4DB0-2A93-DF354FB1A564}"/>
+              </a:ext>
+            </a:extLst>
+          </p:cNvPr>
+          <p:cNvSpPr>
+            <a:spLocks noGrp="1"/>
+          </p:cNvSpPr>
+          <p:nvPr>
+            <p:ph type="title"/>
+          </p:nvPr>
+        </p:nvSpPr>
+        <p:spPr>
+          <a:xfrm>
+            <a:off x="838200" y="256848"/>
+            <a:ext cx="11216640" cy="848378"/>
+          </a:xfrm>
+        </p:spPr>
+        <p:txBody>
+          <a:bodyPr>
+            <a:noAutofit/>
+          </a:bodyPr>
+          <a:lstStyle/>
+          <a:p>
+            <a:pPr marL="0" indent="0">
+              <a:buNone/>
+            </a:pPr>
+            <a:r>
+              <a:rPr lang="en-US" sz="4000"/>
+              <a:t>5. Proper Exception Handling </a:t>
+            </a:r>
+          </a:p>
+        </p:txBody>
+      </p:sp>
+      <p:sp>
+        <p:nvSpPr>
+          <p:cNvPr id="11" name="Content Placeholder 10">
+            <a:extLst>
+              <a:ext uri="{FF2B5EF4-FFF2-40B4-BE49-F238E27FC236}">
+                <a16:creationId xmlns:a16="http://schemas.microsoft.com/office/drawing/2014/main" id="{1976C4E8-FC6E-C449-CCCA-57B322B26A42}"/>
+              </a:ext>
+            </a:extLst>
+          </p:cNvPr>
+          <p:cNvSpPr>
+            <a:spLocks noGrp="1"/>
+          </p:cNvSpPr>
+          <p:nvPr>
+            <p:ph idx="1"/>
+          </p:nvPr>
+        </p:nvSpPr>
+        <p:spPr>
+          <a:xfrm>
+            <a:off x="838200" y="1105226"/>
+            <a:ext cx="10515600" cy="5495926"/>
+          </a:xfrm>
+        </p:spPr>
+        <p:txBody>
+          <a:bodyPr>
+            <a:normAutofit fontScale="92500" lnSpcReduction="10000"/>
+          </a:bodyPr>
+          <a:lstStyle/>
+          <a:p>
+            <a:pPr marL="288925" indent="-288925"/>
+            <a:r>
+              <a:rPr lang="en-US" sz="3200">
+                <a:hlinkClick r:id="rId2"/>
+              </a:rPr>
+              <a:t>PEP 8 Reference</a:t>
+            </a:r>
+            <a:endParaRPr lang="en-US" sz="3200"/>
+          </a:p>
+          <a:p>
+            <a:pPr marL="288925" indent="-288925"/>
+            <a:r>
+              <a:rPr lang="en-US" sz="3200"/>
+              <a:t>Don’t use "bare except" statements. </a:t>
+            </a:r>
+            <a:r>
+              <a:rPr lang="en-US" sz="2900"/>
+              <a:t>Instead of:</a:t>
+            </a:r>
+          </a:p>
+          <a:p>
+            <a:pPr marL="288925" indent="-288925"/>
+            <a:endParaRPr lang="en-US" sz="1300"/>
+          </a:p>
+          <a:p>
+            <a:pPr marL="914400" indent="0">
+              <a:buNone/>
+            </a:pPr>
+            <a:r>
+              <a:rPr lang="en-US" sz="2400" b="1">
+                <a:latin typeface="Consolas" panose="020B0609020204030204" pitchFamily="49" charset="0"/>
+              </a:rPr>
+              <a:t>try:</a:t>
+            </a:r>
+          </a:p>
+          <a:p>
+            <a:pPr marL="914400" indent="0">
+              <a:buNone/>
+            </a:pPr>
+            <a:r>
+              <a:rPr lang="en-US" sz="2400" b="1">
+                <a:latin typeface="Consolas" panose="020B0609020204030204" pitchFamily="49" charset="0"/>
+              </a:rPr>
+              <a:t>    process_data()</a:t>
+            </a:r>
+          </a:p>
+          <a:p>
+            <a:pPr marL="914400" indent="0">
+              <a:buNone/>
+            </a:pPr>
+            <a:r>
+              <a:rPr lang="en-US" sz="2400" b="1">
+                <a:latin typeface="Consolas" panose="020B0609020204030204" pitchFamily="49" charset="0"/>
+              </a:rPr>
+              <a:t>except:</a:t>
+            </a:r>
+          </a:p>
+          <a:p>
+            <a:pPr marL="914400" indent="0">
+              <a:buNone/>
+            </a:pPr>
+            <a:r>
+              <a:rPr lang="en-US" sz="2400" b="1">
+                <a:latin typeface="Consolas" panose="020B0609020204030204" pitchFamily="49" charset="0"/>
+              </a:rPr>
+              <a:t>    pass # Silently ignores errors (including critical ones)</a:t>
+            </a:r>
+          </a:p>
+          <a:p>
+            <a:pPr marL="288925" indent="-288925">
+              <a:buNone/>
+            </a:pPr>
+            <a:endParaRPr lang="en-US" sz="1200" b="1">
+              <a:latin typeface="Consolas" panose="020B0609020204030204" pitchFamily="49" charset="0"/>
+            </a:endParaRPr>
+          </a:p>
+          <a:p>
+            <a:pPr marL="288925" indent="-288925"/>
+            <a:r>
+              <a:rPr lang="en-US" sz="2900"/>
+              <a:t>Do this:</a:t>
+            </a:r>
+          </a:p>
+          <a:p>
+            <a:pPr marL="288925" indent="-288925"/>
+            <a:endParaRPr lang="en-US" sz="1300"/>
+          </a:p>
+          <a:p>
+            <a:pPr marL="914400" indent="0">
+              <a:buNone/>
+            </a:pPr>
+            <a:r>
+              <a:rPr lang="en-US" sz="2200" b="1">
+                <a:latin typeface="Consolas" panose="020B0609020204030204" pitchFamily="49" charset="0"/>
+              </a:rPr>
+              <a:t>try:</a:t>
+            </a:r>
+          </a:p>
+          <a:p>
+            <a:pPr marL="914400" indent="0">
+              <a:buNone/>
+            </a:pPr>
+            <a:r>
+              <a:rPr lang="en-US" sz="2200" b="1">
+                <a:latin typeface="Consolas" panose="020B0609020204030204" pitchFamily="49" charset="0"/>
+              </a:rPr>
+              <a:t>    process_data()</a:t>
+            </a:r>
+          </a:p>
+          <a:p>
+            <a:pPr marL="914400" indent="0">
+              <a:buNone/>
+            </a:pPr>
+            <a:r>
+              <a:rPr lang="en-US" sz="2200" b="1">
+                <a:latin typeface="Consolas" panose="020B0609020204030204" pitchFamily="49" charset="0"/>
+              </a:rPr>
+              <a:t>except (ValueError, KeyError) as e:</a:t>
+            </a:r>
+          </a:p>
+          <a:p>
+            <a:pPr marL="914400" indent="0">
+              <a:buNone/>
+            </a:pPr>
+            <a:r>
+              <a:rPr lang="en-US" sz="2200" b="1">
+                <a:latin typeface="Consolas" panose="020B0609020204030204" pitchFamily="49" charset="0"/>
+              </a:rPr>
+              <a:t>    logger.error(f"Processing failed: {e}")  # Log the issue</a:t>
+            </a:r>
+          </a:p>
+        </p:txBody>
+      </p:sp>
+    </p:spTree>
+    <p:extLst>
+      <p:ext uri="{BB962C8B-B14F-4D97-AF65-F5344CB8AC3E}">
+        <p14:creationId xmlns:p14="http://schemas.microsoft.com/office/powerpoint/2010/main" val="648390618"/>
+      </p:ext>
+    </p:extLst>
+  </p:cSld>
+  <p:clrMapOvr>
+    <a:masterClrMapping/>
+  </p:clrMapOvr>
+</p:sld>
+</file>
+
+<file path=ppt/slides/slide29.xml><?xml version="1.0" encoding="utf-8"?>
+<p:sld xmlns:a="http://schemas.openxmlformats.org/drawingml/2006/main" xmlns:r="http://schemas.openxmlformats.org/officeDocument/2006/relationships" xmlns:p="http://schemas.openxmlformats.org/presentationml/2006/main">
+  <p:cSld>
+    <p:spTree>
+      <p:nvGrpSpPr>
+        <p:cNvPr id="1" name="">
+          <a:extLst>
+            <a:ext uri="{FF2B5EF4-FFF2-40B4-BE49-F238E27FC236}">
+              <a16:creationId xmlns:a16="http://schemas.microsoft.com/office/drawing/2014/main" id="{671EB5AC-59C6-DBA6-55E4-5A60CEB54216}"/>
+            </a:ext>
+          </a:extLst>
+        </p:cNvPr>
+        <p:cNvGrpSpPr/>
+        <p:nvPr/>
+      </p:nvGrpSpPr>
+      <p:grpSpPr>
+        <a:xfrm>
+          <a:off x="0" y="0"/>
+          <a:ext cx="0" cy="0"/>
+          <a:chOff x="0" y="0"/>
+          <a:chExt cx="0" cy="0"/>
+        </a:xfrm>
+      </p:grpSpPr>
+      <p:sp>
+        <p:nvSpPr>
+          <p:cNvPr id="10" name="Title 9">
+            <a:extLst>
+              <a:ext uri="{FF2B5EF4-FFF2-40B4-BE49-F238E27FC236}">
+                <a16:creationId xmlns:a16="http://schemas.microsoft.com/office/drawing/2014/main" id="{551EB25D-1BE3-4F96-5F47-E5C5FFA06BFA}"/>
+              </a:ext>
+            </a:extLst>
+          </p:cNvPr>
+          <p:cNvSpPr>
+            <a:spLocks noGrp="1"/>
+          </p:cNvSpPr>
+          <p:nvPr>
+            <p:ph type="title"/>
+          </p:nvPr>
+        </p:nvSpPr>
+        <p:spPr>
+          <a:xfrm>
+            <a:off x="838200" y="256848"/>
+            <a:ext cx="11216640" cy="848378"/>
+          </a:xfrm>
+        </p:spPr>
+        <p:txBody>
+          <a:bodyPr>
+            <a:noAutofit/>
+          </a:bodyPr>
+          <a:lstStyle/>
+          <a:p>
+            <a:pPr marL="0" indent="0">
+              <a:buNone/>
+            </a:pPr>
+            <a:r>
+              <a:rPr lang="en-US" sz="4000"/>
+              <a:t>5. Proper Exception Handling (cont)</a:t>
+            </a:r>
+          </a:p>
+        </p:txBody>
+      </p:sp>
+      <p:sp>
+        <p:nvSpPr>
+          <p:cNvPr id="11" name="Content Placeholder 10">
+            <a:extLst>
+              <a:ext uri="{FF2B5EF4-FFF2-40B4-BE49-F238E27FC236}">
+                <a16:creationId xmlns:a16="http://schemas.microsoft.com/office/drawing/2014/main" id="{F202EDF0-0974-BE06-35AF-822C7CABCAB9}"/>
+              </a:ext>
+            </a:extLst>
+          </p:cNvPr>
+          <p:cNvSpPr>
+            <a:spLocks noGrp="1"/>
+          </p:cNvSpPr>
+          <p:nvPr>
+            <p:ph idx="1"/>
+          </p:nvPr>
+        </p:nvSpPr>
+        <p:spPr>
+          <a:xfrm>
+            <a:off x="838200" y="1105226"/>
+            <a:ext cx="10515600" cy="5495926"/>
+          </a:xfrm>
+        </p:spPr>
+        <p:txBody>
+          <a:bodyPr>
+            <a:normAutofit/>
+          </a:bodyPr>
+          <a:lstStyle/>
+          <a:p>
+            <a:pPr marL="457200" indent="-457200"/>
+            <a:r>
+              <a:rPr lang="en-US" sz="3000"/>
+              <a:t>Raise exceptions explicitly. Instead of: </a:t>
+            </a:r>
+          </a:p>
+          <a:p>
+            <a:pPr marL="457200" indent="-457200"/>
+            <a:endParaRPr lang="en-US" sz="2200" b="1">
+              <a:latin typeface="Consolas" panose="020B0609020204030204" pitchFamily="49" charset="0"/>
+            </a:endParaRPr>
+          </a:p>
+          <a:p>
+            <a:pPr marL="860425" indent="0">
+              <a:buNone/>
+            </a:pPr>
+            <a:r>
+              <a:rPr lang="en-US" sz="2200" b="1">
+                <a:latin typeface="Consolas" panose="020B0609020204030204" pitchFamily="49" charset="0"/>
+              </a:rPr>
+              <a:t>raise "Error occurred" # (raises a string -- invalid)</a:t>
+            </a:r>
+          </a:p>
+          <a:p>
+            <a:pPr marL="457200" indent="-457200"/>
+            <a:endParaRPr lang="en-US" sz="2200" b="1">
+              <a:latin typeface="Consolas" panose="020B0609020204030204" pitchFamily="49" charset="0"/>
+            </a:endParaRPr>
+          </a:p>
+          <a:p>
+            <a:pPr marL="457200" indent="-457200"/>
+            <a:r>
+              <a:rPr lang="en-US" sz="3000"/>
+              <a:t>Do this: </a:t>
+            </a:r>
+          </a:p>
+          <a:p>
+            <a:pPr marL="457200" indent="-457200"/>
+            <a:endParaRPr lang="en-US" sz="2200" b="1">
+              <a:latin typeface="Consolas" panose="020B0609020204030204" pitchFamily="49" charset="0"/>
+            </a:endParaRPr>
+          </a:p>
+          <a:p>
+            <a:pPr marL="860425" indent="0">
+              <a:buNone/>
+            </a:pPr>
+            <a:r>
+              <a:rPr lang="en-US" sz="2200" b="1">
+                <a:latin typeface="Consolas" panose="020B0609020204030204" pitchFamily="49" charset="0"/>
+              </a:rPr>
+              <a:t>raise ValueError("Invalid input")</a:t>
+            </a:r>
+          </a:p>
+          <a:p>
+            <a:pPr marL="685800" indent="-457200"/>
+            <a:endParaRPr lang="en-US" sz="2200" b="1">
+              <a:latin typeface="Consolas" panose="020B0609020204030204" pitchFamily="49" charset="0"/>
+            </a:endParaRPr>
+          </a:p>
+        </p:txBody>
+      </p:sp>
+    </p:spTree>
+    <p:extLst>
+      <p:ext uri="{BB962C8B-B14F-4D97-AF65-F5344CB8AC3E}">
+        <p14:creationId xmlns:p14="http://schemas.microsoft.com/office/powerpoint/2010/main" val="2502104080"/>
       </p:ext>
     </p:extLst>
   </p:cSld>
@@ -6963,7 +8056,7 @@
           <a:p>
             <a:r>
               <a:rPr lang="en-US"/>
-              <a:t>1.1 Introduction to Secure Version Control</a:t>
+              <a:t>Introduction to Secure Version Control</a:t>
             </a:r>
           </a:p>
         </p:txBody>
@@ -7036,6 +8129,485 @@
     <p:extLst>
       <p:ext uri="{BB962C8B-B14F-4D97-AF65-F5344CB8AC3E}">
         <p14:creationId xmlns:p14="http://schemas.microsoft.com/office/powerpoint/2010/main" val="3584772327"/>
+      </p:ext>
+    </p:extLst>
+  </p:cSld>
+  <p:clrMapOvr>
+    <a:masterClrMapping/>
+  </p:clrMapOvr>
+</p:sld>
+</file>
+
+<file path=ppt/slides/slide30.xml><?xml version="1.0" encoding="utf-8"?>
+<p:sld xmlns:a="http://schemas.openxmlformats.org/drawingml/2006/main" xmlns:r="http://schemas.openxmlformats.org/officeDocument/2006/relationships" xmlns:p="http://schemas.openxmlformats.org/presentationml/2006/main">
+  <p:cSld>
+    <p:spTree>
+      <p:nvGrpSpPr>
+        <p:cNvPr id="1" name="">
+          <a:extLst>
+            <a:ext uri="{FF2B5EF4-FFF2-40B4-BE49-F238E27FC236}">
+              <a16:creationId xmlns:a16="http://schemas.microsoft.com/office/drawing/2014/main" id="{7652DE55-5EC5-191C-809B-2854B2FA6FAD}"/>
+            </a:ext>
+          </a:extLst>
+        </p:cNvPr>
+        <p:cNvGrpSpPr/>
+        <p:nvPr/>
+      </p:nvGrpSpPr>
+      <p:grpSpPr>
+        <a:xfrm>
+          <a:off x="0" y="0"/>
+          <a:ext cx="0" cy="0"/>
+          <a:chOff x="0" y="0"/>
+          <a:chExt cx="0" cy="0"/>
+        </a:xfrm>
+      </p:grpSpPr>
+      <p:sp>
+        <p:nvSpPr>
+          <p:cNvPr id="10" name="Title 9">
+            <a:extLst>
+              <a:ext uri="{FF2B5EF4-FFF2-40B4-BE49-F238E27FC236}">
+                <a16:creationId xmlns:a16="http://schemas.microsoft.com/office/drawing/2014/main" id="{DA42000D-7743-50AD-E803-BC091F2D5D3A}"/>
+              </a:ext>
+            </a:extLst>
+          </p:cNvPr>
+          <p:cNvSpPr>
+            <a:spLocks noGrp="1"/>
+          </p:cNvSpPr>
+          <p:nvPr>
+            <p:ph type="title"/>
+          </p:nvPr>
+        </p:nvSpPr>
+        <p:spPr>
+          <a:xfrm>
+            <a:off x="838200" y="256848"/>
+            <a:ext cx="11216640" cy="848378"/>
+          </a:xfrm>
+        </p:spPr>
+        <p:txBody>
+          <a:bodyPr>
+            <a:noAutofit/>
+          </a:bodyPr>
+          <a:lstStyle/>
+          <a:p>
+            <a:pPr marL="0" indent="0">
+              <a:buNone/>
+            </a:pPr>
+            <a:r>
+              <a:rPr lang="en-US" sz="4000"/>
+              <a:t>6. Mutability Awareness </a:t>
+            </a:r>
+          </a:p>
+        </p:txBody>
+      </p:sp>
+      <p:sp>
+        <p:nvSpPr>
+          <p:cNvPr id="11" name="Content Placeholder 10">
+            <a:extLst>
+              <a:ext uri="{FF2B5EF4-FFF2-40B4-BE49-F238E27FC236}">
+                <a16:creationId xmlns:a16="http://schemas.microsoft.com/office/drawing/2014/main" id="{8EB84410-A3F1-BA12-2B47-CC9E27560371}"/>
+              </a:ext>
+            </a:extLst>
+          </p:cNvPr>
+          <p:cNvSpPr>
+            <a:spLocks noGrp="1"/>
+          </p:cNvSpPr>
+          <p:nvPr>
+            <p:ph idx="1"/>
+          </p:nvPr>
+        </p:nvSpPr>
+        <p:spPr>
+          <a:xfrm>
+            <a:off x="838200" y="1105226"/>
+            <a:ext cx="10515600" cy="5495926"/>
+          </a:xfrm>
+        </p:spPr>
+        <p:txBody>
+          <a:bodyPr>
+            <a:normAutofit fontScale="92500" lnSpcReduction="20000"/>
+          </a:bodyPr>
+          <a:lstStyle/>
+          <a:p>
+            <a:pPr marL="342900" indent="-342900"/>
+            <a:r>
+              <a:rPr lang="en-US" sz="3000"/>
+              <a:t>PEP 8 Reference</a:t>
+            </a:r>
+          </a:p>
+          <a:p>
+            <a:pPr marL="342900" indent="-342900"/>
+            <a:r>
+              <a:rPr lang="en-US" sz="3000"/>
+              <a:t>Don’t use mutable default arguments</a:t>
+            </a:r>
+          </a:p>
+          <a:p>
+            <a:pPr marL="342900" indent="-342900"/>
+            <a:r>
+              <a:rPr lang="en-US" sz="3000"/>
+              <a:t>This can lead to unintended state retention. Instead of this:</a:t>
+            </a:r>
+          </a:p>
+          <a:p>
+            <a:pPr marL="342900" indent="-342900"/>
+            <a:r>
+              <a:rPr lang="en-US" sz="3000"/>
+              <a:t>def insecure_function(data=[]):</a:t>
+            </a:r>
+          </a:p>
+          <a:p>
+            <a:pPr marL="342900" indent="-342900"/>
+            <a:r>
+              <a:rPr lang="en-US" sz="3000"/>
+              <a:t>    data.append("new_value")</a:t>
+            </a:r>
+          </a:p>
+          <a:p>
+            <a:pPr marL="342900" indent="-342900"/>
+            <a:r>
+              <a:rPr lang="en-US" sz="3000"/>
+              <a:t>    return data</a:t>
+            </a:r>
+          </a:p>
+          <a:p>
+            <a:pPr marL="342900" indent="-342900"/>
+            <a:r>
+              <a:rPr lang="en-US" sz="3000"/>
+              <a:t>Do this:</a:t>
+            </a:r>
+          </a:p>
+          <a:p>
+            <a:pPr marL="342900" indent="-342900"/>
+            <a:r>
+              <a:rPr lang="en-US" sz="3000"/>
+              <a:t>def secure_function(data=None):</a:t>
+            </a:r>
+          </a:p>
+          <a:p>
+            <a:pPr marL="342900" indent="-342900"/>
+            <a:r>
+              <a:rPr lang="en-US" sz="3000"/>
+              <a:t>    if data is None:</a:t>
+            </a:r>
+          </a:p>
+          <a:p>
+            <a:pPr marL="342900" indent="-342900"/>
+            <a:r>
+              <a:rPr lang="en-US" sz="3000"/>
+              <a:t>        data = []</a:t>
+            </a:r>
+          </a:p>
+          <a:p>
+            <a:pPr marL="342900" indent="-342900"/>
+            <a:r>
+              <a:rPr lang="en-US" sz="3000"/>
+              <a:t>    data.append("new_value")</a:t>
+            </a:r>
+          </a:p>
+          <a:p>
+            <a:pPr marL="342900" indent="-342900"/>
+            <a:r>
+              <a:rPr lang="en-US" sz="3000"/>
+              <a:t>    return data</a:t>
+            </a:r>
+          </a:p>
+          <a:p>
+            <a:pPr marL="685800" indent="-457200"/>
+            <a:endParaRPr lang="en-US" sz="2200" b="1">
+              <a:latin typeface="Consolas" panose="020B0609020204030204" pitchFamily="49" charset="0"/>
+            </a:endParaRPr>
+          </a:p>
+        </p:txBody>
+      </p:sp>
+    </p:spTree>
+    <p:extLst>
+      <p:ext uri="{BB962C8B-B14F-4D97-AF65-F5344CB8AC3E}">
+        <p14:creationId xmlns:p14="http://schemas.microsoft.com/office/powerpoint/2010/main" val="2823808467"/>
+      </p:ext>
+    </p:extLst>
+  </p:cSld>
+  <p:clrMapOvr>
+    <a:masterClrMapping/>
+  </p:clrMapOvr>
+</p:sld>
+</file>
+
+<file path=ppt/slides/slide31.xml><?xml version="1.0" encoding="utf-8"?>
+<p:sld xmlns:a="http://schemas.openxmlformats.org/drawingml/2006/main" xmlns:r="http://schemas.openxmlformats.org/officeDocument/2006/relationships" xmlns:p="http://schemas.openxmlformats.org/presentationml/2006/main">
+  <p:cSld>
+    <p:spTree>
+      <p:nvGrpSpPr>
+        <p:cNvPr id="1" name="">
+          <a:extLst>
+            <a:ext uri="{FF2B5EF4-FFF2-40B4-BE49-F238E27FC236}">
+              <a16:creationId xmlns:a16="http://schemas.microsoft.com/office/drawing/2014/main" id="{FA1BAC92-0FFA-2002-63DC-2B6685E429DF}"/>
+            </a:ext>
+          </a:extLst>
+        </p:cNvPr>
+        <p:cNvGrpSpPr/>
+        <p:nvPr/>
+      </p:nvGrpSpPr>
+      <p:grpSpPr>
+        <a:xfrm>
+          <a:off x="0" y="0"/>
+          <a:ext cx="0" cy="0"/>
+          <a:chOff x="0" y="0"/>
+          <a:chExt cx="0" cy="0"/>
+        </a:xfrm>
+      </p:grpSpPr>
+      <p:sp>
+        <p:nvSpPr>
+          <p:cNvPr id="10" name="Title 9">
+            <a:extLst>
+              <a:ext uri="{FF2B5EF4-FFF2-40B4-BE49-F238E27FC236}">
+                <a16:creationId xmlns:a16="http://schemas.microsoft.com/office/drawing/2014/main" id="{7B59CD57-5A9B-6077-DDF0-8EE7A3C52A11}"/>
+              </a:ext>
+            </a:extLst>
+          </p:cNvPr>
+          <p:cNvSpPr>
+            <a:spLocks noGrp="1"/>
+          </p:cNvSpPr>
+          <p:nvPr>
+            <p:ph type="title"/>
+          </p:nvPr>
+        </p:nvSpPr>
+        <p:spPr>
+          <a:xfrm>
+            <a:off x="838200" y="256848"/>
+            <a:ext cx="11216640" cy="848378"/>
+          </a:xfrm>
+        </p:spPr>
+        <p:txBody>
+          <a:bodyPr>
+            <a:noAutofit/>
+          </a:bodyPr>
+          <a:lstStyle/>
+          <a:p>
+            <a:pPr marL="0" indent="0">
+              <a:buNone/>
+            </a:pPr>
+            <a:r>
+              <a:rPr lang="en-US" sz="4000"/>
+              <a:t>7. Code Organization and Modularization</a:t>
+            </a:r>
+          </a:p>
+        </p:txBody>
+      </p:sp>
+      <p:sp>
+        <p:nvSpPr>
+          <p:cNvPr id="11" name="Content Placeholder 10">
+            <a:extLst>
+              <a:ext uri="{FF2B5EF4-FFF2-40B4-BE49-F238E27FC236}">
+                <a16:creationId xmlns:a16="http://schemas.microsoft.com/office/drawing/2014/main" id="{6450C374-8195-C5CE-90CD-329F4B10C4CA}"/>
+              </a:ext>
+            </a:extLst>
+          </p:cNvPr>
+          <p:cNvSpPr>
+            <a:spLocks noGrp="1"/>
+          </p:cNvSpPr>
+          <p:nvPr>
+            <p:ph idx="1"/>
+          </p:nvPr>
+        </p:nvSpPr>
+        <p:spPr>
+          <a:xfrm>
+            <a:off x="838200" y="1105226"/>
+            <a:ext cx="10515600" cy="5495926"/>
+          </a:xfrm>
+        </p:spPr>
+        <p:txBody>
+          <a:bodyPr>
+            <a:normAutofit/>
+          </a:bodyPr>
+          <a:lstStyle/>
+          <a:p>
+            <a:pPr marL="342900" indent="-342900"/>
+            <a:r>
+              <a:rPr lang="en-US" sz="3000"/>
+              <a:t>7. Code Organization and Modularization (PEP 8 Reference)</a:t>
+            </a:r>
+          </a:p>
+          <a:p>
+            <a:pPr marL="342900" indent="-342900"/>
+            <a:r>
+              <a:rPr lang="en-US" sz="3000"/>
+              <a:t>•	Break large functions into smaller ones</a:t>
+            </a:r>
+          </a:p>
+          <a:p>
+            <a:pPr marL="342900" indent="-342900"/>
+            <a:r>
+              <a:rPr lang="en-US" sz="3000"/>
+              <a:t>o	Easier to audit and test for vulnerabilities.</a:t>
+            </a:r>
+          </a:p>
+          <a:p>
+            <a:pPr marL="342900" indent="-342900"/>
+            <a:r>
+              <a:rPr lang="en-US" sz="3000"/>
+              <a:t>•	Use consistent module structure</a:t>
+            </a:r>
+          </a:p>
+          <a:p>
+            <a:pPr marL="342900" indent="-342900"/>
+            <a:r>
+              <a:rPr lang="en-US" sz="3000"/>
+              <a:t>o	If security-critical logic is mixed with non-security functions, it can be harder to spot vulnerabilities.</a:t>
+            </a:r>
+          </a:p>
+          <a:p>
+            <a:pPr marL="685800" indent="-457200"/>
+            <a:endParaRPr lang="en-US" sz="2200" b="1">
+              <a:latin typeface="Consolas" panose="020B0609020204030204" pitchFamily="49" charset="0"/>
+            </a:endParaRPr>
+          </a:p>
+        </p:txBody>
+      </p:sp>
+    </p:spTree>
+    <p:extLst>
+      <p:ext uri="{BB962C8B-B14F-4D97-AF65-F5344CB8AC3E}">
+        <p14:creationId xmlns:p14="http://schemas.microsoft.com/office/powerpoint/2010/main" val="3373332484"/>
+      </p:ext>
+    </p:extLst>
+  </p:cSld>
+  <p:clrMapOvr>
+    <a:masterClrMapping/>
+  </p:clrMapOvr>
+</p:sld>
+</file>
+
+<file path=ppt/slides/slide32.xml><?xml version="1.0" encoding="utf-8"?>
+<p:sld xmlns:a="http://schemas.openxmlformats.org/drawingml/2006/main" xmlns:r="http://schemas.openxmlformats.org/officeDocument/2006/relationships" xmlns:p="http://schemas.openxmlformats.org/presentationml/2006/main">
+  <p:cSld>
+    <p:spTree>
+      <p:nvGrpSpPr>
+        <p:cNvPr id="1" name="">
+          <a:extLst>
+            <a:ext uri="{FF2B5EF4-FFF2-40B4-BE49-F238E27FC236}">
+              <a16:creationId xmlns:a16="http://schemas.microsoft.com/office/drawing/2014/main" id="{C37ED473-CF35-D995-81FE-830B0C85BA27}"/>
+            </a:ext>
+          </a:extLst>
+        </p:cNvPr>
+        <p:cNvGrpSpPr/>
+        <p:nvPr/>
+      </p:nvGrpSpPr>
+      <p:grpSpPr>
+        <a:xfrm>
+          <a:off x="0" y="0"/>
+          <a:ext cx="0" cy="0"/>
+          <a:chOff x="0" y="0"/>
+          <a:chExt cx="0" cy="0"/>
+        </a:xfrm>
+      </p:grpSpPr>
+      <p:sp>
+        <p:nvSpPr>
+          <p:cNvPr id="10" name="Title 9">
+            <a:extLst>
+              <a:ext uri="{FF2B5EF4-FFF2-40B4-BE49-F238E27FC236}">
+                <a16:creationId xmlns:a16="http://schemas.microsoft.com/office/drawing/2014/main" id="{AA92F330-A04C-2055-0F5D-DA4DF7A4BD8A}"/>
+              </a:ext>
+            </a:extLst>
+          </p:cNvPr>
+          <p:cNvSpPr>
+            <a:spLocks noGrp="1"/>
+          </p:cNvSpPr>
+          <p:nvPr>
+            <p:ph type="title"/>
+          </p:nvPr>
+        </p:nvSpPr>
+        <p:spPr>
+          <a:xfrm>
+            <a:off x="838200" y="256848"/>
+            <a:ext cx="11216640" cy="848378"/>
+          </a:xfrm>
+        </p:spPr>
+        <p:txBody>
+          <a:bodyPr>
+            <a:noAutofit/>
+          </a:bodyPr>
+          <a:lstStyle/>
+          <a:p>
+            <a:pPr marL="342900" indent="-342900"/>
+            <a:r>
+              <a:rPr lang="en-US" sz="4000"/>
+              <a:t>8. Documentation and Comments</a:t>
+            </a:r>
+          </a:p>
+        </p:txBody>
+      </p:sp>
+      <p:sp>
+        <p:nvSpPr>
+          <p:cNvPr id="11" name="Content Placeholder 10">
+            <a:extLst>
+              <a:ext uri="{FF2B5EF4-FFF2-40B4-BE49-F238E27FC236}">
+                <a16:creationId xmlns:a16="http://schemas.microsoft.com/office/drawing/2014/main" id="{C77371AF-8EDF-A1E7-ED70-08FE2C872AC6}"/>
+              </a:ext>
+            </a:extLst>
+          </p:cNvPr>
+          <p:cNvSpPr>
+            <a:spLocks noGrp="1"/>
+          </p:cNvSpPr>
+          <p:nvPr>
+            <p:ph idx="1"/>
+          </p:nvPr>
+        </p:nvSpPr>
+        <p:spPr>
+          <a:xfrm>
+            <a:off x="838200" y="1105226"/>
+            <a:ext cx="10515600" cy="5495926"/>
+          </a:xfrm>
+        </p:spPr>
+        <p:txBody>
+          <a:bodyPr>
+            <a:normAutofit/>
+          </a:bodyPr>
+          <a:lstStyle/>
+          <a:p>
+            <a:pPr marL="342900" indent="-342900"/>
+            <a:r>
+              <a:rPr lang="en-US" sz="3000"/>
+              <a:t>8. Documentation (PEP 8 Reference) and Comments (PEP 8 Reference)</a:t>
+            </a:r>
+          </a:p>
+          <a:p>
+            <a:pPr marL="342900" indent="-342900"/>
+            <a:r>
+              <a:rPr lang="en-US" sz="3000"/>
+              <a:t>•	Use docstrings for function behavior and security concerns</a:t>
+            </a:r>
+          </a:p>
+          <a:p>
+            <a:pPr marL="342900" indent="-342900"/>
+            <a:r>
+              <a:rPr lang="en-US" sz="3000"/>
+              <a:t>•	Avoid inline comments disclosing security-sensitive information</a:t>
+            </a:r>
+          </a:p>
+          <a:p>
+            <a:pPr marL="342900" indent="-342900"/>
+            <a:r>
+              <a:rPr lang="en-US" sz="3000"/>
+              <a:t>o	Instead of: # Hashing passwords with MD5 (insecure)</a:t>
+            </a:r>
+          </a:p>
+          <a:p>
+            <a:pPr marL="342900" indent="-342900"/>
+            <a:r>
+              <a:rPr lang="en-US" sz="3000"/>
+              <a:t>o	Do This: # Securely hashing passwords using bcrypt</a:t>
+            </a:r>
+          </a:p>
+          <a:p>
+            <a:pPr marL="685800" indent="-457200"/>
+            <a:endParaRPr lang="en-US" sz="2200" b="1">
+              <a:latin typeface="Consolas" panose="020B0609020204030204" pitchFamily="49" charset="0"/>
+            </a:endParaRPr>
+          </a:p>
+        </p:txBody>
+      </p:sp>
+    </p:spTree>
+    <p:extLst>
+      <p:ext uri="{BB962C8B-B14F-4D97-AF65-F5344CB8AC3E}">
+        <p14:creationId xmlns:p14="http://schemas.microsoft.com/office/powerpoint/2010/main" val="3202917145"/>
       </p:ext>
     </p:extLst>
   </p:cSld>
@@ -7098,7 +8670,7 @@
           <a:p>
             <a:r>
               <a:rPr lang="en-US"/>
-              <a:t>1.1 Introduction to Secure Version Control</a:t>
+              <a:t>Introduction to Secure Version Control</a:t>
             </a:r>
           </a:p>
         </p:txBody>
@@ -7266,7 +8838,7 @@
           <a:p>
             <a:r>
               <a:rPr lang="en-US"/>
-              <a:t>1.1 Introduction to Secure Version Control</a:t>
+              <a:t>Introduction to Secure Version Control</a:t>
             </a:r>
           </a:p>
         </p:txBody>
@@ -7373,7 +8945,7 @@
           <a:p>
             <a:r>
               <a:rPr lang="en-US"/>
-              <a:t>1.2 Secure Repository Setup</a:t>
+              <a:t>Secure Repository Setup</a:t>
             </a:r>
           </a:p>
         </p:txBody>

--- a/Slides-Day1.pptx
+++ b/Slides-Day1.pptx
@@ -32,7 +32,7 @@
     <p:sldId id="304" r:id="rId26"/>
     <p:sldId id="305" r:id="rId27"/>
     <p:sldId id="306" r:id="rId28"/>
-    <p:sldId id="308" r:id="rId29"/>
+    <p:sldId id="323" r:id="rId29"/>
     <p:sldId id="310" r:id="rId30"/>
     <p:sldId id="309" r:id="rId31"/>
     <p:sldId id="311" r:id="rId32"/>
@@ -293,7 +293,7 @@
           <a:p>
             <a:fld id="{CD989C08-BA69-4AD3-98E9-D53C63F6E1B1}" type="datetimeFigureOut">
               <a:rPr lang="en-US" smtClean="0"/>
-              <a:t>3/6/2025</a:t>
+              <a:t>3/7/2025</a:t>
             </a:fld>
             <a:endParaRPr lang="en-US"/>
           </a:p>
@@ -491,7 +491,7 @@
           <a:p>
             <a:fld id="{CD989C08-BA69-4AD3-98E9-D53C63F6E1B1}" type="datetimeFigureOut">
               <a:rPr lang="en-US" smtClean="0"/>
-              <a:t>3/6/2025</a:t>
+              <a:t>3/7/2025</a:t>
             </a:fld>
             <a:endParaRPr lang="en-US"/>
           </a:p>
@@ -699,7 +699,7 @@
           <a:p>
             <a:fld id="{CD989C08-BA69-4AD3-98E9-D53C63F6E1B1}" type="datetimeFigureOut">
               <a:rPr lang="en-US" smtClean="0"/>
-              <a:t>3/6/2025</a:t>
+              <a:t>3/7/2025</a:t>
             </a:fld>
             <a:endParaRPr lang="en-US"/>
           </a:p>
@@ -897,7 +897,7 @@
           <a:p>
             <a:fld id="{CD989C08-BA69-4AD3-98E9-D53C63F6E1B1}" type="datetimeFigureOut">
               <a:rPr lang="en-US" smtClean="0"/>
-              <a:t>3/6/2025</a:t>
+              <a:t>3/7/2025</a:t>
             </a:fld>
             <a:endParaRPr lang="en-US"/>
           </a:p>
@@ -1172,7 +1172,7 @@
           <a:p>
             <a:fld id="{CD989C08-BA69-4AD3-98E9-D53C63F6E1B1}" type="datetimeFigureOut">
               <a:rPr lang="en-US" smtClean="0"/>
-              <a:t>3/6/2025</a:t>
+              <a:t>3/7/2025</a:t>
             </a:fld>
             <a:endParaRPr lang="en-US"/>
           </a:p>
@@ -1437,7 +1437,7 @@
           <a:p>
             <a:fld id="{CD989C08-BA69-4AD3-98E9-D53C63F6E1B1}" type="datetimeFigureOut">
               <a:rPr lang="en-US" smtClean="0"/>
-              <a:t>3/6/2025</a:t>
+              <a:t>3/7/2025</a:t>
             </a:fld>
             <a:endParaRPr lang="en-US"/>
           </a:p>
@@ -1849,7 +1849,7 @@
           <a:p>
             <a:fld id="{CD989C08-BA69-4AD3-98E9-D53C63F6E1B1}" type="datetimeFigureOut">
               <a:rPr lang="en-US" smtClean="0"/>
-              <a:t>3/6/2025</a:t>
+              <a:t>3/7/2025</a:t>
             </a:fld>
             <a:endParaRPr lang="en-US"/>
           </a:p>
@@ -1990,7 +1990,7 @@
           <a:p>
             <a:fld id="{CD989C08-BA69-4AD3-98E9-D53C63F6E1B1}" type="datetimeFigureOut">
               <a:rPr lang="en-US" smtClean="0"/>
-              <a:t>3/6/2025</a:t>
+              <a:t>3/7/2025</a:t>
             </a:fld>
             <a:endParaRPr lang="en-US"/>
           </a:p>
@@ -2103,7 +2103,7 @@
           <a:p>
             <a:fld id="{CD989C08-BA69-4AD3-98E9-D53C63F6E1B1}" type="datetimeFigureOut">
               <a:rPr lang="en-US" smtClean="0"/>
-              <a:t>3/6/2025</a:t>
+              <a:t>3/7/2025</a:t>
             </a:fld>
             <a:endParaRPr lang="en-US"/>
           </a:p>
@@ -2414,7 +2414,7 @@
           <a:p>
             <a:fld id="{CD989C08-BA69-4AD3-98E9-D53C63F6E1B1}" type="datetimeFigureOut">
               <a:rPr lang="en-US" smtClean="0"/>
-              <a:t>3/6/2025</a:t>
+              <a:t>3/7/2025</a:t>
             </a:fld>
             <a:endParaRPr lang="en-US"/>
           </a:p>
@@ -2702,7 +2702,7 @@
           <a:p>
             <a:fld id="{CD989C08-BA69-4AD3-98E9-D53C63F6E1B1}" type="datetimeFigureOut">
               <a:rPr lang="en-US" smtClean="0"/>
-              <a:t>3/6/2025</a:t>
+              <a:t>3/7/2025</a:t>
             </a:fld>
             <a:endParaRPr lang="en-US"/>
           </a:p>
@@ -2943,7 +2943,7 @@
           <a:p>
             <a:fld id="{CD989C08-BA69-4AD3-98E9-D53C63F6E1B1}" type="datetimeFigureOut">
               <a:rPr lang="en-US" smtClean="0"/>
-              <a:t>3/6/2025</a:t>
+              <a:t>3/7/2025</a:t>
             </a:fld>
             <a:endParaRPr lang="en-US"/>
           </a:p>
@@ -7230,7 +7230,7 @@
         <p:cNvPr id="1" name="">
           <a:extLst>
             <a:ext uri="{FF2B5EF4-FFF2-40B4-BE49-F238E27FC236}">
-              <a16:creationId xmlns:a16="http://schemas.microsoft.com/office/drawing/2014/main" id="{51039C52-E8D1-14E2-B6C2-FCFA9FA94570}"/>
+              <a16:creationId xmlns:a16="http://schemas.microsoft.com/office/drawing/2014/main" id="{0750966C-718F-864C-CD0D-440669808B1F}"/>
             </a:ext>
           </a:extLst>
         </p:cNvPr>
@@ -7250,7 +7250,7 @@
           <p:cNvPr id="3" name="Picture 2" descr="A white and blue background&#10;&#10;Description automatically generated">
             <a:extLst>
               <a:ext uri="{FF2B5EF4-FFF2-40B4-BE49-F238E27FC236}">
-                <a16:creationId xmlns:a16="http://schemas.microsoft.com/office/drawing/2014/main" id="{07B4228A-552F-F35F-AD6A-92F7F5B9F52A}"/>
+                <a16:creationId xmlns:a16="http://schemas.microsoft.com/office/drawing/2014/main" id="{B48C3E7C-CF9E-C26C-FF60-392E95EC8B00}"/>
               </a:ext>
             </a:extLst>
           </p:cNvPr>
@@ -7280,7 +7280,7 @@
           <p:cNvPr id="4" name="TextBox 3">
             <a:extLst>
               <a:ext uri="{FF2B5EF4-FFF2-40B4-BE49-F238E27FC236}">
-                <a16:creationId xmlns:a16="http://schemas.microsoft.com/office/drawing/2014/main" id="{FA379D09-8557-E352-251A-A6C1A085A1FF}"/>
+                <a16:creationId xmlns:a16="http://schemas.microsoft.com/office/drawing/2014/main" id="{A85384A2-8782-B370-45DE-D72F50D3DB5E}"/>
               </a:ext>
             </a:extLst>
           </p:cNvPr>
@@ -7313,7 +7313,7 @@
                 <a:latin typeface="Arial" panose="020B0604020202020204" pitchFamily="34" charset="0"/>
                 <a:cs typeface="Arial" panose="020B0604020202020204" pitchFamily="34" charset="0"/>
               </a:rPr>
-              <a:t>Style Guidelines for Maintainable Code</a:t>
+              <a:t>3. Code Style Guidelines for Maintainable Code</a:t>
             </a:r>
             <a:endParaRPr lang="en-US" sz="3600" dirty="0">
               <a:solidFill>
@@ -7332,7 +7332,7 @@
           <p:cNvPr id="5" name="TextBox 4">
             <a:extLst>
               <a:ext uri="{FF2B5EF4-FFF2-40B4-BE49-F238E27FC236}">
-                <a16:creationId xmlns:a16="http://schemas.microsoft.com/office/drawing/2014/main" id="{45228532-259B-47ED-96B5-0002B32CAB46}"/>
+                <a16:creationId xmlns:a16="http://schemas.microsoft.com/office/drawing/2014/main" id="{A167C532-E69C-0AA8-8415-63B51BF0C8C2}"/>
               </a:ext>
             </a:extLst>
           </p:cNvPr>
@@ -7405,7 +7405,7 @@
     </p:spTree>
     <p:extLst>
       <p:ext uri="{BB962C8B-B14F-4D97-AF65-F5344CB8AC3E}">
-        <p14:creationId xmlns:p14="http://schemas.microsoft.com/office/powerpoint/2010/main" val="4292300051"/>
+        <p14:creationId xmlns:p14="http://schemas.microsoft.com/office/powerpoint/2010/main" val="891498173"/>
       </p:ext>
     </p:extLst>
   </p:cSld>
@@ -7506,7 +7506,7 @@
                 <a:latin typeface="Arial" panose="020B0604020202020204" pitchFamily="34" charset="0"/>
                 <a:cs typeface="Arial" panose="020B0604020202020204" pitchFamily="34" charset="0"/>
               </a:rPr>
-              <a:t>1. Readability and Maintainability</a:t>
+              <a:t>Guideline 1. Readability and Maintainability</a:t>
             </a:r>
             <a:endParaRPr lang="en-US" sz="3600" dirty="0">
               <a:solidFill>
@@ -8020,7 +8020,7 @@
         <p:spPr>
           <a:xfrm>
             <a:off x="604266" y="136955"/>
-            <a:ext cx="11170508" cy="646331"/>
+            <a:ext cx="11170508" cy="1200329"/>
           </a:xfrm>
           <a:prstGeom prst="rect">
             <a:avLst/>
@@ -8043,7 +8043,7 @@
                 <a:latin typeface="Arial" panose="020B0604020202020204" pitchFamily="34" charset="0"/>
                 <a:cs typeface="Arial" panose="020B0604020202020204" pitchFamily="34" charset="0"/>
               </a:rPr>
-              <a:t>2. Naming Conventions for Clarity and Security </a:t>
+              <a:t>Guideline 2. Naming Conventions for Clarity and Security </a:t>
             </a:r>
             <a:endParaRPr lang="en-US" sz="3600" dirty="0">
               <a:solidFill>
@@ -8230,7 +8230,7 @@
                 <a:latin typeface="Arial" panose="020B0604020202020204" pitchFamily="34" charset="0"/>
                 <a:cs typeface="Arial" panose="020B0604020202020204" pitchFamily="34" charset="0"/>
               </a:rPr>
-              <a:t>3. Avoid wildcard imports</a:t>
+              <a:t>Guideline 3. Avoid wildcard imports</a:t>
             </a:r>
             <a:endParaRPr lang="en-US" sz="3600" dirty="0">
               <a:solidFill>
@@ -8411,7 +8411,7 @@
         <p:spPr>
           <a:xfrm>
             <a:off x="604266" y="136955"/>
-            <a:ext cx="11170508" cy="646331"/>
+            <a:ext cx="11170508" cy="1200329"/>
           </a:xfrm>
           <a:prstGeom prst="rect">
             <a:avLst/>
@@ -8434,7 +8434,7 @@
                 <a:latin typeface="Arial" panose="020B0604020202020204" pitchFamily="34" charset="0"/>
                 <a:cs typeface="Arial" panose="020B0604020202020204" pitchFamily="34" charset="0"/>
               </a:rPr>
-              <a:t>4. Whitespace and Readability to Avoid Logical Errors </a:t>
+              <a:t>Guideline 4. Whitespace and Readability to Avoid Logical Errors </a:t>
             </a:r>
             <a:endParaRPr lang="en-US" sz="3600" dirty="0">
               <a:solidFill>
@@ -8732,7 +8732,7 @@
                 <a:latin typeface="Arial" panose="020B0604020202020204" pitchFamily="34" charset="0"/>
                 <a:cs typeface="Arial" panose="020B0604020202020204" pitchFamily="34" charset="0"/>
               </a:rPr>
-              <a:t>5. Proper Exception Handling </a:t>
+              <a:t>Guideline 5. Proper Exception Handling </a:t>
             </a:r>
             <a:endParaRPr lang="en-US" sz="3600" dirty="0">
               <a:solidFill>
@@ -9023,7 +9023,7 @@
                 <a:latin typeface="Arial" panose="020B0604020202020204" pitchFamily="34" charset="0"/>
                 <a:cs typeface="Arial" panose="020B0604020202020204" pitchFamily="34" charset="0"/>
               </a:rPr>
-              <a:t>5. Proper Exception Handling </a:t>
+              <a:t>Guideline 5. Proper Exception Handling </a:t>
             </a:r>
             <a:endParaRPr lang="en-US" sz="3600" dirty="0">
               <a:solidFill>
@@ -9240,7 +9240,7 @@
                 <a:latin typeface="Arial" panose="020B0604020202020204" pitchFamily="34" charset="0"/>
                 <a:cs typeface="Arial" panose="020B0604020202020204" pitchFamily="34" charset="0"/>
               </a:rPr>
-              <a:t>6. Documentation and Comments</a:t>
+              <a:t>Guideline 6. Documentation and Comments</a:t>
             </a:r>
             <a:endParaRPr lang="en-US" sz="3600" dirty="0">
               <a:solidFill>
@@ -9268,8 +9268,8 @@
         </p:nvSpPr>
         <p:spPr>
           <a:xfrm>
-            <a:off x="604266" y="1308769"/>
-            <a:ext cx="10908180" cy="4031873"/>
+            <a:off x="604266" y="889486"/>
+            <a:ext cx="10908180" cy="6001643"/>
           </a:xfrm>
           <a:prstGeom prst="rect">
             <a:avLst/>
@@ -9287,18 +9287,21 @@
               <a:buChar char="•"/>
             </a:pPr>
             <a:r>
+              <a:rPr lang="en-US" sz="3200">
+                <a:hlinkClick r:id="rId3"/>
+              </a:rPr>
+              <a:t>PEP8 Reference</a:t>
+            </a:r>
+            <a:endParaRPr lang="en-US" sz="3200"/>
+          </a:p>
+          <a:p>
+            <a:pPr marL="457200" indent="-457200">
+              <a:buFont typeface="Arial" panose="020B0604020202020204" pitchFamily="34" charset="0"/>
+              <a:buChar char="•"/>
+            </a:pPr>
+            <a:r>
               <a:rPr lang="en-US" sz="3200"/>
-              <a:t>Documentation (PEP 8 Reference) and Comments (PEP 8 Reference)</a:t>
-            </a:r>
-          </a:p>
-          <a:p>
-            <a:pPr marL="457200" indent="-457200">
-              <a:buFont typeface="Arial" panose="020B0604020202020204" pitchFamily="34" charset="0"/>
-              <a:buChar char="•"/>
-            </a:pPr>
-            <a:r>
-              <a:rPr lang="en-US" sz="3200"/>
-              <a:t>Use docstrings for function behavior and security concerns</a:t>
+              <a:t>Use docstrings for function behavior and security emphasis</a:t>
             </a:r>
           </a:p>
           <a:p>
@@ -9312,13 +9315,45 @@
             </a:r>
           </a:p>
           <a:p>
+            <a:pPr marL="914400" lvl="1" indent="-457200">
+              <a:buFont typeface="Arial" panose="020B0604020202020204" pitchFamily="34" charset="0"/>
+              <a:buChar char="•"/>
+            </a:pPr>
+            <a:r>
+              <a:rPr lang="en-US" sz="3200"/>
+              <a:t>Instead of: </a:t>
+            </a:r>
+          </a:p>
+          <a:p>
             <a:pPr marL="457200" indent="-457200">
               <a:buFont typeface="Arial" panose="020B0604020202020204" pitchFamily="34" charset="0"/>
               <a:buChar char="•"/>
             </a:pPr>
+            <a:endParaRPr lang="en-US" sz="3200"/>
+          </a:p>
+          <a:p>
+            <a:pPr marL="914400" lvl="1"/>
+            <a:r>
+              <a:rPr lang="en-US" sz="2400" b="1">
+                <a:latin typeface="Consolas" panose="020B0609020204030204" pitchFamily="49" charset="0"/>
+              </a:rPr>
+              <a:t>	# Hashing passwords with MD5 (insecure)</a:t>
+            </a:r>
+          </a:p>
+          <a:p>
+            <a:pPr marL="914400" lvl="1"/>
+            <a:endParaRPr lang="en-US" sz="2400" b="1">
+              <a:latin typeface="Consolas" panose="020B0609020204030204" pitchFamily="49" charset="0"/>
+            </a:endParaRPr>
+          </a:p>
+          <a:p>
+            <a:pPr marL="914400" lvl="1" indent="-457200">
+              <a:buFont typeface="Arial" panose="020B0604020202020204" pitchFamily="34" charset="0"/>
+              <a:buChar char="•"/>
+            </a:pPr>
             <a:r>
               <a:rPr lang="en-US" sz="3200"/>
-              <a:t>Instead of: # Hashing passwords with MD5 (insecure)</a:t>
+              <a:t>Do this: </a:t>
             </a:r>
           </a:p>
           <a:p>
@@ -9326,10 +9361,22 @@
               <a:buFont typeface="Arial" panose="020B0604020202020204" pitchFamily="34" charset="0"/>
               <a:buChar char="•"/>
             </a:pPr>
-            <a:r>
-              <a:rPr lang="en-US" sz="3200"/>
-              <a:t>Do This: # Securely hashing passwords using bcrypt</a:t>
-            </a:r>
+            <a:endParaRPr lang="en-US" sz="3200"/>
+          </a:p>
+          <a:p>
+            <a:pPr marL="914400" lvl="1"/>
+            <a:r>
+              <a:rPr lang="en-US" sz="2400" b="1">
+                <a:latin typeface="Consolas" panose="020B0609020204030204" pitchFamily="49" charset="0"/>
+              </a:rPr>
+              <a:t>	# Securely hash passwords</a:t>
+            </a:r>
+          </a:p>
+          <a:p>
+            <a:pPr marL="914400" lvl="1"/>
+            <a:endParaRPr lang="en-US" sz="2400" b="1">
+              <a:latin typeface="Consolas" panose="020B0609020204030204" pitchFamily="49" charset="0"/>
+            </a:endParaRPr>
           </a:p>
         </p:txBody>
       </p:sp>

--- a/Slides-Day1.pptx
+++ b/Slides-Day1.pptx
@@ -293,7 +293,7 @@
           <a:p>
             <a:fld id="{CD989C08-BA69-4AD3-98E9-D53C63F6E1B1}" type="datetimeFigureOut">
               <a:rPr lang="en-US" smtClean="0"/>
-              <a:t>3/7/2025</a:t>
+              <a:t>4/6/2025</a:t>
             </a:fld>
             <a:endParaRPr lang="en-US"/>
           </a:p>
@@ -491,7 +491,7 @@
           <a:p>
             <a:fld id="{CD989C08-BA69-4AD3-98E9-D53C63F6E1B1}" type="datetimeFigureOut">
               <a:rPr lang="en-US" smtClean="0"/>
-              <a:t>3/7/2025</a:t>
+              <a:t>4/6/2025</a:t>
             </a:fld>
             <a:endParaRPr lang="en-US"/>
           </a:p>
@@ -699,7 +699,7 @@
           <a:p>
             <a:fld id="{CD989C08-BA69-4AD3-98E9-D53C63F6E1B1}" type="datetimeFigureOut">
               <a:rPr lang="en-US" smtClean="0"/>
-              <a:t>3/7/2025</a:t>
+              <a:t>4/6/2025</a:t>
             </a:fld>
             <a:endParaRPr lang="en-US"/>
           </a:p>
@@ -897,7 +897,7 @@
           <a:p>
             <a:fld id="{CD989C08-BA69-4AD3-98E9-D53C63F6E1B1}" type="datetimeFigureOut">
               <a:rPr lang="en-US" smtClean="0"/>
-              <a:t>3/7/2025</a:t>
+              <a:t>4/6/2025</a:t>
             </a:fld>
             <a:endParaRPr lang="en-US"/>
           </a:p>
@@ -1172,7 +1172,7 @@
           <a:p>
             <a:fld id="{CD989C08-BA69-4AD3-98E9-D53C63F6E1B1}" type="datetimeFigureOut">
               <a:rPr lang="en-US" smtClean="0"/>
-              <a:t>3/7/2025</a:t>
+              <a:t>4/6/2025</a:t>
             </a:fld>
             <a:endParaRPr lang="en-US"/>
           </a:p>
@@ -1437,7 +1437,7 @@
           <a:p>
             <a:fld id="{CD989C08-BA69-4AD3-98E9-D53C63F6E1B1}" type="datetimeFigureOut">
               <a:rPr lang="en-US" smtClean="0"/>
-              <a:t>3/7/2025</a:t>
+              <a:t>4/6/2025</a:t>
             </a:fld>
             <a:endParaRPr lang="en-US"/>
           </a:p>
@@ -1849,7 +1849,7 @@
           <a:p>
             <a:fld id="{CD989C08-BA69-4AD3-98E9-D53C63F6E1B1}" type="datetimeFigureOut">
               <a:rPr lang="en-US" smtClean="0"/>
-              <a:t>3/7/2025</a:t>
+              <a:t>4/6/2025</a:t>
             </a:fld>
             <a:endParaRPr lang="en-US"/>
           </a:p>
@@ -1990,7 +1990,7 @@
           <a:p>
             <a:fld id="{CD989C08-BA69-4AD3-98E9-D53C63F6E1B1}" type="datetimeFigureOut">
               <a:rPr lang="en-US" smtClean="0"/>
-              <a:t>3/7/2025</a:t>
+              <a:t>4/6/2025</a:t>
             </a:fld>
             <a:endParaRPr lang="en-US"/>
           </a:p>
@@ -2103,7 +2103,7 @@
           <a:p>
             <a:fld id="{CD989C08-BA69-4AD3-98E9-D53C63F6E1B1}" type="datetimeFigureOut">
               <a:rPr lang="en-US" smtClean="0"/>
-              <a:t>3/7/2025</a:t>
+              <a:t>4/6/2025</a:t>
             </a:fld>
             <a:endParaRPr lang="en-US"/>
           </a:p>
@@ -2414,7 +2414,7 @@
           <a:p>
             <a:fld id="{CD989C08-BA69-4AD3-98E9-D53C63F6E1B1}" type="datetimeFigureOut">
               <a:rPr lang="en-US" smtClean="0"/>
-              <a:t>3/7/2025</a:t>
+              <a:t>4/6/2025</a:t>
             </a:fld>
             <a:endParaRPr lang="en-US"/>
           </a:p>
@@ -2702,7 +2702,7 @@
           <a:p>
             <a:fld id="{CD989C08-BA69-4AD3-98E9-D53C63F6E1B1}" type="datetimeFigureOut">
               <a:rPr lang="en-US" smtClean="0"/>
-              <a:t>3/7/2025</a:t>
+              <a:t>4/6/2025</a:t>
             </a:fld>
             <a:endParaRPr lang="en-US"/>
           </a:p>
@@ -2943,7 +2943,7 @@
           <a:p>
             <a:fld id="{CD989C08-BA69-4AD3-98E9-D53C63F6E1B1}" type="datetimeFigureOut">
               <a:rPr lang="en-US" smtClean="0"/>
-              <a:t>3/7/2025</a:t>
+              <a:t>4/6/2025</a:t>
             </a:fld>
             <a:endParaRPr lang="en-US"/>
           </a:p>
